--- a/presentation/Telepathy_EEG_Hackathon_Presentation.pptx
+++ b/presentation/Telepathy_EEG_Hackathon_Presentation.pptx
@@ -12,7 +12,6 @@
     <p:sldId id="260" r:id="rId7"/>
     <p:sldId id="261" r:id="rId8"/>
     <p:sldId id="262" r:id="rId9"/>
-    <p:sldId id="263" r:id="rId10"/>
   </p:sldIdLst>
   <p:sldSz cx="9144000" cy="5143500"/>
   <p:notesSz cx="7772400" cy="10058400"/>
@@ -50,7 +49,7 @@
         <p:txBody>
           <a:bodyPr/>
           <a:p>
-            <a:fld id="{C2C190B2-1EE5-4A38-8919-8899FC8173C1}" type="slidenum">
+            <a:fld id="{84B8F6EC-E242-485F-B095-C92AC8990FBF}" type="slidenum">
               <a:t>&lt;#&gt;</a:t>
             </a:fld>
           </a:p>
@@ -106,14 +105,14 @@
             <a:noAutofit/>
           </a:bodyPr>
           <a:p>
-            <a:pPr indent="0">
+            <a:pPr indent="0" algn="ctr">
               <a:buNone/>
             </a:pPr>
-            <a:endParaRPr b="0" lang="en-US" sz="1800" spc="-1" strike="noStrike">
-              <a:solidFill>
-                <a:srgbClr val="000000"/>
-              </a:solidFill>
-              <a:latin typeface="Calibri"/>
+            <a:endParaRPr b="0" lang="en-US" sz="4400" spc="-1" strike="noStrike">
+              <a:solidFill>
+                <a:srgbClr val="000000"/>
+              </a:solidFill>
+              <a:latin typeface="Arial"/>
             </a:endParaRPr>
           </a:p>
         </p:txBody>
@@ -156,7 +155,7 @@
               <a:solidFill>
                 <a:srgbClr val="000000"/>
               </a:solidFill>
-              <a:latin typeface="Calibri"/>
+              <a:latin typeface="Arial"/>
             </a:endParaRPr>
           </a:p>
         </p:txBody>
@@ -199,7 +198,7 @@
               <a:solidFill>
                 <a:srgbClr val="000000"/>
               </a:solidFill>
-              <a:latin typeface="Calibri"/>
+              <a:latin typeface="Arial"/>
             </a:endParaRPr>
           </a:p>
         </p:txBody>
@@ -218,7 +217,7 @@
         <p:txBody>
           <a:bodyPr/>
           <a:p>
-            <a:fld id="{18D7F2EE-8DDF-452E-AF15-195F83443D7F}" type="slidenum">
+            <a:fld id="{0C9D8720-6C4C-4149-BCAC-EB1821415A3E}" type="slidenum">
               <a:t>&lt;#&gt;</a:t>
             </a:fld>
           </a:p>
@@ -274,14 +273,14 @@
             <a:noAutofit/>
           </a:bodyPr>
           <a:p>
-            <a:pPr indent="0">
+            <a:pPr indent="0" algn="ctr">
               <a:buNone/>
             </a:pPr>
-            <a:endParaRPr b="0" lang="en-US" sz="1800" spc="-1" strike="noStrike">
-              <a:solidFill>
-                <a:srgbClr val="000000"/>
-              </a:solidFill>
-              <a:latin typeface="Calibri"/>
+            <a:endParaRPr b="0" lang="en-US" sz="4400" spc="-1" strike="noStrike">
+              <a:solidFill>
+                <a:srgbClr val="000000"/>
+              </a:solidFill>
+              <a:latin typeface="Arial"/>
             </a:endParaRPr>
           </a:p>
         </p:txBody>
@@ -324,7 +323,7 @@
               <a:solidFill>
                 <a:srgbClr val="000000"/>
               </a:solidFill>
-              <a:latin typeface="Calibri"/>
+              <a:latin typeface="Arial"/>
             </a:endParaRPr>
           </a:p>
         </p:txBody>
@@ -367,7 +366,7 @@
               <a:solidFill>
                 <a:srgbClr val="000000"/>
               </a:solidFill>
-              <a:latin typeface="Calibri"/>
+              <a:latin typeface="Arial"/>
             </a:endParaRPr>
           </a:p>
         </p:txBody>
@@ -410,7 +409,7 @@
               <a:solidFill>
                 <a:srgbClr val="000000"/>
               </a:solidFill>
-              <a:latin typeface="Calibri"/>
+              <a:latin typeface="Arial"/>
             </a:endParaRPr>
           </a:p>
         </p:txBody>
@@ -453,7 +452,7 @@
               <a:solidFill>
                 <a:srgbClr val="000000"/>
               </a:solidFill>
-              <a:latin typeface="Calibri"/>
+              <a:latin typeface="Arial"/>
             </a:endParaRPr>
           </a:p>
         </p:txBody>
@@ -472,7 +471,7 @@
         <p:txBody>
           <a:bodyPr/>
           <a:p>
-            <a:fld id="{0DA78595-AC28-4A10-A771-D93342C8CF3B}" type="slidenum">
+            <a:fld id="{3C2876F2-1A47-4201-9A85-1F365A3D33F4}" type="slidenum">
               <a:t>&lt;#&gt;</a:t>
             </a:fld>
           </a:p>
@@ -528,14 +527,14 @@
             <a:noAutofit/>
           </a:bodyPr>
           <a:p>
-            <a:pPr indent="0">
+            <a:pPr indent="0" algn="ctr">
               <a:buNone/>
             </a:pPr>
-            <a:endParaRPr b="0" lang="en-US" sz="1800" spc="-1" strike="noStrike">
-              <a:solidFill>
-                <a:srgbClr val="000000"/>
-              </a:solidFill>
-              <a:latin typeface="Calibri"/>
+            <a:endParaRPr b="0" lang="en-US" sz="4400" spc="-1" strike="noStrike">
+              <a:solidFill>
+                <a:srgbClr val="000000"/>
+              </a:solidFill>
+              <a:latin typeface="Arial"/>
             </a:endParaRPr>
           </a:p>
         </p:txBody>
@@ -578,7 +577,7 @@
               <a:solidFill>
                 <a:srgbClr val="000000"/>
               </a:solidFill>
-              <a:latin typeface="Calibri"/>
+              <a:latin typeface="Arial"/>
             </a:endParaRPr>
           </a:p>
         </p:txBody>
@@ -621,7 +620,7 @@
               <a:solidFill>
                 <a:srgbClr val="000000"/>
               </a:solidFill>
-              <a:latin typeface="Calibri"/>
+              <a:latin typeface="Arial"/>
             </a:endParaRPr>
           </a:p>
         </p:txBody>
@@ -664,7 +663,7 @@
               <a:solidFill>
                 <a:srgbClr val="000000"/>
               </a:solidFill>
-              <a:latin typeface="Calibri"/>
+              <a:latin typeface="Arial"/>
             </a:endParaRPr>
           </a:p>
         </p:txBody>
@@ -707,7 +706,7 @@
               <a:solidFill>
                 <a:srgbClr val="000000"/>
               </a:solidFill>
-              <a:latin typeface="Calibri"/>
+              <a:latin typeface="Arial"/>
             </a:endParaRPr>
           </a:p>
         </p:txBody>
@@ -750,7 +749,7 @@
               <a:solidFill>
                 <a:srgbClr val="000000"/>
               </a:solidFill>
-              <a:latin typeface="Calibri"/>
+              <a:latin typeface="Arial"/>
             </a:endParaRPr>
           </a:p>
         </p:txBody>
@@ -793,7 +792,7 @@
               <a:solidFill>
                 <a:srgbClr val="000000"/>
               </a:solidFill>
-              <a:latin typeface="Calibri"/>
+              <a:latin typeface="Arial"/>
             </a:endParaRPr>
           </a:p>
         </p:txBody>
@@ -812,7 +811,7 @@
         <p:txBody>
           <a:bodyPr/>
           <a:p>
-            <a:fld id="{03C6EA40-FFC1-4567-9632-52AD1C5FDA77}" type="slidenum">
+            <a:fld id="{9083C41B-18B4-4CD4-84D6-253B3D57A16C}" type="slidenum">
               <a:t>&lt;#&gt;</a:t>
             </a:fld>
           </a:p>
@@ -868,14 +867,14 @@
             <a:noAutofit/>
           </a:bodyPr>
           <a:p>
-            <a:pPr indent="0">
+            <a:pPr indent="0" algn="ctr">
               <a:buNone/>
             </a:pPr>
-            <a:endParaRPr b="0" lang="en-US" sz="1800" spc="-1" strike="noStrike">
-              <a:solidFill>
-                <a:srgbClr val="000000"/>
-              </a:solidFill>
-              <a:latin typeface="Calibri"/>
+            <a:endParaRPr b="0" lang="en-US" sz="4400" spc="-1" strike="noStrike">
+              <a:solidFill>
+                <a:srgbClr val="000000"/>
+              </a:solidFill>
+              <a:latin typeface="Arial"/>
             </a:endParaRPr>
           </a:p>
         </p:txBody>
@@ -934,7 +933,7 @@
         <p:txBody>
           <a:bodyPr/>
           <a:p>
-            <a:fld id="{DE122FB2-54E0-4831-8F86-F05CC5815E4F}" type="slidenum">
+            <a:fld id="{B6CD6F70-AD78-4546-B9D4-18969E9365DE}" type="slidenum">
               <a:t>&lt;#&gt;</a:t>
             </a:fld>
           </a:p>
@@ -990,14 +989,14 @@
             <a:noAutofit/>
           </a:bodyPr>
           <a:p>
-            <a:pPr indent="0">
+            <a:pPr indent="0" algn="ctr">
               <a:buNone/>
             </a:pPr>
-            <a:endParaRPr b="0" lang="en-US" sz="1800" spc="-1" strike="noStrike">
-              <a:solidFill>
-                <a:srgbClr val="000000"/>
-              </a:solidFill>
-              <a:latin typeface="Calibri"/>
+            <a:endParaRPr b="0" lang="en-US" sz="4400" spc="-1" strike="noStrike">
+              <a:solidFill>
+                <a:srgbClr val="000000"/>
+              </a:solidFill>
+              <a:latin typeface="Arial"/>
             </a:endParaRPr>
           </a:p>
         </p:txBody>
@@ -1040,7 +1039,7 @@
               <a:solidFill>
                 <a:srgbClr val="000000"/>
               </a:solidFill>
-              <a:latin typeface="Calibri"/>
+              <a:latin typeface="Arial"/>
             </a:endParaRPr>
           </a:p>
         </p:txBody>
@@ -1059,7 +1058,7 @@
         <p:txBody>
           <a:bodyPr/>
           <a:p>
-            <a:fld id="{0C047F8A-D9AA-4ECC-9BAB-C581EBB36327}" type="slidenum">
+            <a:fld id="{BE0C4A9E-51E6-4848-AAE0-11328FACC688}" type="slidenum">
               <a:t>&lt;#&gt;</a:t>
             </a:fld>
           </a:p>
@@ -1115,14 +1114,14 @@
             <a:noAutofit/>
           </a:bodyPr>
           <a:p>
-            <a:pPr indent="0">
+            <a:pPr indent="0" algn="ctr">
               <a:buNone/>
             </a:pPr>
-            <a:endParaRPr b="0" lang="en-US" sz="1800" spc="-1" strike="noStrike">
-              <a:solidFill>
-                <a:srgbClr val="000000"/>
-              </a:solidFill>
-              <a:latin typeface="Calibri"/>
+            <a:endParaRPr b="0" lang="en-US" sz="4400" spc="-1" strike="noStrike">
+              <a:solidFill>
+                <a:srgbClr val="000000"/>
+              </a:solidFill>
+              <a:latin typeface="Arial"/>
             </a:endParaRPr>
           </a:p>
         </p:txBody>
@@ -1165,7 +1164,7 @@
               <a:solidFill>
                 <a:srgbClr val="000000"/>
               </a:solidFill>
-              <a:latin typeface="Calibri"/>
+              <a:latin typeface="Arial"/>
             </a:endParaRPr>
           </a:p>
         </p:txBody>
@@ -1208,7 +1207,7 @@
               <a:solidFill>
                 <a:srgbClr val="000000"/>
               </a:solidFill>
-              <a:latin typeface="Calibri"/>
+              <a:latin typeface="Arial"/>
             </a:endParaRPr>
           </a:p>
         </p:txBody>
@@ -1227,7 +1226,7 @@
         <p:txBody>
           <a:bodyPr/>
           <a:p>
-            <a:fld id="{B8A3B0CE-62CE-4E1C-A1EE-00FA33B06561}" type="slidenum">
+            <a:fld id="{7BE02A97-7A5F-4B9A-8659-B1673ACC69C2}" type="slidenum">
               <a:t>&lt;#&gt;</a:t>
             </a:fld>
           </a:p>
@@ -1283,14 +1282,14 @@
             <a:noAutofit/>
           </a:bodyPr>
           <a:p>
-            <a:pPr indent="0">
+            <a:pPr indent="0" algn="ctr">
               <a:buNone/>
             </a:pPr>
-            <a:endParaRPr b="0" lang="en-US" sz="1800" spc="-1" strike="noStrike">
-              <a:solidFill>
-                <a:srgbClr val="000000"/>
-              </a:solidFill>
-              <a:latin typeface="Calibri"/>
+            <a:endParaRPr b="0" lang="en-US" sz="4400" spc="-1" strike="noStrike">
+              <a:solidFill>
+                <a:srgbClr val="000000"/>
+              </a:solidFill>
+              <a:latin typeface="Arial"/>
             </a:endParaRPr>
           </a:p>
         </p:txBody>
@@ -1309,7 +1308,7 @@
         <p:txBody>
           <a:bodyPr/>
           <a:p>
-            <a:fld id="{930EC3F6-17D9-4A55-8FD5-8E772F4E7966}" type="slidenum">
+            <a:fld id="{759358E8-C745-4AC1-9CE7-77116BD28A2C}" type="slidenum">
               <a:t>&lt;#&gt;</a:t>
             </a:fld>
           </a:p>
@@ -1389,7 +1388,7 @@
         <p:txBody>
           <a:bodyPr/>
           <a:p>
-            <a:fld id="{7AF96FC7-0501-48D4-8EA6-78670994DD07}" type="slidenum">
+            <a:fld id="{58DF2A70-2777-47F4-8206-04F440A02AE7}" type="slidenum">
               <a:t>&lt;#&gt;</a:t>
             </a:fld>
           </a:p>
@@ -1445,14 +1444,14 @@
             <a:noAutofit/>
           </a:bodyPr>
           <a:p>
-            <a:pPr indent="0">
+            <a:pPr indent="0" algn="ctr">
               <a:buNone/>
             </a:pPr>
-            <a:endParaRPr b="0" lang="en-US" sz="1800" spc="-1" strike="noStrike">
-              <a:solidFill>
-                <a:srgbClr val="000000"/>
-              </a:solidFill>
-              <a:latin typeface="Calibri"/>
+            <a:endParaRPr b="0" lang="en-US" sz="4400" spc="-1" strike="noStrike">
+              <a:solidFill>
+                <a:srgbClr val="000000"/>
+              </a:solidFill>
+              <a:latin typeface="Arial"/>
             </a:endParaRPr>
           </a:p>
         </p:txBody>
@@ -1495,7 +1494,7 @@
               <a:solidFill>
                 <a:srgbClr val="000000"/>
               </a:solidFill>
-              <a:latin typeface="Calibri"/>
+              <a:latin typeface="Arial"/>
             </a:endParaRPr>
           </a:p>
         </p:txBody>
@@ -1538,7 +1537,7 @@
               <a:solidFill>
                 <a:srgbClr val="000000"/>
               </a:solidFill>
-              <a:latin typeface="Calibri"/>
+              <a:latin typeface="Arial"/>
             </a:endParaRPr>
           </a:p>
         </p:txBody>
@@ -1581,7 +1580,7 @@
               <a:solidFill>
                 <a:srgbClr val="000000"/>
               </a:solidFill>
-              <a:latin typeface="Calibri"/>
+              <a:latin typeface="Arial"/>
             </a:endParaRPr>
           </a:p>
         </p:txBody>
@@ -1600,7 +1599,7 @@
         <p:txBody>
           <a:bodyPr/>
           <a:p>
-            <a:fld id="{3A615F2B-C8E9-45A5-835A-5767B294BED2}" type="slidenum">
+            <a:fld id="{12430E83-5B51-43CD-90BE-A0707BABE7A0}" type="slidenum">
               <a:t>&lt;#&gt;</a:t>
             </a:fld>
           </a:p>
@@ -1656,14 +1655,14 @@
             <a:noAutofit/>
           </a:bodyPr>
           <a:p>
-            <a:pPr indent="0">
+            <a:pPr indent="0" algn="ctr">
               <a:buNone/>
             </a:pPr>
-            <a:endParaRPr b="0" lang="en-US" sz="1800" spc="-1" strike="noStrike">
-              <a:solidFill>
-                <a:srgbClr val="000000"/>
-              </a:solidFill>
-              <a:latin typeface="Calibri"/>
+            <a:endParaRPr b="0" lang="en-US" sz="4400" spc="-1" strike="noStrike">
+              <a:solidFill>
+                <a:srgbClr val="000000"/>
+              </a:solidFill>
+              <a:latin typeface="Arial"/>
             </a:endParaRPr>
           </a:p>
         </p:txBody>
@@ -1706,7 +1705,7 @@
               <a:solidFill>
                 <a:srgbClr val="000000"/>
               </a:solidFill>
-              <a:latin typeface="Calibri"/>
+              <a:latin typeface="Arial"/>
             </a:endParaRPr>
           </a:p>
         </p:txBody>
@@ -1749,7 +1748,7 @@
               <a:solidFill>
                 <a:srgbClr val="000000"/>
               </a:solidFill>
-              <a:latin typeface="Calibri"/>
+              <a:latin typeface="Arial"/>
             </a:endParaRPr>
           </a:p>
         </p:txBody>
@@ -1792,7 +1791,7 @@
               <a:solidFill>
                 <a:srgbClr val="000000"/>
               </a:solidFill>
-              <a:latin typeface="Calibri"/>
+              <a:latin typeface="Arial"/>
             </a:endParaRPr>
           </a:p>
         </p:txBody>
@@ -1811,7 +1810,7 @@
         <p:txBody>
           <a:bodyPr/>
           <a:p>
-            <a:fld id="{4AAA6143-713D-4AA2-A5E2-200D6F7EEB75}" type="slidenum">
+            <a:fld id="{6D0B6F10-F3E8-48D2-9A77-50E5033E5B67}" type="slidenum">
               <a:t>&lt;#&gt;</a:t>
             </a:fld>
           </a:p>
@@ -1867,14 +1866,14 @@
             <a:noAutofit/>
           </a:bodyPr>
           <a:p>
-            <a:pPr indent="0">
+            <a:pPr indent="0" algn="ctr">
               <a:buNone/>
             </a:pPr>
-            <a:endParaRPr b="0" lang="en-US" sz="1800" spc="-1" strike="noStrike">
-              <a:solidFill>
-                <a:srgbClr val="000000"/>
-              </a:solidFill>
-              <a:latin typeface="Calibri"/>
+            <a:endParaRPr b="0" lang="en-US" sz="4400" spc="-1" strike="noStrike">
+              <a:solidFill>
+                <a:srgbClr val="000000"/>
+              </a:solidFill>
+              <a:latin typeface="Arial"/>
             </a:endParaRPr>
           </a:p>
         </p:txBody>
@@ -1917,7 +1916,7 @@
               <a:solidFill>
                 <a:srgbClr val="000000"/>
               </a:solidFill>
-              <a:latin typeface="Calibri"/>
+              <a:latin typeface="Arial"/>
             </a:endParaRPr>
           </a:p>
         </p:txBody>
@@ -1960,7 +1959,7 @@
               <a:solidFill>
                 <a:srgbClr val="000000"/>
               </a:solidFill>
-              <a:latin typeface="Calibri"/>
+              <a:latin typeface="Arial"/>
             </a:endParaRPr>
           </a:p>
         </p:txBody>
@@ -2003,7 +2002,7 @@
               <a:solidFill>
                 <a:srgbClr val="000000"/>
               </a:solidFill>
-              <a:latin typeface="Calibri"/>
+              <a:latin typeface="Arial"/>
             </a:endParaRPr>
           </a:p>
         </p:txBody>
@@ -2022,7 +2021,7 @@
         <p:txBody>
           <a:bodyPr/>
           <a:p>
-            <a:fld id="{6EFE50BE-B44E-405F-AB68-2EF577F37CBD}" type="slidenum">
+            <a:fld id="{7E9ECCBD-8FB3-4890-A1BF-763E77112D27}" type="slidenum">
               <a:t>&lt;#&gt;</a:t>
             </a:fld>
           </a:p>
@@ -2070,7 +2069,7 @@
         <p:spPr>
           <a:xfrm>
             <a:off x="4419720" y="4627440"/>
-            <a:ext cx="2133360" cy="279000"/>
+            <a:ext cx="2132280" cy="277920"/>
           </a:xfrm>
           <a:prstGeom prst="rect">
             <a:avLst/>
@@ -2084,11 +2083,43 @@
           <a:bodyPr lIns="45720" rIns="45720" tIns="45000" bIns="45000" anchor="ctr">
             <a:noAutofit/>
           </a:bodyPr>
+          <a:lstStyle>
+            <a:lvl1pPr indent="0">
+              <a:lnSpc>
+                <a:spcPct val="100000"/>
+              </a:lnSpc>
+              <a:buNone/>
+              <a:tabLst>
+                <a:tab algn="l" pos="0"/>
+              </a:tabLst>
+              <a:defRPr b="0" lang="en-US" sz="1400" spc="-1" strike="noStrike">
+                <a:solidFill>
+                  <a:srgbClr val="000000"/>
+                </a:solidFill>
+                <a:latin typeface="Times New Roman"/>
+              </a:defRPr>
+            </a:lvl1pPr>
+          </a:lstStyle>
           <a:p>
             <a:pPr indent="0">
+              <a:lnSpc>
+                <a:spcPct val="100000"/>
+              </a:lnSpc>
               <a:buNone/>
-            </a:pPr>
-            <a:endParaRPr b="0" lang="en-US" sz="1200" spc="-1" strike="noStrike">
+              <a:tabLst>
+                <a:tab algn="l" pos="0"/>
+              </a:tabLst>
+            </a:pPr>
+            <a:fld id="{F0D71C6D-F1EA-407D-971B-8C5D9D83D37E}" type="slidenum">
+              <a:rPr b="0" lang="en-US" sz="1400" spc="-1" strike="noStrike">
+                <a:solidFill>
+                  <a:srgbClr val="000000"/>
+                </a:solidFill>
+                <a:latin typeface="Times New Roman"/>
+              </a:rPr>
+              <a:t>&lt;number&gt;</a:t>
+            </a:fld>
+            <a:endParaRPr b="0" lang="en-US" sz="1400" spc="-1" strike="noStrike">
               <a:solidFill>
                 <a:srgbClr val="000000"/>
               </a:solidFill>
@@ -2125,23 +2156,23 @@
             <a:noAutofit/>
           </a:bodyPr>
           <a:p>
-            <a:pPr indent="0">
+            <a:pPr indent="0" algn="ctr">
               <a:buNone/>
             </a:pPr>
             <a:r>
-              <a:rPr b="0" lang="en-US" sz="1800" spc="-1" strike="noStrike">
+              <a:rPr b="0" lang="en-US" sz="4400" spc="-1" strike="noStrike">
                 <a:solidFill>
                   <a:srgbClr val="000000"/>
                 </a:solidFill>
-                <a:latin typeface="Calibri"/>
+                <a:latin typeface="Arial"/>
               </a:rPr>
               <a:t>Click to edit the title text format</a:t>
             </a:r>
-            <a:endParaRPr b="0" lang="en-US" sz="1800" spc="-1" strike="noStrike">
-              <a:solidFill>
-                <a:srgbClr val="000000"/>
-              </a:solidFill>
-              <a:latin typeface="Calibri"/>
+            <a:endParaRPr b="0" lang="en-US" sz="4400" spc="-1" strike="noStrike">
+              <a:solidFill>
+                <a:srgbClr val="000000"/>
+              </a:solidFill>
+              <a:latin typeface="Arial"/>
             </a:endParaRPr>
           </a:p>
         </p:txBody>
@@ -2190,7 +2221,7 @@
                 <a:solidFill>
                   <a:srgbClr val="000000"/>
                 </a:solidFill>
-                <a:latin typeface="Calibri"/>
+                <a:latin typeface="Arial"/>
               </a:rPr>
               <a:t>Click to edit the outline text format</a:t>
             </a:r>
@@ -2198,7 +2229,7 @@
               <a:solidFill>
                 <a:srgbClr val="000000"/>
               </a:solidFill>
-              <a:latin typeface="Calibri"/>
+              <a:latin typeface="Arial"/>
             </a:endParaRPr>
           </a:p>
           <a:p>
@@ -2214,19 +2245,19 @@
               <a:buChar char=""/>
             </a:pPr>
             <a:r>
-              <a:rPr b="0" lang="en-US" sz="3200" spc="-1" strike="noStrike">
+              <a:rPr b="0" lang="en-US" sz="2800" spc="-1" strike="noStrike">
                 <a:solidFill>
                   <a:srgbClr val="000000"/>
                 </a:solidFill>
-                <a:latin typeface="Calibri"/>
+                <a:latin typeface="Arial"/>
               </a:rPr>
               <a:t>Second Outline Level</a:t>
             </a:r>
-            <a:endParaRPr b="0" lang="en-US" sz="3200" spc="-1" strike="noStrike">
-              <a:solidFill>
-                <a:srgbClr val="000000"/>
-              </a:solidFill>
-              <a:latin typeface="Calibri"/>
+            <a:endParaRPr b="0" lang="en-US" sz="2800" spc="-1" strike="noStrike">
+              <a:solidFill>
+                <a:srgbClr val="000000"/>
+              </a:solidFill>
+              <a:latin typeface="Arial"/>
             </a:endParaRPr>
           </a:p>
           <a:p>
@@ -2242,19 +2273,19 @@
               <a:buChar char=""/>
             </a:pPr>
             <a:r>
-              <a:rPr b="0" lang="en-US" sz="3200" spc="-1" strike="noStrike">
+              <a:rPr b="0" lang="en-US" sz="2400" spc="-1" strike="noStrike">
                 <a:solidFill>
                   <a:srgbClr val="000000"/>
                 </a:solidFill>
-                <a:latin typeface="Calibri"/>
+                <a:latin typeface="Arial"/>
               </a:rPr>
               <a:t>Third Outline Level</a:t>
             </a:r>
-            <a:endParaRPr b="0" lang="en-US" sz="3200" spc="-1" strike="noStrike">
-              <a:solidFill>
-                <a:srgbClr val="000000"/>
-              </a:solidFill>
-              <a:latin typeface="Calibri"/>
+            <a:endParaRPr b="0" lang="en-US" sz="2400" spc="-1" strike="noStrike">
+              <a:solidFill>
+                <a:srgbClr val="000000"/>
+              </a:solidFill>
+              <a:latin typeface="Arial"/>
             </a:endParaRPr>
           </a:p>
           <a:p>
@@ -2270,19 +2301,19 @@
               <a:buChar char=""/>
             </a:pPr>
             <a:r>
-              <a:rPr b="0" lang="en-US" sz="3200" spc="-1" strike="noStrike">
+              <a:rPr b="0" lang="en-US" sz="2000" spc="-1" strike="noStrike">
                 <a:solidFill>
                   <a:srgbClr val="000000"/>
                 </a:solidFill>
-                <a:latin typeface="Calibri"/>
+                <a:latin typeface="Arial"/>
               </a:rPr>
               <a:t>Fourth Outline Level</a:t>
             </a:r>
-            <a:endParaRPr b="0" lang="en-US" sz="3200" spc="-1" strike="noStrike">
-              <a:solidFill>
-                <a:srgbClr val="000000"/>
-              </a:solidFill>
-              <a:latin typeface="Calibri"/>
+            <a:endParaRPr b="0" lang="en-US" sz="2000" spc="-1" strike="noStrike">
+              <a:solidFill>
+                <a:srgbClr val="000000"/>
+              </a:solidFill>
+              <a:latin typeface="Arial"/>
             </a:endParaRPr>
           </a:p>
           <a:p>
@@ -2302,7 +2333,7 @@
                 <a:solidFill>
                   <a:srgbClr val="000000"/>
                 </a:solidFill>
-                <a:latin typeface="Calibri"/>
+                <a:latin typeface="Arial"/>
               </a:rPr>
               <a:t>Fifth Outline Level</a:t>
             </a:r>
@@ -2310,7 +2341,7 @@
               <a:solidFill>
                 <a:srgbClr val="000000"/>
               </a:solidFill>
-              <a:latin typeface="Calibri"/>
+              <a:latin typeface="Arial"/>
             </a:endParaRPr>
           </a:p>
           <a:p>
@@ -2330,7 +2361,7 @@
                 <a:solidFill>
                   <a:srgbClr val="000000"/>
                 </a:solidFill>
-                <a:latin typeface="Calibri"/>
+                <a:latin typeface="Arial"/>
               </a:rPr>
               <a:t>Sixth Outline Level</a:t>
             </a:r>
@@ -2338,7 +2369,7 @@
               <a:solidFill>
                 <a:srgbClr val="000000"/>
               </a:solidFill>
-              <a:latin typeface="Calibri"/>
+              <a:latin typeface="Arial"/>
             </a:endParaRPr>
           </a:p>
           <a:p>
@@ -2358,7 +2389,7 @@
                 <a:solidFill>
                   <a:srgbClr val="000000"/>
                 </a:solidFill>
-                <a:latin typeface="Calibri"/>
+                <a:latin typeface="Arial"/>
               </a:rPr>
               <a:t>Seventh Outline Level</a:t>
             </a:r>
@@ -2366,7 +2397,7 @@
               <a:solidFill>
                 <a:srgbClr val="000000"/>
               </a:solidFill>
-              <a:latin typeface="Calibri"/>
+              <a:latin typeface="Arial"/>
             </a:endParaRPr>
           </a:p>
         </p:txBody>
@@ -2421,7 +2452,7 @@
         <p:spPr>
           <a:xfrm>
             <a:off x="0" y="0"/>
-            <a:ext cx="9143640" cy="5143320"/>
+            <a:ext cx="9142560" cy="5142240"/>
           </a:xfrm>
           <a:prstGeom prst="rect">
             <a:avLst/>
@@ -2440,7 +2471,7 @@
         <p:spPr>
           <a:xfrm>
             <a:off x="0" y="0"/>
-            <a:ext cx="9143640" cy="72720"/>
+            <a:ext cx="9142560" cy="71640"/>
           </a:xfrm>
           <a:prstGeom prst="rect">
             <a:avLst/>
@@ -2490,37 +2521,37 @@
         <p:spPr>
           <a:xfrm>
             <a:off x="365760" y="1166400"/>
-            <a:ext cx="4754520" cy="181800"/>
-          </a:xfrm>
-          <a:prstGeom prst="rect">
-            <a:avLst/>
-          </a:prstGeom>
-          <a:noFill/>
-          <a:ln w="12700">
-            <a:noFill/>
-          </a:ln>
-        </p:spPr>
-        <p:style>
-          <a:lnRef idx="0"/>
-          <a:fillRef idx="0"/>
-          <a:effectRef idx="0"/>
-          <a:fontRef idx="minor"/>
-        </p:style>
-        <p:txBody>
-          <a:bodyPr lIns="0" rIns="0" tIns="0" bIns="0" anchor="ctr">
-            <a:spAutoFit/>
-          </a:bodyPr>
-          <a:p>
-            <a:pPr>
-              <a:lnSpc>
-                <a:spcPct val="100000"/>
-              </a:lnSpc>
-              <a:tabLst>
-                <a:tab algn="l" pos="0"/>
-              </a:tabLst>
-            </a:pPr>
-            <a:r>
-              <a:rPr b="1" lang="en-US" sz="1200" spc="199" strike="noStrike">
+            <a:ext cx="4753440" cy="181800"/>
+          </a:xfrm>
+          <a:prstGeom prst="rect">
+            <a:avLst/>
+          </a:prstGeom>
+          <a:noFill/>
+          <a:ln w="12700">
+            <a:noFill/>
+          </a:ln>
+        </p:spPr>
+        <p:style>
+          <a:lnRef idx="0"/>
+          <a:fillRef idx="0"/>
+          <a:effectRef idx="0"/>
+          <a:fontRef idx="minor"/>
+        </p:style>
+        <p:txBody>
+          <a:bodyPr lIns="0" rIns="0" tIns="0" bIns="0" anchor="ctr">
+            <a:spAutoFit/>
+          </a:bodyPr>
+          <a:p>
+            <a:pPr>
+              <a:lnSpc>
+                <a:spcPct val="100000"/>
+              </a:lnSpc>
+              <a:tabLst>
+                <a:tab algn="l" pos="0"/>
+              </a:tabLst>
+            </a:pPr>
+            <a:r>
+              <a:rPr b="1" lang="en-US" sz="1200" spc="191" strike="noStrike">
                 <a:solidFill>
                   <a:srgbClr val="2ee5ba"/>
                 </a:solidFill>
@@ -2547,7 +2578,7 @@
         <p:spPr>
           <a:xfrm>
             <a:off x="365760" y="1524600"/>
-            <a:ext cx="4754520" cy="791280"/>
+            <a:ext cx="4753440" cy="791280"/>
           </a:xfrm>
           <a:prstGeom prst="rect">
             <a:avLst/>
@@ -2604,7 +2635,7 @@
         <p:spPr>
           <a:xfrm>
             <a:off x="352800" y="2950200"/>
-            <a:ext cx="4388760" cy="547920"/>
+            <a:ext cx="4387680" cy="547920"/>
           </a:xfrm>
           <a:prstGeom prst="rect">
             <a:avLst/>
@@ -2687,7 +2718,7 @@
         <p:spPr>
           <a:xfrm>
             <a:off x="365400" y="3685680"/>
-            <a:ext cx="1463400" cy="0"/>
+            <a:ext cx="1463400" cy="360"/>
           </a:xfrm>
           <a:prstGeom prst="line">
             <a:avLst/>
@@ -2729,7 +2760,7 @@
         <p:spPr>
           <a:xfrm>
             <a:off x="352800" y="3860280"/>
-            <a:ext cx="4114440" cy="227520"/>
+            <a:ext cx="4113360" cy="227520"/>
           </a:xfrm>
           <a:prstGeom prst="rect">
             <a:avLst/>
@@ -2786,7 +2817,7 @@
         <p:spPr>
           <a:xfrm>
             <a:off x="0" y="4800600"/>
-            <a:ext cx="9143640" cy="342720"/>
+            <a:ext cx="9142560" cy="341640"/>
           </a:xfrm>
           <a:prstGeom prst="rect">
             <a:avLst/>
@@ -2838,7 +2869,7 @@
         <p:spPr>
           <a:xfrm>
             <a:off x="365760" y="4884840"/>
-            <a:ext cx="6857640" cy="151560"/>
+            <a:ext cx="6856560" cy="151560"/>
           </a:xfrm>
           <a:prstGeom prst="rect">
             <a:avLst/>
@@ -2895,7 +2926,7 @@
         <p:spPr>
           <a:xfrm>
             <a:off x="337680" y="2336400"/>
-            <a:ext cx="3673800" cy="363960"/>
+            <a:ext cx="3672720" cy="363960"/>
           </a:xfrm>
           <a:prstGeom prst="rect">
             <a:avLst/>
@@ -2986,7 +3017,7 @@
         <p:spPr>
           <a:xfrm>
             <a:off x="0" y="0"/>
-            <a:ext cx="9143640" cy="5143320"/>
+            <a:ext cx="9142560" cy="5142240"/>
           </a:xfrm>
           <a:prstGeom prst="rect">
             <a:avLst/>
@@ -3005,7 +3036,7 @@
         <p:spPr>
           <a:xfrm>
             <a:off x="320040" y="1051560"/>
-            <a:ext cx="8503560" cy="3611520"/>
+            <a:ext cx="8502480" cy="3610440"/>
           </a:xfrm>
           <a:prstGeom prst="roundRect">
             <a:avLst>
@@ -3059,37 +3090,37 @@
         <p:spPr>
           <a:xfrm>
             <a:off x="411480" y="212040"/>
-            <a:ext cx="8229240" cy="197280"/>
-          </a:xfrm>
-          <a:prstGeom prst="rect">
-            <a:avLst/>
-          </a:prstGeom>
-          <a:noFill/>
-          <a:ln w="12700">
-            <a:noFill/>
-          </a:ln>
-        </p:spPr>
-        <p:style>
-          <a:lnRef idx="0"/>
-          <a:fillRef idx="0"/>
-          <a:effectRef idx="0"/>
-          <a:fontRef idx="minor"/>
-        </p:style>
-        <p:txBody>
-          <a:bodyPr lIns="0" rIns="0" tIns="0" bIns="0" anchor="ctr">
-            <a:spAutoFit/>
-          </a:bodyPr>
-          <a:p>
-            <a:pPr>
-              <a:lnSpc>
-                <a:spcPct val="100000"/>
-              </a:lnSpc>
-              <a:tabLst>
-                <a:tab algn="l" pos="0"/>
-              </a:tabLst>
-            </a:pPr>
-            <a:r>
-              <a:rPr b="1" lang="en-US" sz="1300" spc="398" strike="noStrike">
+            <a:ext cx="8228160" cy="197280"/>
+          </a:xfrm>
+          <a:prstGeom prst="rect">
+            <a:avLst/>
+          </a:prstGeom>
+          <a:noFill/>
+          <a:ln w="12700">
+            <a:noFill/>
+          </a:ln>
+        </p:spPr>
+        <p:style>
+          <a:lnRef idx="0"/>
+          <a:fillRef idx="0"/>
+          <a:effectRef idx="0"/>
+          <a:fontRef idx="minor"/>
+        </p:style>
+        <p:txBody>
+          <a:bodyPr lIns="0" rIns="0" tIns="0" bIns="0" anchor="ctr">
+            <a:spAutoFit/>
+          </a:bodyPr>
+          <a:p>
+            <a:pPr>
+              <a:lnSpc>
+                <a:spcPct val="100000"/>
+              </a:lnSpc>
+              <a:tabLst>
+                <a:tab algn="l" pos="0"/>
+              </a:tabLst>
+            </a:pPr>
+            <a:r>
+              <a:rPr b="1" lang="en-US" sz="1300" spc="389" strike="noStrike">
                 <a:solidFill>
                   <a:srgbClr val="2ee5ba"/>
                 </a:solidFill>
@@ -3116,7 +3147,7 @@
         <p:spPr>
           <a:xfrm>
             <a:off x="411480" y="545760"/>
-            <a:ext cx="8320680" cy="425880"/>
+            <a:ext cx="8319600" cy="425880"/>
           </a:xfrm>
           <a:prstGeom prst="rect">
             <a:avLst/>
@@ -3172,8 +3203,8 @@
         </p:nvSpPr>
         <p:spPr>
           <a:xfrm>
-            <a:off x="502920" y="1325880"/>
-            <a:ext cx="685440" cy="273600"/>
+            <a:off x="502920" y="1397880"/>
+            <a:ext cx="684360" cy="273600"/>
           </a:xfrm>
           <a:prstGeom prst="rect">
             <a:avLst/>
@@ -3229,8 +3260,8 @@
         </p:nvSpPr>
         <p:spPr>
           <a:xfrm>
-            <a:off x="1280160" y="1318680"/>
-            <a:ext cx="2102760" cy="242640"/>
+            <a:off x="1280160" y="1390680"/>
+            <a:ext cx="2101680" cy="242640"/>
           </a:xfrm>
           <a:prstGeom prst="rect">
             <a:avLst/>
@@ -3286,8 +3317,8 @@
         </p:nvSpPr>
         <p:spPr>
           <a:xfrm>
-            <a:off x="3474720" y="1296000"/>
-            <a:ext cx="5120280" cy="425520"/>
+            <a:off x="3474720" y="1401840"/>
+            <a:ext cx="5119200" cy="213120"/>
           </a:xfrm>
           <a:prstGeom prst="rect">
             <a:avLst/>
@@ -3324,7 +3355,7 @@
                 <a:latin typeface="Calibri"/>
                 <a:ea typeface="Calibri"/>
               </a:rPr>
-              <a:t>Bandpass 0.5–75 Hz + 50 Hz notch (on top of provided filter &amp; blink removal)</a:t>
+              <a:t>Bandpass 0.5–75 Hz + 50 Hz notch</a:t>
             </a:r>
             <a:endParaRPr b="0" lang="en-US" sz="1400" spc="-1" strike="noStrike">
               <a:solidFill>
@@ -3343,8 +3374,8 @@
         </p:nvSpPr>
         <p:spPr>
           <a:xfrm>
-            <a:off x="502920" y="2130840"/>
-            <a:ext cx="685440" cy="273600"/>
+            <a:off x="502920" y="2202840"/>
+            <a:ext cx="684360" cy="273600"/>
           </a:xfrm>
           <a:prstGeom prst="rect">
             <a:avLst/>
@@ -3400,8 +3431,8 @@
         </p:nvSpPr>
         <p:spPr>
           <a:xfrm>
-            <a:off x="1280160" y="2123280"/>
-            <a:ext cx="2102760" cy="242640"/>
+            <a:off x="1280160" y="2195280"/>
+            <a:ext cx="2101680" cy="242640"/>
           </a:xfrm>
           <a:prstGeom prst="rect">
             <a:avLst/>
@@ -3458,7 +3489,7 @@
         <p:spPr>
           <a:xfrm>
             <a:off x="3474720" y="2207160"/>
-            <a:ext cx="5120280" cy="212400"/>
+            <a:ext cx="5119200" cy="212400"/>
           </a:xfrm>
           <a:prstGeom prst="rect">
             <a:avLst/>
@@ -3495,7 +3526,7 @@
                 <a:latin typeface="Calibri"/>
                 <a:ea typeface="Calibri"/>
               </a:rPr>
-              <a:t>LaBraM, modified LaBraM (3s), LUNA, CBraMod + engineered features</a:t>
+              <a:t>LaBraM, modified LaBraM (3s), LUNA, CBraMod</a:t>
             </a:r>
             <a:endParaRPr b="0" lang="en-US" sz="1400" spc="-1" strike="noStrike">
               <a:solidFill>
@@ -3514,8 +3545,8 @@
         </p:nvSpPr>
         <p:spPr>
           <a:xfrm>
-            <a:off x="502920" y="2935440"/>
-            <a:ext cx="685440" cy="273600"/>
+            <a:off x="502920" y="3007440"/>
+            <a:ext cx="684360" cy="273600"/>
           </a:xfrm>
           <a:prstGeom prst="rect">
             <a:avLst/>
@@ -3571,8 +3602,8 @@
         </p:nvSpPr>
         <p:spPr>
           <a:xfrm>
-            <a:off x="1280160" y="2927880"/>
-            <a:ext cx="2102760" cy="242640"/>
+            <a:off x="1280160" y="2999880"/>
+            <a:ext cx="2101680" cy="242640"/>
           </a:xfrm>
           <a:prstGeom prst="rect">
             <a:avLst/>
@@ -3629,7 +3660,7 @@
         <p:spPr>
           <a:xfrm>
             <a:off x="3474720" y="3011760"/>
-            <a:ext cx="5120280" cy="212400"/>
+            <a:ext cx="5119200" cy="212400"/>
           </a:xfrm>
           <a:prstGeom prst="rect">
             <a:avLst/>
@@ -3666,7 +3697,7 @@
                 <a:latin typeface="Calibri"/>
                 <a:ea typeface="Calibri"/>
               </a:rPr>
-              <a:t>OpenCLIP, DINOv2, AlexNet embeddings</a:t>
+              <a:t>OpenCLIP, DINOv2, AlexNet</a:t>
             </a:r>
             <a:endParaRPr b="0" lang="en-US" sz="1400" spc="-1" strike="noStrike">
               <a:solidFill>
@@ -3685,8 +3716,8 @@
         </p:nvSpPr>
         <p:spPr>
           <a:xfrm>
-            <a:off x="502920" y="3740040"/>
-            <a:ext cx="685440" cy="273600"/>
+            <a:off x="502920" y="3812040"/>
+            <a:ext cx="684360" cy="273600"/>
           </a:xfrm>
           <a:prstGeom prst="rect">
             <a:avLst/>
@@ -3742,8 +3773,8 @@
         </p:nvSpPr>
         <p:spPr>
           <a:xfrm>
-            <a:off x="1280160" y="3732840"/>
-            <a:ext cx="2102760" cy="242640"/>
+            <a:off x="1280160" y="3804840"/>
+            <a:ext cx="2101680" cy="242640"/>
           </a:xfrm>
           <a:prstGeom prst="rect">
             <a:avLst/>
@@ -3800,7 +3831,7 @@
         <p:spPr>
           <a:xfrm>
             <a:off x="3474720" y="3709800"/>
-            <a:ext cx="5120280" cy="425520"/>
+            <a:ext cx="5119200" cy="425520"/>
           </a:xfrm>
           <a:prstGeom prst="rect">
             <a:avLst/>
@@ -3857,7 +3888,7 @@
         <p:spPr>
           <a:xfrm>
             <a:off x="0" y="4800600"/>
-            <a:ext cx="9143640" cy="342720"/>
+            <a:ext cx="9142560" cy="341640"/>
           </a:xfrm>
           <a:prstGeom prst="rect">
             <a:avLst/>
@@ -3909,7 +3940,7 @@
         <p:spPr>
           <a:xfrm>
             <a:off x="365760" y="4884840"/>
-            <a:ext cx="6857640" cy="151560"/>
+            <a:ext cx="6856560" cy="151560"/>
           </a:xfrm>
           <a:prstGeom prst="rect">
             <a:avLst/>
@@ -3966,7 +3997,7 @@
         <p:spPr>
           <a:xfrm>
             <a:off x="8412480" y="4884840"/>
-            <a:ext cx="456840" cy="151560"/>
+            <a:ext cx="455760" cy="151560"/>
           </a:xfrm>
           <a:prstGeom prst="rect">
             <a:avLst/>
@@ -4003,7 +4034,7 @@
                 <a:latin typeface="Calibri"/>
                 <a:ea typeface="Calibri"/>
               </a:rPr>
-              <a:t>3</a:t>
+              <a:t>1</a:t>
             </a:r>
             <a:endParaRPr b="0" lang="en-US" sz="1000" spc="-1" strike="noStrike">
               <a:solidFill>
@@ -4057,7 +4088,7 @@
         <p:spPr>
           <a:xfrm>
             <a:off x="0" y="0"/>
-            <a:ext cx="9143640" cy="5143320"/>
+            <a:ext cx="9142560" cy="5142240"/>
           </a:xfrm>
           <a:prstGeom prst="rect">
             <a:avLst/>
@@ -4076,7 +4107,7 @@
         <p:spPr>
           <a:xfrm>
             <a:off x="320040" y="1051560"/>
-            <a:ext cx="8503560" cy="3611520"/>
+            <a:ext cx="8502480" cy="3610440"/>
           </a:xfrm>
           <a:prstGeom prst="roundRect">
             <a:avLst>
@@ -4130,44 +4161,44 @@
         <p:spPr>
           <a:xfrm>
             <a:off x="411480" y="212040"/>
-            <a:ext cx="8229240" cy="197280"/>
-          </a:xfrm>
-          <a:prstGeom prst="rect">
-            <a:avLst/>
-          </a:prstGeom>
-          <a:noFill/>
-          <a:ln w="12700">
-            <a:noFill/>
-          </a:ln>
-        </p:spPr>
-        <p:style>
-          <a:lnRef idx="0"/>
-          <a:fillRef idx="0"/>
-          <a:effectRef idx="0"/>
-          <a:fontRef idx="minor"/>
-        </p:style>
-        <p:txBody>
-          <a:bodyPr lIns="0" rIns="0" tIns="0" bIns="0" anchor="ctr">
-            <a:spAutoFit/>
-          </a:bodyPr>
-          <a:p>
-            <a:pPr>
-              <a:lnSpc>
-                <a:spcPct val="100000"/>
-              </a:lnSpc>
-              <a:tabLst>
-                <a:tab algn="l" pos="0"/>
-              </a:tabLst>
-            </a:pPr>
-            <a:r>
-              <a:rPr b="1" lang="en-US" sz="1300" spc="398" strike="noStrike">
+            <a:ext cx="8228160" cy="197280"/>
+          </a:xfrm>
+          <a:prstGeom prst="rect">
+            <a:avLst/>
+          </a:prstGeom>
+          <a:noFill/>
+          <a:ln w="12700">
+            <a:noFill/>
+          </a:ln>
+        </p:spPr>
+        <p:style>
+          <a:lnRef idx="0"/>
+          <a:fillRef idx="0"/>
+          <a:effectRef idx="0"/>
+          <a:fontRef idx="minor"/>
+        </p:style>
+        <p:txBody>
+          <a:bodyPr lIns="0" rIns="0" tIns="0" bIns="0" anchor="ctr">
+            <a:spAutoFit/>
+          </a:bodyPr>
+          <a:p>
+            <a:pPr>
+              <a:lnSpc>
+                <a:spcPct val="100000"/>
+              </a:lnSpc>
+              <a:tabLst>
+                <a:tab algn="l" pos="0"/>
+              </a:tabLst>
+            </a:pPr>
+            <a:r>
+              <a:rPr b="1" lang="en-US" sz="1300" spc="389" strike="noStrike">
                 <a:solidFill>
                   <a:srgbClr val="2ee5ba"/>
                 </a:solidFill>
                 <a:latin typeface="Calibri"/>
                 <a:ea typeface="Calibri"/>
               </a:rPr>
-              <a:t>CLASSIFICATION</a:t>
+              <a:t>RESULTS</a:t>
             </a:r>
             <a:endParaRPr b="0" lang="en-US" sz="1300" spc="-1" strike="noStrike">
               <a:solidFill>
@@ -4187,7 +4218,7 @@
         <p:spPr>
           <a:xfrm>
             <a:off x="411480" y="545760"/>
-            <a:ext cx="8320680" cy="425880"/>
+            <a:ext cx="8319600" cy="425880"/>
           </a:xfrm>
           <a:prstGeom prst="rect">
             <a:avLst/>
@@ -4224,7 +4255,7 @@
                 <a:latin typeface="Calibri"/>
                 <a:ea typeface="Calibri"/>
               </a:rPr>
-              <a:t>Ridge regression on raw EEG</a:t>
+              <a:t>Test retrieval (102 candidates)</a:t>
             </a:r>
             <a:endParaRPr b="0" lang="en-US" sz="2800" spc="-1" strike="noStrike">
               <a:solidFill>
@@ -4243,503 +4274,503 @@
         </p:nvSpPr>
         <p:spPr>
           <a:xfrm>
-            <a:off x="502920" y="1326240"/>
-            <a:ext cx="2559960" cy="227520"/>
-          </a:xfrm>
-          <a:prstGeom prst="rect">
-            <a:avLst/>
-          </a:prstGeom>
-          <a:noFill/>
-          <a:ln w="12700">
-            <a:noFill/>
-          </a:ln>
-        </p:spPr>
-        <p:style>
-          <a:lnRef idx="0"/>
-          <a:fillRef idx="0"/>
-          <a:effectRef idx="0"/>
-          <a:fontRef idx="minor"/>
-        </p:style>
-        <p:txBody>
-          <a:bodyPr lIns="0" rIns="0" tIns="0" bIns="0" anchor="ctr">
-            <a:spAutoFit/>
-          </a:bodyPr>
-          <a:p>
-            <a:pPr>
-              <a:lnSpc>
-                <a:spcPct val="100000"/>
-              </a:lnSpc>
-              <a:tabLst>
-                <a:tab algn="l" pos="0"/>
-              </a:tabLst>
-            </a:pPr>
-            <a:r>
-              <a:rPr b="1" lang="en-US" sz="1500" spc="-1" strike="noStrike">
+            <a:off x="502920" y="1272600"/>
+            <a:ext cx="7770960" cy="197280"/>
+          </a:xfrm>
+          <a:prstGeom prst="rect">
+            <a:avLst/>
+          </a:prstGeom>
+          <a:noFill/>
+          <a:ln w="12700">
+            <a:noFill/>
+          </a:ln>
+        </p:spPr>
+        <p:style>
+          <a:lnRef idx="0"/>
+          <a:fillRef idx="0"/>
+          <a:effectRef idx="0"/>
+          <a:fontRef idx="minor"/>
+        </p:style>
+        <p:txBody>
+          <a:bodyPr lIns="0" rIns="0" tIns="0" bIns="0" anchor="ctr">
+            <a:spAutoFit/>
+          </a:bodyPr>
+          <a:p>
+            <a:pPr>
+              <a:lnSpc>
+                <a:spcPct val="100000"/>
+              </a:lnSpc>
+              <a:tabLst>
+                <a:tab algn="l" pos="0"/>
+              </a:tabLst>
+            </a:pPr>
+            <a:r>
+              <a:rPr b="0" lang="en-US" sz="1300" spc="-1" strike="noStrike">
+                <a:solidFill>
+                  <a:srgbClr val="94a3b8"/>
+                </a:solidFill>
+                <a:latin typeface="Calibri"/>
+                <a:ea typeface="Calibri"/>
+              </a:rPr>
+              <a:t>Chance: Top-1 = 0.98%  ·  Top-5 = 4.9%</a:t>
+            </a:r>
+            <a:endParaRPr b="0" lang="en-US" sz="1300" spc="-1" strike="noStrike">
+              <a:solidFill>
+                <a:srgbClr val="000000"/>
+              </a:solidFill>
+              <a:latin typeface="Arial"/>
+            </a:endParaRPr>
+          </a:p>
+        </p:txBody>
+      </p:sp>
+      <p:sp>
+        <p:nvSpPr>
+          <p:cNvPr id="73" name="Text 4"/>
+          <p:cNvSpPr/>
+          <p:nvPr/>
+        </p:nvSpPr>
+        <p:spPr>
+          <a:xfrm>
+            <a:off x="548640" y="1638360"/>
+            <a:ext cx="1370160" cy="197280"/>
+          </a:xfrm>
+          <a:prstGeom prst="rect">
+            <a:avLst/>
+          </a:prstGeom>
+          <a:noFill/>
+          <a:ln w="12700">
+            <a:noFill/>
+          </a:ln>
+        </p:spPr>
+        <p:style>
+          <a:lnRef idx="0"/>
+          <a:fillRef idx="0"/>
+          <a:effectRef idx="0"/>
+          <a:fontRef idx="minor"/>
+        </p:style>
+        <p:txBody>
+          <a:bodyPr lIns="0" rIns="0" tIns="0" bIns="0" anchor="ctr">
+            <a:spAutoFit/>
+          </a:bodyPr>
+          <a:p>
+            <a:pPr>
+              <a:lnSpc>
+                <a:spcPct val="100000"/>
+              </a:lnSpc>
+              <a:tabLst>
+                <a:tab algn="l" pos="0"/>
+              </a:tabLst>
+            </a:pPr>
+            <a:r>
+              <a:rPr b="1" lang="en-US" sz="1300" spc="-1" strike="noStrike">
                 <a:solidFill>
                   <a:srgbClr val="2ee5ba"/>
                 </a:solidFill>
                 <a:latin typeface="Calibri"/>
                 <a:ea typeface="Calibri"/>
               </a:rPr>
-              <a:t>Per-subject RidgeCV</a:t>
-            </a:r>
-            <a:endParaRPr b="0" lang="en-US" sz="1500" spc="-1" strike="noStrike">
-              <a:solidFill>
-                <a:srgbClr val="000000"/>
-              </a:solidFill>
-              <a:latin typeface="Arial"/>
-            </a:endParaRPr>
-          </a:p>
-        </p:txBody>
-      </p:sp>
-      <p:sp>
-        <p:nvSpPr>
-          <p:cNvPr id="73" name="Text 4"/>
-          <p:cNvSpPr/>
-          <p:nvPr/>
-        </p:nvSpPr>
-        <p:spPr>
-          <a:xfrm>
-            <a:off x="3200400" y="1379880"/>
-            <a:ext cx="5303160" cy="212400"/>
-          </a:xfrm>
-          <a:prstGeom prst="rect">
-            <a:avLst/>
-          </a:prstGeom>
-          <a:noFill/>
-          <a:ln w="12700">
-            <a:noFill/>
-          </a:ln>
-        </p:spPr>
-        <p:style>
-          <a:lnRef idx="0"/>
-          <a:fillRef idx="0"/>
-          <a:effectRef idx="0"/>
-          <a:fontRef idx="minor"/>
-        </p:style>
-        <p:txBody>
-          <a:bodyPr lIns="0" rIns="0" tIns="0" bIns="0" anchor="ctr">
-            <a:spAutoFit/>
-          </a:bodyPr>
-          <a:p>
-            <a:pPr>
-              <a:lnSpc>
-                <a:spcPct val="100000"/>
-              </a:lnSpc>
-              <a:tabLst>
-                <a:tab algn="l" pos="0"/>
-              </a:tabLst>
-            </a:pPr>
-            <a:r>
-              <a:rPr b="0" lang="en-US" sz="1400" spc="-1" strike="noStrike">
+              <a:t>Subject</a:t>
+            </a:r>
+            <a:endParaRPr b="0" lang="en-US" sz="1300" spc="-1" strike="noStrike">
+              <a:solidFill>
+                <a:srgbClr val="000000"/>
+              </a:solidFill>
+              <a:latin typeface="Arial"/>
+            </a:endParaRPr>
+          </a:p>
+        </p:txBody>
+      </p:sp>
+      <p:sp>
+        <p:nvSpPr>
+          <p:cNvPr id="74" name="Text 5"/>
+          <p:cNvSpPr/>
+          <p:nvPr/>
+        </p:nvSpPr>
+        <p:spPr>
+          <a:xfrm>
+            <a:off x="2194560" y="1638360"/>
+            <a:ext cx="1370160" cy="197280"/>
+          </a:xfrm>
+          <a:prstGeom prst="rect">
+            <a:avLst/>
+          </a:prstGeom>
+          <a:noFill/>
+          <a:ln w="12700">
+            <a:noFill/>
+          </a:ln>
+        </p:spPr>
+        <p:style>
+          <a:lnRef idx="0"/>
+          <a:fillRef idx="0"/>
+          <a:effectRef idx="0"/>
+          <a:fontRef idx="minor"/>
+        </p:style>
+        <p:txBody>
+          <a:bodyPr lIns="0" rIns="0" tIns="0" bIns="0" anchor="ctr">
+            <a:spAutoFit/>
+          </a:bodyPr>
+          <a:p>
+            <a:pPr>
+              <a:lnSpc>
+                <a:spcPct val="100000"/>
+              </a:lnSpc>
+              <a:tabLst>
+                <a:tab algn="l" pos="0"/>
+              </a:tabLst>
+            </a:pPr>
+            <a:r>
+              <a:rPr b="1" lang="en-US" sz="1300" spc="-1" strike="noStrike">
+                <a:solidFill>
+                  <a:srgbClr val="2ee5ba"/>
+                </a:solidFill>
+                <a:latin typeface="Calibri"/>
+                <a:ea typeface="Calibri"/>
+              </a:rPr>
+              <a:t>Top-1</a:t>
+            </a:r>
+            <a:endParaRPr b="0" lang="en-US" sz="1300" spc="-1" strike="noStrike">
+              <a:solidFill>
+                <a:srgbClr val="000000"/>
+              </a:solidFill>
+              <a:latin typeface="Arial"/>
+            </a:endParaRPr>
+          </a:p>
+        </p:txBody>
+      </p:sp>
+      <p:sp>
+        <p:nvSpPr>
+          <p:cNvPr id="75" name="Text 6"/>
+          <p:cNvSpPr/>
+          <p:nvPr/>
+        </p:nvSpPr>
+        <p:spPr>
+          <a:xfrm>
+            <a:off x="3840480" y="1638360"/>
+            <a:ext cx="1370160" cy="197280"/>
+          </a:xfrm>
+          <a:prstGeom prst="rect">
+            <a:avLst/>
+          </a:prstGeom>
+          <a:noFill/>
+          <a:ln w="12700">
+            <a:noFill/>
+          </a:ln>
+        </p:spPr>
+        <p:style>
+          <a:lnRef idx="0"/>
+          <a:fillRef idx="0"/>
+          <a:effectRef idx="0"/>
+          <a:fontRef idx="minor"/>
+        </p:style>
+        <p:txBody>
+          <a:bodyPr lIns="0" rIns="0" tIns="0" bIns="0" anchor="ctr">
+            <a:spAutoFit/>
+          </a:bodyPr>
+          <a:p>
+            <a:pPr>
+              <a:lnSpc>
+                <a:spcPct val="100000"/>
+              </a:lnSpc>
+              <a:tabLst>
+                <a:tab algn="l" pos="0"/>
+              </a:tabLst>
+            </a:pPr>
+            <a:r>
+              <a:rPr b="1" lang="en-US" sz="1300" spc="-1" strike="noStrike">
+                <a:solidFill>
+                  <a:srgbClr val="2ee5ba"/>
+                </a:solidFill>
+                <a:latin typeface="Calibri"/>
+                <a:ea typeface="Calibri"/>
+              </a:rPr>
+              <a:t>Top-5</a:t>
+            </a:r>
+            <a:endParaRPr b="0" lang="en-US" sz="1300" spc="-1" strike="noStrike">
+              <a:solidFill>
+                <a:srgbClr val="000000"/>
+              </a:solidFill>
+              <a:latin typeface="Arial"/>
+            </a:endParaRPr>
+          </a:p>
+        </p:txBody>
+      </p:sp>
+      <p:sp>
+        <p:nvSpPr>
+          <p:cNvPr id="76" name="Text 7"/>
+          <p:cNvSpPr/>
+          <p:nvPr/>
+        </p:nvSpPr>
+        <p:spPr>
+          <a:xfrm>
+            <a:off x="5486400" y="1638360"/>
+            <a:ext cx="2284560" cy="197280"/>
+          </a:xfrm>
+          <a:prstGeom prst="rect">
+            <a:avLst/>
+          </a:prstGeom>
+          <a:noFill/>
+          <a:ln w="12700">
+            <a:noFill/>
+          </a:ln>
+        </p:spPr>
+        <p:style>
+          <a:lnRef idx="0"/>
+          <a:fillRef idx="0"/>
+          <a:effectRef idx="0"/>
+          <a:fontRef idx="minor"/>
+        </p:style>
+        <p:txBody>
+          <a:bodyPr lIns="0" rIns="0" tIns="0" bIns="0" anchor="ctr">
+            <a:spAutoFit/>
+          </a:bodyPr>
+          <a:p>
+            <a:pPr>
+              <a:lnSpc>
+                <a:spcPct val="100000"/>
+              </a:lnSpc>
+              <a:tabLst>
+                <a:tab algn="l" pos="0"/>
+              </a:tabLst>
+            </a:pPr>
+            <a:r>
+              <a:rPr b="1" lang="en-US" sz="1300" spc="-1" strike="noStrike">
+                <a:solidFill>
+                  <a:srgbClr val="2ee5ba"/>
+                </a:solidFill>
+                <a:latin typeface="Calibri"/>
+                <a:ea typeface="Calibri"/>
+              </a:rPr>
+              <a:t>Median Rank</a:t>
+            </a:r>
+            <a:endParaRPr b="0" lang="en-US" sz="1300" spc="-1" strike="noStrike">
+              <a:solidFill>
+                <a:srgbClr val="000000"/>
+              </a:solidFill>
+              <a:latin typeface="Arial"/>
+            </a:endParaRPr>
+          </a:p>
+        </p:txBody>
+      </p:sp>
+      <p:sp>
+        <p:nvSpPr>
+          <p:cNvPr id="77" name="Text 8"/>
+          <p:cNvSpPr/>
+          <p:nvPr/>
+        </p:nvSpPr>
+        <p:spPr>
+          <a:xfrm>
+            <a:off x="548640" y="2027520"/>
+            <a:ext cx="1370160" cy="242640"/>
+          </a:xfrm>
+          <a:prstGeom prst="rect">
+            <a:avLst/>
+          </a:prstGeom>
+          <a:noFill/>
+          <a:ln w="12700">
+            <a:noFill/>
+          </a:ln>
+        </p:spPr>
+        <p:style>
+          <a:lnRef idx="0"/>
+          <a:fillRef idx="0"/>
+          <a:effectRef idx="0"/>
+          <a:fontRef idx="minor"/>
+        </p:style>
+        <p:txBody>
+          <a:bodyPr lIns="0" rIns="0" tIns="0" bIns="0" anchor="ctr">
+            <a:spAutoFit/>
+          </a:bodyPr>
+          <a:p>
+            <a:pPr>
+              <a:lnSpc>
+                <a:spcPct val="100000"/>
+              </a:lnSpc>
+              <a:tabLst>
+                <a:tab algn="l" pos="0"/>
+              </a:tabLst>
+            </a:pPr>
+            <a:r>
+              <a:rPr b="0" lang="en-US" sz="1600" spc="-1" strike="noStrike">
                 <a:solidFill>
                   <a:srgbClr val="ffffff"/>
                 </a:solidFill>
                 <a:latin typeface="Calibri"/>
                 <a:ea typeface="Calibri"/>
               </a:rPr>
-              <a:t>5-fold CV, alphas = logspace(-3, 6, 10)</a:t>
-            </a:r>
-            <a:endParaRPr b="0" lang="en-US" sz="1400" spc="-1" strike="noStrike">
-              <a:solidFill>
-                <a:srgbClr val="000000"/>
-              </a:solidFill>
-              <a:latin typeface="Arial"/>
-            </a:endParaRPr>
-          </a:p>
-        </p:txBody>
-      </p:sp>
-      <p:sp>
-        <p:nvSpPr>
-          <p:cNvPr id="74" name="Text 5"/>
-          <p:cNvSpPr/>
-          <p:nvPr/>
-        </p:nvSpPr>
-        <p:spPr>
-          <a:xfrm>
-            <a:off x="502920" y="1966320"/>
-            <a:ext cx="2559960" cy="227520"/>
-          </a:xfrm>
-          <a:prstGeom prst="rect">
-            <a:avLst/>
-          </a:prstGeom>
-          <a:noFill/>
-          <a:ln w="12700">
-            <a:noFill/>
-          </a:ln>
-        </p:spPr>
-        <p:style>
-          <a:lnRef idx="0"/>
-          <a:fillRef idx="0"/>
-          <a:effectRef idx="0"/>
-          <a:fontRef idx="minor"/>
-        </p:style>
-        <p:txBody>
-          <a:bodyPr lIns="0" rIns="0" tIns="0" bIns="0" anchor="ctr">
-            <a:spAutoFit/>
-          </a:bodyPr>
-          <a:p>
-            <a:pPr>
-              <a:lnSpc>
-                <a:spcPct val="100000"/>
-              </a:lnSpc>
-              <a:tabLst>
-                <a:tab algn="l" pos="0"/>
-              </a:tabLst>
-            </a:pPr>
-            <a:r>
-              <a:rPr b="1" lang="en-US" sz="1500" spc="-1" strike="noStrike">
-                <a:solidFill>
-                  <a:srgbClr val="2ee5ba"/>
-                </a:solidFill>
-                <a:latin typeface="Calibri"/>
-                <a:ea typeface="Calibri"/>
-              </a:rPr>
-              <a:t>Mapping</a:t>
-            </a:r>
-            <a:endParaRPr b="0" lang="en-US" sz="1500" spc="-1" strike="noStrike">
-              <a:solidFill>
-                <a:srgbClr val="000000"/>
-              </a:solidFill>
-              <a:latin typeface="Arial"/>
-            </a:endParaRPr>
-          </a:p>
-        </p:txBody>
-      </p:sp>
-      <p:sp>
-        <p:nvSpPr>
-          <p:cNvPr id="75" name="Text 6"/>
-          <p:cNvSpPr/>
-          <p:nvPr/>
-        </p:nvSpPr>
-        <p:spPr>
-          <a:xfrm>
-            <a:off x="3200400" y="2019960"/>
-            <a:ext cx="5303160" cy="212400"/>
-          </a:xfrm>
-          <a:prstGeom prst="rect">
-            <a:avLst/>
-          </a:prstGeom>
-          <a:noFill/>
-          <a:ln w="12700">
-            <a:noFill/>
-          </a:ln>
-        </p:spPr>
-        <p:style>
-          <a:lnRef idx="0"/>
-          <a:fillRef idx="0"/>
-          <a:effectRef idx="0"/>
-          <a:fontRef idx="minor"/>
-        </p:style>
-        <p:txBody>
-          <a:bodyPr lIns="0" rIns="0" tIns="0" bIns="0" anchor="ctr">
-            <a:spAutoFit/>
-          </a:bodyPr>
-          <a:p>
-            <a:pPr>
-              <a:lnSpc>
-                <a:spcPct val="100000"/>
-              </a:lnSpc>
-              <a:tabLst>
-                <a:tab algn="l" pos="0"/>
-              </a:tabLst>
-            </a:pPr>
-            <a:r>
-              <a:rPr b="0" lang="en-US" sz="1400" spc="-1" strike="noStrike">
+              <a:t>01</a:t>
+            </a:r>
+            <a:endParaRPr b="0" lang="en-US" sz="1600" spc="-1" strike="noStrike">
+              <a:solidFill>
+                <a:srgbClr val="000000"/>
+              </a:solidFill>
+              <a:latin typeface="Arial"/>
+            </a:endParaRPr>
+          </a:p>
+        </p:txBody>
+      </p:sp>
+      <p:sp>
+        <p:nvSpPr>
+          <p:cNvPr id="78" name="Text 9"/>
+          <p:cNvSpPr/>
+          <p:nvPr/>
+        </p:nvSpPr>
+        <p:spPr>
+          <a:xfrm>
+            <a:off x="2194560" y="2027520"/>
+            <a:ext cx="1370160" cy="242640"/>
+          </a:xfrm>
+          <a:prstGeom prst="rect">
+            <a:avLst/>
+          </a:prstGeom>
+          <a:noFill/>
+          <a:ln w="12700">
+            <a:noFill/>
+          </a:ln>
+        </p:spPr>
+        <p:style>
+          <a:lnRef idx="0"/>
+          <a:fillRef idx="0"/>
+          <a:effectRef idx="0"/>
+          <a:fontRef idx="minor"/>
+        </p:style>
+        <p:txBody>
+          <a:bodyPr lIns="0" rIns="0" tIns="0" bIns="0" anchor="ctr">
+            <a:spAutoFit/>
+          </a:bodyPr>
+          <a:p>
+            <a:pPr>
+              <a:lnSpc>
+                <a:spcPct val="100000"/>
+              </a:lnSpc>
+              <a:tabLst>
+                <a:tab algn="l" pos="0"/>
+              </a:tabLst>
+            </a:pPr>
+            <a:r>
+              <a:rPr b="0" lang="en-US" sz="1600" spc="-1" strike="noStrike">
                 <a:solidFill>
                   <a:srgbClr val="ffffff"/>
                 </a:solidFill>
                 <a:latin typeface="Calibri"/>
                 <a:ea typeface="Calibri"/>
               </a:rPr>
-              <a:t>PCA video features → full EEG response (17 ch × 300 samples)</a:t>
-            </a:r>
-            <a:endParaRPr b="0" lang="en-US" sz="1400" spc="-1" strike="noStrike">
-              <a:solidFill>
-                <a:srgbClr val="000000"/>
-              </a:solidFill>
-              <a:latin typeface="Arial"/>
-            </a:endParaRPr>
-          </a:p>
-        </p:txBody>
-      </p:sp>
-      <p:sp>
-        <p:nvSpPr>
-          <p:cNvPr id="76" name="Text 7"/>
-          <p:cNvSpPr/>
-          <p:nvPr/>
-        </p:nvSpPr>
-        <p:spPr>
-          <a:xfrm>
-            <a:off x="502920" y="2606400"/>
-            <a:ext cx="2559960" cy="227520"/>
-          </a:xfrm>
-          <a:prstGeom prst="rect">
-            <a:avLst/>
-          </a:prstGeom>
-          <a:noFill/>
-          <a:ln w="12700">
-            <a:noFill/>
-          </a:ln>
-        </p:spPr>
-        <p:style>
-          <a:lnRef idx="0"/>
-          <a:fillRef idx="0"/>
-          <a:effectRef idx="0"/>
-          <a:fontRef idx="minor"/>
-        </p:style>
-        <p:txBody>
-          <a:bodyPr lIns="0" rIns="0" tIns="0" bIns="0" anchor="ctr">
-            <a:spAutoFit/>
-          </a:bodyPr>
-          <a:p>
-            <a:pPr>
-              <a:lnSpc>
-                <a:spcPct val="100000"/>
-              </a:lnSpc>
-              <a:tabLst>
-                <a:tab algn="l" pos="0"/>
-              </a:tabLst>
-            </a:pPr>
-            <a:r>
-              <a:rPr b="1" lang="en-US" sz="1500" spc="-1" strike="noStrike">
-                <a:solidFill>
-                  <a:srgbClr val="2ee5ba"/>
-                </a:solidFill>
-                <a:latin typeface="Calibri"/>
-                <a:ea typeface="Calibri"/>
-              </a:rPr>
-              <a:t>Selected alphas</a:t>
-            </a:r>
-            <a:endParaRPr b="0" lang="en-US" sz="1500" spc="-1" strike="noStrike">
-              <a:solidFill>
-                <a:srgbClr val="000000"/>
-              </a:solidFill>
-              <a:latin typeface="Arial"/>
-            </a:endParaRPr>
-          </a:p>
-        </p:txBody>
-      </p:sp>
-      <p:sp>
-        <p:nvSpPr>
-          <p:cNvPr id="77" name="Text 8"/>
-          <p:cNvSpPr/>
-          <p:nvPr/>
-        </p:nvSpPr>
-        <p:spPr>
-          <a:xfrm>
-            <a:off x="3200400" y="2660040"/>
-            <a:ext cx="5303160" cy="212400"/>
-          </a:xfrm>
-          <a:prstGeom prst="rect">
-            <a:avLst/>
-          </a:prstGeom>
-          <a:noFill/>
-          <a:ln w="12700">
-            <a:noFill/>
-          </a:ln>
-        </p:spPr>
-        <p:style>
-          <a:lnRef idx="0"/>
-          <a:fillRef idx="0"/>
-          <a:effectRef idx="0"/>
-          <a:fontRef idx="minor"/>
-        </p:style>
-        <p:txBody>
-          <a:bodyPr lIns="0" rIns="0" tIns="0" bIns="0" anchor="ctr">
-            <a:spAutoFit/>
-          </a:bodyPr>
-          <a:p>
-            <a:pPr>
-              <a:lnSpc>
-                <a:spcPct val="100000"/>
-              </a:lnSpc>
-              <a:tabLst>
-                <a:tab algn="l" pos="0"/>
-              </a:tabLst>
-            </a:pPr>
-            <a:r>
-              <a:rPr b="0" lang="en-US" sz="1400" spc="-1" strike="noStrike">
+              <a:t>5.9%</a:t>
+            </a:r>
+            <a:endParaRPr b="0" lang="en-US" sz="1600" spc="-1" strike="noStrike">
+              <a:solidFill>
+                <a:srgbClr val="000000"/>
+              </a:solidFill>
+              <a:latin typeface="Arial"/>
+            </a:endParaRPr>
+          </a:p>
+        </p:txBody>
+      </p:sp>
+      <p:sp>
+        <p:nvSpPr>
+          <p:cNvPr id="79" name="Text 10"/>
+          <p:cNvSpPr/>
+          <p:nvPr/>
+        </p:nvSpPr>
+        <p:spPr>
+          <a:xfrm>
+            <a:off x="3840480" y="2027520"/>
+            <a:ext cx="1370160" cy="242640"/>
+          </a:xfrm>
+          <a:prstGeom prst="rect">
+            <a:avLst/>
+          </a:prstGeom>
+          <a:noFill/>
+          <a:ln w="12700">
+            <a:noFill/>
+          </a:ln>
+        </p:spPr>
+        <p:style>
+          <a:lnRef idx="0"/>
+          <a:fillRef idx="0"/>
+          <a:effectRef idx="0"/>
+          <a:fontRef idx="minor"/>
+        </p:style>
+        <p:txBody>
+          <a:bodyPr lIns="0" rIns="0" tIns="0" bIns="0" anchor="ctr">
+            <a:spAutoFit/>
+          </a:bodyPr>
+          <a:p>
+            <a:pPr>
+              <a:lnSpc>
+                <a:spcPct val="100000"/>
+              </a:lnSpc>
+              <a:tabLst>
+                <a:tab algn="l" pos="0"/>
+              </a:tabLst>
+            </a:pPr>
+            <a:r>
+              <a:rPr b="0" lang="en-US" sz="1600" spc="-1" strike="noStrike">
                 <a:solidFill>
                   <a:srgbClr val="ffffff"/>
                 </a:solidFill>
                 <a:latin typeface="Calibri"/>
                 <a:ea typeface="Calibri"/>
               </a:rPr>
-              <a:t>1e4 or 1e5 depending on subject</a:t>
-            </a:r>
-            <a:endParaRPr b="0" lang="en-US" sz="1400" spc="-1" strike="noStrike">
-              <a:solidFill>
-                <a:srgbClr val="000000"/>
-              </a:solidFill>
-              <a:latin typeface="Arial"/>
-            </a:endParaRPr>
-          </a:p>
-        </p:txBody>
-      </p:sp>
-      <p:sp>
-        <p:nvSpPr>
-          <p:cNvPr id="78" name="Text 9"/>
-          <p:cNvSpPr/>
-          <p:nvPr/>
-        </p:nvSpPr>
-        <p:spPr>
-          <a:xfrm>
-            <a:off x="502920" y="3246480"/>
-            <a:ext cx="2559960" cy="227520"/>
-          </a:xfrm>
-          <a:prstGeom prst="rect">
-            <a:avLst/>
-          </a:prstGeom>
-          <a:noFill/>
-          <a:ln w="12700">
-            <a:noFill/>
-          </a:ln>
-        </p:spPr>
-        <p:style>
-          <a:lnRef idx="0"/>
-          <a:fillRef idx="0"/>
-          <a:effectRef idx="0"/>
-          <a:fontRef idx="minor"/>
-        </p:style>
-        <p:txBody>
-          <a:bodyPr lIns="0" rIns="0" tIns="0" bIns="0" anchor="ctr">
-            <a:spAutoFit/>
-          </a:bodyPr>
-          <a:p>
-            <a:pPr>
-              <a:lnSpc>
-                <a:spcPct val="100000"/>
-              </a:lnSpc>
-              <a:tabLst>
-                <a:tab algn="l" pos="0"/>
-              </a:tabLst>
-            </a:pPr>
-            <a:r>
-              <a:rPr b="1" lang="en-US" sz="1500" spc="-1" strike="noStrike">
-                <a:solidFill>
-                  <a:srgbClr val="2ee5ba"/>
-                </a:solidFill>
-                <a:latin typeface="Calibri"/>
-                <a:ea typeface="Calibri"/>
-              </a:rPr>
-              <a:t>Retrieval</a:t>
-            </a:r>
-            <a:endParaRPr b="0" lang="en-US" sz="1500" spc="-1" strike="noStrike">
-              <a:solidFill>
-                <a:srgbClr val="000000"/>
-              </a:solidFill>
-              <a:latin typeface="Arial"/>
-            </a:endParaRPr>
-          </a:p>
-        </p:txBody>
-      </p:sp>
-      <p:sp>
-        <p:nvSpPr>
-          <p:cNvPr id="79" name="Text 10"/>
-          <p:cNvSpPr/>
-          <p:nvPr/>
-        </p:nvSpPr>
-        <p:spPr>
-          <a:xfrm>
-            <a:off x="3200400" y="3300120"/>
-            <a:ext cx="5303160" cy="212400"/>
-          </a:xfrm>
-          <a:prstGeom prst="rect">
-            <a:avLst/>
-          </a:prstGeom>
-          <a:noFill/>
-          <a:ln w="12700">
-            <a:noFill/>
-          </a:ln>
-        </p:spPr>
-        <p:style>
-          <a:lnRef idx="0"/>
-          <a:fillRef idx="0"/>
-          <a:effectRef idx="0"/>
-          <a:fontRef idx="minor"/>
-        </p:style>
-        <p:txBody>
-          <a:bodyPr lIns="0" rIns="0" tIns="0" bIns="0" anchor="ctr">
-            <a:spAutoFit/>
-          </a:bodyPr>
-          <a:p>
-            <a:pPr>
-              <a:lnSpc>
-                <a:spcPct val="100000"/>
-              </a:lnSpc>
-              <a:tabLst>
-                <a:tab algn="l" pos="0"/>
-              </a:tabLst>
-            </a:pPr>
-            <a:r>
-              <a:rPr b="0" lang="en-US" sz="1400" spc="-1" strike="noStrike">
+              <a:t>24.5%</a:t>
+            </a:r>
+            <a:endParaRPr b="0" lang="en-US" sz="1600" spc="-1" strike="noStrike">
+              <a:solidFill>
+                <a:srgbClr val="000000"/>
+              </a:solidFill>
+              <a:latin typeface="Arial"/>
+            </a:endParaRPr>
+          </a:p>
+        </p:txBody>
+      </p:sp>
+      <p:sp>
+        <p:nvSpPr>
+          <p:cNvPr id="80" name="Text 11"/>
+          <p:cNvSpPr/>
+          <p:nvPr/>
+        </p:nvSpPr>
+        <p:spPr>
+          <a:xfrm>
+            <a:off x="5486400" y="2027520"/>
+            <a:ext cx="2284560" cy="242640"/>
+          </a:xfrm>
+          <a:prstGeom prst="rect">
+            <a:avLst/>
+          </a:prstGeom>
+          <a:noFill/>
+          <a:ln w="12700">
+            <a:noFill/>
+          </a:ln>
+        </p:spPr>
+        <p:style>
+          <a:lnRef idx="0"/>
+          <a:fillRef idx="0"/>
+          <a:effectRef idx="0"/>
+          <a:fontRef idx="minor"/>
+        </p:style>
+        <p:txBody>
+          <a:bodyPr lIns="0" rIns="0" tIns="0" bIns="0" anchor="ctr">
+            <a:spAutoFit/>
+          </a:bodyPr>
+          <a:p>
+            <a:pPr>
+              <a:lnSpc>
+                <a:spcPct val="100000"/>
+              </a:lnSpc>
+              <a:tabLst>
+                <a:tab algn="l" pos="0"/>
+              </a:tabLst>
+            </a:pPr>
+            <a:r>
+              <a:rPr b="0" lang="en-US" sz="1600" spc="-1" strike="noStrike">
                 <a:solidFill>
                   <a:srgbClr val="ffffff"/>
                 </a:solidFill>
                 <a:latin typeface="Calibri"/>
                 <a:ea typeface="Calibri"/>
               </a:rPr>
-              <a:t>Predict EEG for each of 102 candidates, rank by Pearson correlation</a:t>
-            </a:r>
-            <a:endParaRPr b="0" lang="en-US" sz="1400" spc="-1" strike="noStrike">
-              <a:solidFill>
-                <a:srgbClr val="000000"/>
-              </a:solidFill>
-              <a:latin typeface="Arial"/>
-            </a:endParaRPr>
-          </a:p>
-        </p:txBody>
-      </p:sp>
-      <p:sp>
-        <p:nvSpPr>
-          <p:cNvPr id="80" name="Text 11"/>
-          <p:cNvSpPr/>
-          <p:nvPr/>
-        </p:nvSpPr>
-        <p:spPr>
-          <a:xfrm>
-            <a:off x="502920" y="3886560"/>
-            <a:ext cx="2559960" cy="227520"/>
-          </a:xfrm>
-          <a:prstGeom prst="rect">
-            <a:avLst/>
-          </a:prstGeom>
-          <a:noFill/>
-          <a:ln w="12700">
-            <a:noFill/>
-          </a:ln>
-        </p:spPr>
-        <p:style>
-          <a:lnRef idx="0"/>
-          <a:fillRef idx="0"/>
-          <a:effectRef idx="0"/>
-          <a:fontRef idx="minor"/>
-        </p:style>
-        <p:txBody>
-          <a:bodyPr lIns="0" rIns="0" tIns="0" bIns="0" anchor="ctr">
-            <a:spAutoFit/>
-          </a:bodyPr>
-          <a:p>
-            <a:pPr>
-              <a:lnSpc>
-                <a:spcPct val="100000"/>
-              </a:lnSpc>
-              <a:tabLst>
-                <a:tab algn="l" pos="0"/>
-              </a:tabLst>
-            </a:pPr>
-            <a:r>
-              <a:rPr b="1" lang="en-US" sz="1500" spc="-1" strike="noStrike">
-                <a:solidFill>
-                  <a:srgbClr val="2ee5ba"/>
-                </a:solidFill>
-                <a:latin typeface="Calibri"/>
-                <a:ea typeface="Calibri"/>
-              </a:rPr>
-              <a:t>Why it worked</a:t>
-            </a:r>
-            <a:endParaRPr b="0" lang="en-US" sz="1500" spc="-1" strike="noStrike">
+              <a:t>15.0</a:t>
+            </a:r>
+            <a:endParaRPr b="0" lang="en-US" sz="1600" spc="-1" strike="noStrike">
               <a:solidFill>
                 <a:srgbClr val="000000"/>
               </a:solidFill>
@@ -4756,65 +4787,692 @@
         </p:nvSpPr>
         <p:spPr>
           <a:xfrm>
-            <a:off x="3200400" y="3940200"/>
-            <a:ext cx="5303160" cy="212400"/>
-          </a:xfrm>
-          <a:prstGeom prst="rect">
-            <a:avLst/>
-          </a:prstGeom>
-          <a:noFill/>
-          <a:ln w="12700">
-            <a:noFill/>
-          </a:ln>
-        </p:spPr>
-        <p:style>
-          <a:lnRef idx="0"/>
-          <a:fillRef idx="0"/>
-          <a:effectRef idx="0"/>
-          <a:fontRef idx="minor"/>
-        </p:style>
-        <p:txBody>
-          <a:bodyPr lIns="0" rIns="0" tIns="0" bIns="0" anchor="ctr">
-            <a:spAutoFit/>
-          </a:bodyPr>
-          <a:p>
-            <a:pPr>
-              <a:lnSpc>
-                <a:spcPct val="100000"/>
-              </a:lnSpc>
-              <a:tabLst>
-                <a:tab algn="l" pos="0"/>
-              </a:tabLst>
-            </a:pPr>
-            <a:r>
-              <a:rPr b="0" lang="en-US" sz="1400" spc="-1" strike="noStrike">
+            <a:off x="548640" y="2530440"/>
+            <a:ext cx="1370160" cy="242640"/>
+          </a:xfrm>
+          <a:prstGeom prst="rect">
+            <a:avLst/>
+          </a:prstGeom>
+          <a:noFill/>
+          <a:ln w="12700">
+            <a:noFill/>
+          </a:ln>
+        </p:spPr>
+        <p:style>
+          <a:lnRef idx="0"/>
+          <a:fillRef idx="0"/>
+          <a:effectRef idx="0"/>
+          <a:fontRef idx="minor"/>
+        </p:style>
+        <p:txBody>
+          <a:bodyPr lIns="0" rIns="0" tIns="0" bIns="0" anchor="ctr">
+            <a:spAutoFit/>
+          </a:bodyPr>
+          <a:p>
+            <a:pPr>
+              <a:lnSpc>
+                <a:spcPct val="100000"/>
+              </a:lnSpc>
+              <a:tabLst>
+                <a:tab algn="l" pos="0"/>
+              </a:tabLst>
+            </a:pPr>
+            <a:r>
+              <a:rPr b="0" lang="en-US" sz="1600" spc="-1" strike="noStrike">
                 <a:solidFill>
                   <a:srgbClr val="ffffff"/>
                 </a:solidFill>
                 <a:latin typeface="Calibri"/>
                 <a:ea typeface="Calibri"/>
               </a:rPr>
-              <a:t>Strong regularization helped generalization; learned models overfit</a:t>
-            </a:r>
-            <a:endParaRPr b="0" lang="en-US" sz="1400" spc="-1" strike="noStrike">
-              <a:solidFill>
-                <a:srgbClr val="000000"/>
-              </a:solidFill>
-              <a:latin typeface="Arial"/>
-            </a:endParaRPr>
-          </a:p>
-        </p:txBody>
-      </p:sp>
-      <p:sp>
-        <p:nvSpPr>
-          <p:cNvPr id="82" name="Shape 13"/>
+              <a:t>02</a:t>
+            </a:r>
+            <a:endParaRPr b="0" lang="en-US" sz="1600" spc="-1" strike="noStrike">
+              <a:solidFill>
+                <a:srgbClr val="000000"/>
+              </a:solidFill>
+              <a:latin typeface="Arial"/>
+            </a:endParaRPr>
+          </a:p>
+        </p:txBody>
+      </p:sp>
+      <p:sp>
+        <p:nvSpPr>
+          <p:cNvPr id="82" name="Text 13"/>
+          <p:cNvSpPr/>
+          <p:nvPr/>
+        </p:nvSpPr>
+        <p:spPr>
+          <a:xfrm>
+            <a:off x="2194560" y="2530440"/>
+            <a:ext cx="1370160" cy="242640"/>
+          </a:xfrm>
+          <a:prstGeom prst="rect">
+            <a:avLst/>
+          </a:prstGeom>
+          <a:noFill/>
+          <a:ln w="12700">
+            <a:noFill/>
+          </a:ln>
+        </p:spPr>
+        <p:style>
+          <a:lnRef idx="0"/>
+          <a:fillRef idx="0"/>
+          <a:effectRef idx="0"/>
+          <a:fontRef idx="minor"/>
+        </p:style>
+        <p:txBody>
+          <a:bodyPr lIns="0" rIns="0" tIns="0" bIns="0" anchor="ctr">
+            <a:spAutoFit/>
+          </a:bodyPr>
+          <a:p>
+            <a:pPr>
+              <a:lnSpc>
+                <a:spcPct val="100000"/>
+              </a:lnSpc>
+              <a:tabLst>
+                <a:tab algn="l" pos="0"/>
+              </a:tabLst>
+            </a:pPr>
+            <a:r>
+              <a:rPr b="0" lang="en-US" sz="1600" spc="-1" strike="noStrike">
+                <a:solidFill>
+                  <a:srgbClr val="ffffff"/>
+                </a:solidFill>
+                <a:latin typeface="Calibri"/>
+                <a:ea typeface="Calibri"/>
+              </a:rPr>
+              <a:t>3.9%</a:t>
+            </a:r>
+            <a:endParaRPr b="0" lang="en-US" sz="1600" spc="-1" strike="noStrike">
+              <a:solidFill>
+                <a:srgbClr val="000000"/>
+              </a:solidFill>
+              <a:latin typeface="Arial"/>
+            </a:endParaRPr>
+          </a:p>
+        </p:txBody>
+      </p:sp>
+      <p:sp>
+        <p:nvSpPr>
+          <p:cNvPr id="83" name="Text 14"/>
+          <p:cNvSpPr/>
+          <p:nvPr/>
+        </p:nvSpPr>
+        <p:spPr>
+          <a:xfrm>
+            <a:off x="3840480" y="2530440"/>
+            <a:ext cx="1370160" cy="242640"/>
+          </a:xfrm>
+          <a:prstGeom prst="rect">
+            <a:avLst/>
+          </a:prstGeom>
+          <a:noFill/>
+          <a:ln w="12700">
+            <a:noFill/>
+          </a:ln>
+        </p:spPr>
+        <p:style>
+          <a:lnRef idx="0"/>
+          <a:fillRef idx="0"/>
+          <a:effectRef idx="0"/>
+          <a:fontRef idx="minor"/>
+        </p:style>
+        <p:txBody>
+          <a:bodyPr lIns="0" rIns="0" tIns="0" bIns="0" anchor="ctr">
+            <a:spAutoFit/>
+          </a:bodyPr>
+          <a:p>
+            <a:pPr>
+              <a:lnSpc>
+                <a:spcPct val="100000"/>
+              </a:lnSpc>
+              <a:tabLst>
+                <a:tab algn="l" pos="0"/>
+              </a:tabLst>
+            </a:pPr>
+            <a:r>
+              <a:rPr b="0" lang="en-US" sz="1600" spc="-1" strike="noStrike">
+                <a:solidFill>
+                  <a:srgbClr val="ffffff"/>
+                </a:solidFill>
+                <a:latin typeface="Calibri"/>
+                <a:ea typeface="Calibri"/>
+              </a:rPr>
+              <a:t>24.5%</a:t>
+            </a:r>
+            <a:endParaRPr b="0" lang="en-US" sz="1600" spc="-1" strike="noStrike">
+              <a:solidFill>
+                <a:srgbClr val="000000"/>
+              </a:solidFill>
+              <a:latin typeface="Arial"/>
+            </a:endParaRPr>
+          </a:p>
+        </p:txBody>
+      </p:sp>
+      <p:sp>
+        <p:nvSpPr>
+          <p:cNvPr id="84" name="Text 15"/>
+          <p:cNvSpPr/>
+          <p:nvPr/>
+        </p:nvSpPr>
+        <p:spPr>
+          <a:xfrm>
+            <a:off x="5486400" y="2530440"/>
+            <a:ext cx="2284560" cy="242640"/>
+          </a:xfrm>
+          <a:prstGeom prst="rect">
+            <a:avLst/>
+          </a:prstGeom>
+          <a:noFill/>
+          <a:ln w="12700">
+            <a:noFill/>
+          </a:ln>
+        </p:spPr>
+        <p:style>
+          <a:lnRef idx="0"/>
+          <a:fillRef idx="0"/>
+          <a:effectRef idx="0"/>
+          <a:fontRef idx="minor"/>
+        </p:style>
+        <p:txBody>
+          <a:bodyPr lIns="0" rIns="0" tIns="0" bIns="0" anchor="ctr">
+            <a:spAutoFit/>
+          </a:bodyPr>
+          <a:p>
+            <a:pPr>
+              <a:lnSpc>
+                <a:spcPct val="100000"/>
+              </a:lnSpc>
+              <a:tabLst>
+                <a:tab algn="l" pos="0"/>
+              </a:tabLst>
+            </a:pPr>
+            <a:r>
+              <a:rPr b="0" lang="en-US" sz="1600" spc="-1" strike="noStrike">
+                <a:solidFill>
+                  <a:srgbClr val="ffffff"/>
+                </a:solidFill>
+                <a:latin typeface="Calibri"/>
+                <a:ea typeface="Calibri"/>
+              </a:rPr>
+              <a:t>19.5</a:t>
+            </a:r>
+            <a:endParaRPr b="0" lang="en-US" sz="1600" spc="-1" strike="noStrike">
+              <a:solidFill>
+                <a:srgbClr val="000000"/>
+              </a:solidFill>
+              <a:latin typeface="Arial"/>
+            </a:endParaRPr>
+          </a:p>
+        </p:txBody>
+      </p:sp>
+      <p:sp>
+        <p:nvSpPr>
+          <p:cNvPr id="85" name="Text 16"/>
+          <p:cNvSpPr/>
+          <p:nvPr/>
+        </p:nvSpPr>
+        <p:spPr>
+          <a:xfrm>
+            <a:off x="548640" y="3033360"/>
+            <a:ext cx="1370160" cy="242640"/>
+          </a:xfrm>
+          <a:prstGeom prst="rect">
+            <a:avLst/>
+          </a:prstGeom>
+          <a:noFill/>
+          <a:ln w="12700">
+            <a:noFill/>
+          </a:ln>
+        </p:spPr>
+        <p:style>
+          <a:lnRef idx="0"/>
+          <a:fillRef idx="0"/>
+          <a:effectRef idx="0"/>
+          <a:fontRef idx="minor"/>
+        </p:style>
+        <p:txBody>
+          <a:bodyPr lIns="0" rIns="0" tIns="0" bIns="0" anchor="ctr">
+            <a:spAutoFit/>
+          </a:bodyPr>
+          <a:p>
+            <a:pPr>
+              <a:lnSpc>
+                <a:spcPct val="100000"/>
+              </a:lnSpc>
+              <a:tabLst>
+                <a:tab algn="l" pos="0"/>
+              </a:tabLst>
+            </a:pPr>
+            <a:r>
+              <a:rPr b="0" lang="en-US" sz="1600" spc="-1" strike="noStrike">
+                <a:solidFill>
+                  <a:srgbClr val="ffffff"/>
+                </a:solidFill>
+                <a:latin typeface="Calibri"/>
+                <a:ea typeface="Calibri"/>
+              </a:rPr>
+              <a:t>03</a:t>
+            </a:r>
+            <a:endParaRPr b="0" lang="en-US" sz="1600" spc="-1" strike="noStrike">
+              <a:solidFill>
+                <a:srgbClr val="000000"/>
+              </a:solidFill>
+              <a:latin typeface="Arial"/>
+            </a:endParaRPr>
+          </a:p>
+        </p:txBody>
+      </p:sp>
+      <p:sp>
+        <p:nvSpPr>
+          <p:cNvPr id="86" name="Text 17"/>
+          <p:cNvSpPr/>
+          <p:nvPr/>
+        </p:nvSpPr>
+        <p:spPr>
+          <a:xfrm>
+            <a:off x="2194560" y="3033360"/>
+            <a:ext cx="1370160" cy="242640"/>
+          </a:xfrm>
+          <a:prstGeom prst="rect">
+            <a:avLst/>
+          </a:prstGeom>
+          <a:noFill/>
+          <a:ln w="12700">
+            <a:noFill/>
+          </a:ln>
+        </p:spPr>
+        <p:style>
+          <a:lnRef idx="0"/>
+          <a:fillRef idx="0"/>
+          <a:effectRef idx="0"/>
+          <a:fontRef idx="minor"/>
+        </p:style>
+        <p:txBody>
+          <a:bodyPr lIns="0" rIns="0" tIns="0" bIns="0" anchor="ctr">
+            <a:spAutoFit/>
+          </a:bodyPr>
+          <a:p>
+            <a:pPr>
+              <a:lnSpc>
+                <a:spcPct val="100000"/>
+              </a:lnSpc>
+              <a:tabLst>
+                <a:tab algn="l" pos="0"/>
+              </a:tabLst>
+            </a:pPr>
+            <a:r>
+              <a:rPr b="0" lang="en-US" sz="1600" spc="-1" strike="noStrike">
+                <a:solidFill>
+                  <a:srgbClr val="ffffff"/>
+                </a:solidFill>
+                <a:latin typeface="Calibri"/>
+                <a:ea typeface="Calibri"/>
+              </a:rPr>
+              <a:t>4.9%</a:t>
+            </a:r>
+            <a:endParaRPr b="0" lang="en-US" sz="1600" spc="-1" strike="noStrike">
+              <a:solidFill>
+                <a:srgbClr val="000000"/>
+              </a:solidFill>
+              <a:latin typeface="Arial"/>
+            </a:endParaRPr>
+          </a:p>
+        </p:txBody>
+      </p:sp>
+      <p:sp>
+        <p:nvSpPr>
+          <p:cNvPr id="87" name="Text 18"/>
+          <p:cNvSpPr/>
+          <p:nvPr/>
+        </p:nvSpPr>
+        <p:spPr>
+          <a:xfrm>
+            <a:off x="3840480" y="3033360"/>
+            <a:ext cx="1370160" cy="242640"/>
+          </a:xfrm>
+          <a:prstGeom prst="rect">
+            <a:avLst/>
+          </a:prstGeom>
+          <a:noFill/>
+          <a:ln w="12700">
+            <a:noFill/>
+          </a:ln>
+        </p:spPr>
+        <p:style>
+          <a:lnRef idx="0"/>
+          <a:fillRef idx="0"/>
+          <a:effectRef idx="0"/>
+          <a:fontRef idx="minor"/>
+        </p:style>
+        <p:txBody>
+          <a:bodyPr lIns="0" rIns="0" tIns="0" bIns="0" anchor="ctr">
+            <a:spAutoFit/>
+          </a:bodyPr>
+          <a:p>
+            <a:pPr>
+              <a:lnSpc>
+                <a:spcPct val="100000"/>
+              </a:lnSpc>
+              <a:tabLst>
+                <a:tab algn="l" pos="0"/>
+              </a:tabLst>
+            </a:pPr>
+            <a:r>
+              <a:rPr b="0" lang="en-US" sz="1600" spc="-1" strike="noStrike">
+                <a:solidFill>
+                  <a:srgbClr val="ffffff"/>
+                </a:solidFill>
+                <a:latin typeface="Calibri"/>
+                <a:ea typeface="Calibri"/>
+              </a:rPr>
+              <a:t>17.7%</a:t>
+            </a:r>
+            <a:endParaRPr b="0" lang="en-US" sz="1600" spc="-1" strike="noStrike">
+              <a:solidFill>
+                <a:srgbClr val="000000"/>
+              </a:solidFill>
+              <a:latin typeface="Arial"/>
+            </a:endParaRPr>
+          </a:p>
+        </p:txBody>
+      </p:sp>
+      <p:sp>
+        <p:nvSpPr>
+          <p:cNvPr id="88" name="Text 19"/>
+          <p:cNvSpPr/>
+          <p:nvPr/>
+        </p:nvSpPr>
+        <p:spPr>
+          <a:xfrm>
+            <a:off x="5486400" y="3033360"/>
+            <a:ext cx="2284560" cy="242640"/>
+          </a:xfrm>
+          <a:prstGeom prst="rect">
+            <a:avLst/>
+          </a:prstGeom>
+          <a:noFill/>
+          <a:ln w="12700">
+            <a:noFill/>
+          </a:ln>
+        </p:spPr>
+        <p:style>
+          <a:lnRef idx="0"/>
+          <a:fillRef idx="0"/>
+          <a:effectRef idx="0"/>
+          <a:fontRef idx="minor"/>
+        </p:style>
+        <p:txBody>
+          <a:bodyPr lIns="0" rIns="0" tIns="0" bIns="0" anchor="ctr">
+            <a:spAutoFit/>
+          </a:bodyPr>
+          <a:p>
+            <a:pPr>
+              <a:lnSpc>
+                <a:spcPct val="100000"/>
+              </a:lnSpc>
+              <a:tabLst>
+                <a:tab algn="l" pos="0"/>
+              </a:tabLst>
+            </a:pPr>
+            <a:r>
+              <a:rPr b="0" lang="en-US" sz="1600" spc="-1" strike="noStrike">
+                <a:solidFill>
+                  <a:srgbClr val="ffffff"/>
+                </a:solidFill>
+                <a:latin typeface="Calibri"/>
+                <a:ea typeface="Calibri"/>
+              </a:rPr>
+              <a:t>20.5</a:t>
+            </a:r>
+            <a:endParaRPr b="0" lang="en-US" sz="1600" spc="-1" strike="noStrike">
+              <a:solidFill>
+                <a:srgbClr val="000000"/>
+              </a:solidFill>
+              <a:latin typeface="Arial"/>
+            </a:endParaRPr>
+          </a:p>
+        </p:txBody>
+      </p:sp>
+      <p:sp>
+        <p:nvSpPr>
+          <p:cNvPr id="89" name="Text 20"/>
+          <p:cNvSpPr/>
+          <p:nvPr/>
+        </p:nvSpPr>
+        <p:spPr>
+          <a:xfrm>
+            <a:off x="548640" y="3536280"/>
+            <a:ext cx="1370160" cy="242640"/>
+          </a:xfrm>
+          <a:prstGeom prst="rect">
+            <a:avLst/>
+          </a:prstGeom>
+          <a:noFill/>
+          <a:ln w="12700">
+            <a:noFill/>
+          </a:ln>
+        </p:spPr>
+        <p:style>
+          <a:lnRef idx="0"/>
+          <a:fillRef idx="0"/>
+          <a:effectRef idx="0"/>
+          <a:fontRef idx="minor"/>
+        </p:style>
+        <p:txBody>
+          <a:bodyPr lIns="0" rIns="0" tIns="0" bIns="0" anchor="ctr">
+            <a:spAutoFit/>
+          </a:bodyPr>
+          <a:p>
+            <a:pPr>
+              <a:lnSpc>
+                <a:spcPct val="100000"/>
+              </a:lnSpc>
+              <a:tabLst>
+                <a:tab algn="l" pos="0"/>
+              </a:tabLst>
+            </a:pPr>
+            <a:r>
+              <a:rPr b="0" lang="en-US" sz="1600" spc="-1" strike="noStrike">
+                <a:solidFill>
+                  <a:srgbClr val="ffffff"/>
+                </a:solidFill>
+                <a:latin typeface="Calibri"/>
+                <a:ea typeface="Calibri"/>
+              </a:rPr>
+              <a:t>04</a:t>
+            </a:r>
+            <a:endParaRPr b="0" lang="en-US" sz="1600" spc="-1" strike="noStrike">
+              <a:solidFill>
+                <a:srgbClr val="000000"/>
+              </a:solidFill>
+              <a:latin typeface="Arial"/>
+            </a:endParaRPr>
+          </a:p>
+        </p:txBody>
+      </p:sp>
+      <p:sp>
+        <p:nvSpPr>
+          <p:cNvPr id="90" name="Text 21"/>
+          <p:cNvSpPr/>
+          <p:nvPr/>
+        </p:nvSpPr>
+        <p:spPr>
+          <a:xfrm>
+            <a:off x="2194560" y="3536280"/>
+            <a:ext cx="1370160" cy="242640"/>
+          </a:xfrm>
+          <a:prstGeom prst="rect">
+            <a:avLst/>
+          </a:prstGeom>
+          <a:noFill/>
+          <a:ln w="12700">
+            <a:noFill/>
+          </a:ln>
+        </p:spPr>
+        <p:style>
+          <a:lnRef idx="0"/>
+          <a:fillRef idx="0"/>
+          <a:effectRef idx="0"/>
+          <a:fontRef idx="minor"/>
+        </p:style>
+        <p:txBody>
+          <a:bodyPr lIns="0" rIns="0" tIns="0" bIns="0" anchor="ctr">
+            <a:spAutoFit/>
+          </a:bodyPr>
+          <a:p>
+            <a:pPr>
+              <a:lnSpc>
+                <a:spcPct val="100000"/>
+              </a:lnSpc>
+              <a:tabLst>
+                <a:tab algn="l" pos="0"/>
+              </a:tabLst>
+            </a:pPr>
+            <a:r>
+              <a:rPr b="0" lang="en-US" sz="1600" spc="-1" strike="noStrike">
+                <a:solidFill>
+                  <a:srgbClr val="ffffff"/>
+                </a:solidFill>
+                <a:latin typeface="Calibri"/>
+                <a:ea typeface="Calibri"/>
+              </a:rPr>
+              <a:t>4.9%</a:t>
+            </a:r>
+            <a:endParaRPr b="0" lang="en-US" sz="1600" spc="-1" strike="noStrike">
+              <a:solidFill>
+                <a:srgbClr val="000000"/>
+              </a:solidFill>
+              <a:latin typeface="Arial"/>
+            </a:endParaRPr>
+          </a:p>
+        </p:txBody>
+      </p:sp>
+      <p:sp>
+        <p:nvSpPr>
+          <p:cNvPr id="91" name="Text 22"/>
+          <p:cNvSpPr/>
+          <p:nvPr/>
+        </p:nvSpPr>
+        <p:spPr>
+          <a:xfrm>
+            <a:off x="3840480" y="3536280"/>
+            <a:ext cx="1370160" cy="242640"/>
+          </a:xfrm>
+          <a:prstGeom prst="rect">
+            <a:avLst/>
+          </a:prstGeom>
+          <a:noFill/>
+          <a:ln w="12700">
+            <a:noFill/>
+          </a:ln>
+        </p:spPr>
+        <p:style>
+          <a:lnRef idx="0"/>
+          <a:fillRef idx="0"/>
+          <a:effectRef idx="0"/>
+          <a:fontRef idx="minor"/>
+        </p:style>
+        <p:txBody>
+          <a:bodyPr lIns="0" rIns="0" tIns="0" bIns="0" anchor="ctr">
+            <a:spAutoFit/>
+          </a:bodyPr>
+          <a:p>
+            <a:pPr>
+              <a:lnSpc>
+                <a:spcPct val="100000"/>
+              </a:lnSpc>
+              <a:tabLst>
+                <a:tab algn="l" pos="0"/>
+              </a:tabLst>
+            </a:pPr>
+            <a:r>
+              <a:rPr b="0" lang="en-US" sz="1600" spc="-1" strike="noStrike">
+                <a:solidFill>
+                  <a:srgbClr val="ffffff"/>
+                </a:solidFill>
+                <a:latin typeface="Calibri"/>
+                <a:ea typeface="Calibri"/>
+              </a:rPr>
+              <a:t>14.7%</a:t>
+            </a:r>
+            <a:endParaRPr b="0" lang="en-US" sz="1600" spc="-1" strike="noStrike">
+              <a:solidFill>
+                <a:srgbClr val="000000"/>
+              </a:solidFill>
+              <a:latin typeface="Arial"/>
+            </a:endParaRPr>
+          </a:p>
+        </p:txBody>
+      </p:sp>
+      <p:sp>
+        <p:nvSpPr>
+          <p:cNvPr id="92" name="Text 23"/>
+          <p:cNvSpPr/>
+          <p:nvPr/>
+        </p:nvSpPr>
+        <p:spPr>
+          <a:xfrm>
+            <a:off x="5486400" y="3536280"/>
+            <a:ext cx="2284560" cy="242640"/>
+          </a:xfrm>
+          <a:prstGeom prst="rect">
+            <a:avLst/>
+          </a:prstGeom>
+          <a:noFill/>
+          <a:ln w="12700">
+            <a:noFill/>
+          </a:ln>
+        </p:spPr>
+        <p:style>
+          <a:lnRef idx="0"/>
+          <a:fillRef idx="0"/>
+          <a:effectRef idx="0"/>
+          <a:fontRef idx="minor"/>
+        </p:style>
+        <p:txBody>
+          <a:bodyPr lIns="0" rIns="0" tIns="0" bIns="0" anchor="ctr">
+            <a:spAutoFit/>
+          </a:bodyPr>
+          <a:p>
+            <a:pPr>
+              <a:lnSpc>
+                <a:spcPct val="100000"/>
+              </a:lnSpc>
+              <a:tabLst>
+                <a:tab algn="l" pos="0"/>
+              </a:tabLst>
+            </a:pPr>
+            <a:r>
+              <a:rPr b="0" lang="en-US" sz="1600" spc="-1" strike="noStrike">
+                <a:solidFill>
+                  <a:srgbClr val="ffffff"/>
+                </a:solidFill>
+                <a:latin typeface="Calibri"/>
+                <a:ea typeface="Calibri"/>
+              </a:rPr>
+              <a:t>22.5</a:t>
+            </a:r>
+            <a:endParaRPr b="0" lang="en-US" sz="1600" spc="-1" strike="noStrike">
+              <a:solidFill>
+                <a:srgbClr val="000000"/>
+              </a:solidFill>
+              <a:latin typeface="Arial"/>
+            </a:endParaRPr>
+          </a:p>
+        </p:txBody>
+      </p:sp>
+      <p:sp>
+        <p:nvSpPr>
+          <p:cNvPr id="93" name="Shape 24"/>
           <p:cNvSpPr/>
           <p:nvPr/>
         </p:nvSpPr>
         <p:spPr>
           <a:xfrm>
             <a:off x="0" y="4800600"/>
-            <a:ext cx="9143640" cy="342720"/>
+            <a:ext cx="9142560" cy="341640"/>
           </a:xfrm>
           <a:prstGeom prst="rect">
             <a:avLst/>
@@ -4859,14 +5517,14 @@
       </p:sp>
       <p:sp>
         <p:nvSpPr>
-          <p:cNvPr id="83" name="Text 14"/>
+          <p:cNvPr id="94" name="Text 25"/>
           <p:cNvSpPr/>
           <p:nvPr/>
         </p:nvSpPr>
         <p:spPr>
           <a:xfrm>
             <a:off x="365760" y="4884840"/>
-            <a:ext cx="6857640" cy="151560"/>
+            <a:ext cx="6856560" cy="151560"/>
           </a:xfrm>
           <a:prstGeom prst="rect">
             <a:avLst/>
@@ -4916,14 +5574,14 @@
       </p:sp>
       <p:sp>
         <p:nvSpPr>
-          <p:cNvPr id="84" name="Text 15"/>
+          <p:cNvPr id="95" name="Text 26"/>
           <p:cNvSpPr/>
           <p:nvPr/>
         </p:nvSpPr>
         <p:spPr>
           <a:xfrm>
             <a:off x="8412480" y="4884840"/>
-            <a:ext cx="456840" cy="151560"/>
+            <a:ext cx="455760" cy="151560"/>
           </a:xfrm>
           <a:prstGeom prst="rect">
             <a:avLst/>
@@ -4960,7 +5618,7 @@
                 <a:latin typeface="Calibri"/>
                 <a:ea typeface="Calibri"/>
               </a:rPr>
-              <a:t>4</a:t>
+              <a:t>2</a:t>
             </a:r>
             <a:endParaRPr b="0" lang="en-US" sz="1000" spc="-1" strike="noStrike">
               <a:solidFill>
@@ -5003,7 +5661,7 @@
       </p:grpSpPr>
       <p:pic>
         <p:nvPicPr>
-          <p:cNvPr id="85" name="Image 0" descr="Image 0"/>
+          <p:cNvPr id="96" name="Image 0" descr="Image 0"/>
           <p:cNvPicPr/>
           <p:nvPr/>
         </p:nvPicPr>
@@ -5014,7 +5672,7 @@
         <p:spPr>
           <a:xfrm>
             <a:off x="0" y="0"/>
-            <a:ext cx="9143640" cy="5143320"/>
+            <a:ext cx="9142560" cy="5142240"/>
           </a:xfrm>
           <a:prstGeom prst="rect">
             <a:avLst/>
@@ -5026,14 +5684,14 @@
       </p:pic>
       <p:sp>
         <p:nvSpPr>
-          <p:cNvPr id="86" name="Shape 0"/>
+          <p:cNvPr id="97" name="Shape 0"/>
           <p:cNvSpPr/>
           <p:nvPr/>
         </p:nvSpPr>
         <p:spPr>
           <a:xfrm>
             <a:off x="320040" y="1051560"/>
-            <a:ext cx="8503560" cy="3611520"/>
+            <a:ext cx="8502480" cy="3610440"/>
           </a:xfrm>
           <a:prstGeom prst="roundRect">
             <a:avLst>
@@ -5080,51 +5738,51 @@
       </p:sp>
       <p:sp>
         <p:nvSpPr>
-          <p:cNvPr id="87" name="Text 1"/>
+          <p:cNvPr id="98" name="Text 1"/>
           <p:cNvSpPr/>
           <p:nvPr/>
         </p:nvSpPr>
         <p:spPr>
           <a:xfrm>
             <a:off x="411480" y="212040"/>
-            <a:ext cx="8229240" cy="197280"/>
-          </a:xfrm>
-          <a:prstGeom prst="rect">
-            <a:avLst/>
-          </a:prstGeom>
-          <a:noFill/>
-          <a:ln w="12700">
-            <a:noFill/>
-          </a:ln>
-        </p:spPr>
-        <p:style>
-          <a:lnRef idx="0"/>
-          <a:fillRef idx="0"/>
-          <a:effectRef idx="0"/>
-          <a:fontRef idx="minor"/>
-        </p:style>
-        <p:txBody>
-          <a:bodyPr lIns="0" rIns="0" tIns="0" bIns="0" anchor="ctr">
-            <a:spAutoFit/>
-          </a:bodyPr>
-          <a:p>
-            <a:pPr>
-              <a:lnSpc>
-                <a:spcPct val="100000"/>
-              </a:lnSpc>
-              <a:tabLst>
-                <a:tab algn="l" pos="0"/>
-              </a:tabLst>
-            </a:pPr>
-            <a:r>
-              <a:rPr b="1" lang="en-US" sz="1300" spc="398" strike="noStrike">
+            <a:ext cx="8228160" cy="197280"/>
+          </a:xfrm>
+          <a:prstGeom prst="rect">
+            <a:avLst/>
+          </a:prstGeom>
+          <a:noFill/>
+          <a:ln w="12700">
+            <a:noFill/>
+          </a:ln>
+        </p:spPr>
+        <p:style>
+          <a:lnRef idx="0"/>
+          <a:fillRef idx="0"/>
+          <a:effectRef idx="0"/>
+          <a:fontRef idx="minor"/>
+        </p:style>
+        <p:txBody>
+          <a:bodyPr lIns="0" rIns="0" tIns="0" bIns="0" anchor="ctr">
+            <a:spAutoFit/>
+          </a:bodyPr>
+          <a:p>
+            <a:pPr>
+              <a:lnSpc>
+                <a:spcPct val="100000"/>
+              </a:lnSpc>
+              <a:tabLst>
+                <a:tab algn="l" pos="0"/>
+              </a:tabLst>
+            </a:pPr>
+            <a:r>
+              <a:rPr b="1" lang="en-US" sz="1300" spc="389" strike="noStrike">
                 <a:solidFill>
                   <a:srgbClr val="2ee5ba"/>
                 </a:solidFill>
                 <a:latin typeface="Calibri"/>
                 <a:ea typeface="Calibri"/>
               </a:rPr>
-              <a:t>RESULTS</a:t>
+              <a:t>FEATURE ABLATION</a:t>
             </a:r>
             <a:endParaRPr b="0" lang="en-US" sz="1300" spc="-1" strike="noStrike">
               <a:solidFill>
@@ -5137,14 +5795,14 @@
       </p:sp>
       <p:sp>
         <p:nvSpPr>
-          <p:cNvPr id="88" name="Text 2"/>
+          <p:cNvPr id="99" name="Text 2"/>
           <p:cNvSpPr/>
           <p:nvPr/>
         </p:nvSpPr>
         <p:spPr>
           <a:xfrm>
             <a:off x="411480" y="545760"/>
-            <a:ext cx="8320680" cy="425880"/>
+            <a:ext cx="8319600" cy="425880"/>
           </a:xfrm>
           <a:prstGeom prst="rect">
             <a:avLst/>
@@ -5181,7 +5839,7 @@
                 <a:latin typeface="Calibri"/>
                 <a:ea typeface="Calibri"/>
               </a:rPr>
-              <a:t>Test retrieval (102 candidates)</a:t>
+              <a:t>Subject 1</a:t>
             </a:r>
             <a:endParaRPr b="0" lang="en-US" sz="2800" spc="-1" strike="noStrike">
               <a:solidFill>
@@ -5194,51 +5852,51 @@
       </p:sp>
       <p:sp>
         <p:nvSpPr>
-          <p:cNvPr id="89" name="Text 3"/>
-          <p:cNvSpPr/>
-          <p:nvPr/>
-        </p:nvSpPr>
-        <p:spPr>
-          <a:xfrm>
-            <a:off x="502920" y="1272600"/>
-            <a:ext cx="7772040" cy="197280"/>
-          </a:xfrm>
-          <a:prstGeom prst="rect">
-            <a:avLst/>
-          </a:prstGeom>
-          <a:noFill/>
-          <a:ln w="12700">
-            <a:noFill/>
-          </a:ln>
-        </p:spPr>
-        <p:style>
-          <a:lnRef idx="0"/>
-          <a:fillRef idx="0"/>
-          <a:effectRef idx="0"/>
-          <a:fontRef idx="minor"/>
-        </p:style>
-        <p:txBody>
-          <a:bodyPr lIns="0" rIns="0" tIns="0" bIns="0" anchor="ctr">
-            <a:spAutoFit/>
-          </a:bodyPr>
-          <a:p>
-            <a:pPr>
-              <a:lnSpc>
-                <a:spcPct val="100000"/>
-              </a:lnSpc>
-              <a:tabLst>
-                <a:tab algn="l" pos="0"/>
-              </a:tabLst>
-            </a:pPr>
-            <a:r>
-              <a:rPr b="0" lang="en-US" sz="1300" spc="-1" strike="noStrike">
-                <a:solidFill>
-                  <a:srgbClr val="94a3b8"/>
-                </a:solidFill>
-                <a:latin typeface="Calibri"/>
-                <a:ea typeface="Calibri"/>
-              </a:rPr>
-              <a:t>Chance: Top-1 = 0.98%  ·  Top-5 = 4.9%</a:t>
+          <p:cNvPr id="100" name="Text 3"/>
+          <p:cNvSpPr/>
+          <p:nvPr/>
+        </p:nvSpPr>
+        <p:spPr>
+          <a:xfrm>
+            <a:off x="502920" y="1318320"/>
+            <a:ext cx="2924640" cy="197280"/>
+          </a:xfrm>
+          <a:prstGeom prst="rect">
+            <a:avLst/>
+          </a:prstGeom>
+          <a:noFill/>
+          <a:ln w="12700">
+            <a:noFill/>
+          </a:ln>
+        </p:spPr>
+        <p:style>
+          <a:lnRef idx="0"/>
+          <a:fillRef idx="0"/>
+          <a:effectRef idx="0"/>
+          <a:fontRef idx="minor"/>
+        </p:style>
+        <p:txBody>
+          <a:bodyPr lIns="0" rIns="0" tIns="0" bIns="0" anchor="ctr">
+            <a:spAutoFit/>
+          </a:bodyPr>
+          <a:p>
+            <a:pPr>
+              <a:lnSpc>
+                <a:spcPct val="100000"/>
+              </a:lnSpc>
+              <a:tabLst>
+                <a:tab algn="l" pos="0"/>
+              </a:tabLst>
+            </a:pPr>
+            <a:r>
+              <a:rPr b="1" lang="en-US" sz="1300" spc="-1" strike="noStrike">
+                <a:solidFill>
+                  <a:srgbClr val="2ee5ba"/>
+                </a:solidFill>
+                <a:latin typeface="Calibri"/>
+                <a:ea typeface="Calibri"/>
+              </a:rPr>
+              <a:t>Features</a:t>
             </a:r>
             <a:endParaRPr b="0" lang="en-US" sz="1300" spc="-1" strike="noStrike">
               <a:solidFill>
@@ -5251,14 +5909,14 @@
       </p:sp>
       <p:sp>
         <p:nvSpPr>
-          <p:cNvPr id="90" name="Text 4"/>
-          <p:cNvSpPr/>
-          <p:nvPr/>
-        </p:nvSpPr>
-        <p:spPr>
-          <a:xfrm>
-            <a:off x="548640" y="1638360"/>
-            <a:ext cx="1371240" cy="197280"/>
+          <p:cNvPr id="101" name="Text 4"/>
+          <p:cNvSpPr/>
+          <p:nvPr/>
+        </p:nvSpPr>
+        <p:spPr>
+          <a:xfrm>
+            <a:off x="3566160" y="1318320"/>
+            <a:ext cx="1461600" cy="197280"/>
           </a:xfrm>
           <a:prstGeom prst="rect">
             <a:avLst/>
@@ -5295,7 +5953,7 @@
                 <a:latin typeface="Calibri"/>
                 <a:ea typeface="Calibri"/>
               </a:rPr>
-              <a:t>Subject</a:t>
+              <a:t>Test Top-1</a:t>
             </a:r>
             <a:endParaRPr b="0" lang="en-US" sz="1300" spc="-1" strike="noStrike">
               <a:solidFill>
@@ -5308,14 +5966,14 @@
       </p:sp>
       <p:sp>
         <p:nvSpPr>
-          <p:cNvPr id="91" name="Text 5"/>
-          <p:cNvSpPr/>
-          <p:nvPr/>
-        </p:nvSpPr>
-        <p:spPr>
-          <a:xfrm>
-            <a:off x="2194560" y="1638360"/>
-            <a:ext cx="1371240" cy="197280"/>
+          <p:cNvPr id="102" name="Text 5"/>
+          <p:cNvSpPr/>
+          <p:nvPr/>
+        </p:nvSpPr>
+        <p:spPr>
+          <a:xfrm>
+            <a:off x="5120640" y="1318320"/>
+            <a:ext cx="1461600" cy="197280"/>
           </a:xfrm>
           <a:prstGeom prst="rect">
             <a:avLst/>
@@ -5352,7 +6010,7 @@
                 <a:latin typeface="Calibri"/>
                 <a:ea typeface="Calibri"/>
               </a:rPr>
-              <a:t>Top-1</a:t>
+              <a:t>Test Top-5</a:t>
             </a:r>
             <a:endParaRPr b="0" lang="en-US" sz="1300" spc="-1" strike="noStrike">
               <a:solidFill>
@@ -5365,14 +6023,14 @@
       </p:sp>
       <p:sp>
         <p:nvSpPr>
-          <p:cNvPr id="92" name="Text 6"/>
-          <p:cNvSpPr/>
-          <p:nvPr/>
-        </p:nvSpPr>
-        <p:spPr>
-          <a:xfrm>
-            <a:off x="3840480" y="1638360"/>
-            <a:ext cx="1371240" cy="197280"/>
+          <p:cNvPr id="103" name="Text 6"/>
+          <p:cNvSpPr/>
+          <p:nvPr/>
+        </p:nvSpPr>
+        <p:spPr>
+          <a:xfrm>
+            <a:off x="6675120" y="1318320"/>
+            <a:ext cx="1644480" cy="197280"/>
           </a:xfrm>
           <a:prstGeom prst="rect">
             <a:avLst/>
@@ -5409,7 +6067,7 @@
                 <a:latin typeface="Calibri"/>
                 <a:ea typeface="Calibri"/>
               </a:rPr>
-              <a:t>Top-5</a:t>
+              <a:t>Median Rank</a:t>
             </a:r>
             <a:endParaRPr b="0" lang="en-US" sz="1300" spc="-1" strike="noStrike">
               <a:solidFill>
@@ -5422,983 +6080,1154 @@
       </p:sp>
       <p:sp>
         <p:nvSpPr>
-          <p:cNvPr id="93" name="Text 7"/>
-          <p:cNvSpPr/>
-          <p:nvPr/>
-        </p:nvSpPr>
-        <p:spPr>
-          <a:xfrm>
-            <a:off x="5486400" y="1638360"/>
-            <a:ext cx="2285640" cy="197280"/>
-          </a:xfrm>
-          <a:prstGeom prst="rect">
-            <a:avLst/>
-          </a:prstGeom>
-          <a:noFill/>
-          <a:ln w="12700">
-            <a:noFill/>
-          </a:ln>
-        </p:spPr>
-        <p:style>
-          <a:lnRef idx="0"/>
-          <a:fillRef idx="0"/>
-          <a:effectRef idx="0"/>
-          <a:fontRef idx="minor"/>
-        </p:style>
-        <p:txBody>
-          <a:bodyPr lIns="0" rIns="0" tIns="0" bIns="0" anchor="ctr">
-            <a:spAutoFit/>
-          </a:bodyPr>
-          <a:p>
-            <a:pPr>
-              <a:lnSpc>
-                <a:spcPct val="100000"/>
-              </a:lnSpc>
-              <a:tabLst>
-                <a:tab algn="l" pos="0"/>
-              </a:tabLst>
-            </a:pPr>
-            <a:r>
-              <a:rPr b="1" lang="en-US" sz="1300" spc="-1" strike="noStrike">
-                <a:solidFill>
-                  <a:srgbClr val="2ee5ba"/>
-                </a:solidFill>
-                <a:latin typeface="Calibri"/>
-                <a:ea typeface="Calibri"/>
-              </a:rPr>
-              <a:t>Median Rank</a:t>
-            </a:r>
-            <a:endParaRPr b="0" lang="en-US" sz="1300" spc="-1" strike="noStrike">
-              <a:solidFill>
-                <a:srgbClr val="000000"/>
-              </a:solidFill>
-              <a:latin typeface="Arial"/>
-            </a:endParaRPr>
-          </a:p>
-        </p:txBody>
-      </p:sp>
-      <p:sp>
-        <p:nvSpPr>
-          <p:cNvPr id="94" name="Text 8"/>
-          <p:cNvSpPr/>
-          <p:nvPr/>
-        </p:nvSpPr>
-        <p:spPr>
-          <a:xfrm>
-            <a:off x="548640" y="2027520"/>
-            <a:ext cx="1371240" cy="242640"/>
-          </a:xfrm>
-          <a:prstGeom prst="rect">
-            <a:avLst/>
-          </a:prstGeom>
-          <a:noFill/>
-          <a:ln w="12700">
-            <a:noFill/>
-          </a:ln>
-        </p:spPr>
-        <p:style>
-          <a:lnRef idx="0"/>
-          <a:fillRef idx="0"/>
-          <a:effectRef idx="0"/>
-          <a:fontRef idx="minor"/>
-        </p:style>
-        <p:txBody>
-          <a:bodyPr lIns="0" rIns="0" tIns="0" bIns="0" anchor="ctr">
-            <a:spAutoFit/>
-          </a:bodyPr>
-          <a:p>
-            <a:pPr>
-              <a:lnSpc>
-                <a:spcPct val="100000"/>
-              </a:lnSpc>
-              <a:tabLst>
-                <a:tab algn="l" pos="0"/>
-              </a:tabLst>
-            </a:pPr>
-            <a:r>
-              <a:rPr b="0" lang="en-US" sz="1600" spc="-1" strike="noStrike">
+          <p:cNvPr id="104" name="Text 7"/>
+          <p:cNvSpPr/>
+          <p:nvPr/>
+        </p:nvSpPr>
+        <p:spPr>
+          <a:xfrm>
+            <a:off x="502920" y="1722600"/>
+            <a:ext cx="2924640" cy="212400"/>
+          </a:xfrm>
+          <a:prstGeom prst="rect">
+            <a:avLst/>
+          </a:prstGeom>
+          <a:noFill/>
+          <a:ln w="12700">
+            <a:noFill/>
+          </a:ln>
+        </p:spPr>
+        <p:style>
+          <a:lnRef idx="0"/>
+          <a:fillRef idx="0"/>
+          <a:effectRef idx="0"/>
+          <a:fontRef idx="minor"/>
+        </p:style>
+        <p:txBody>
+          <a:bodyPr lIns="0" rIns="0" tIns="0" bIns="0" anchor="ctr">
+            <a:spAutoFit/>
+          </a:bodyPr>
+          <a:p>
+            <a:pPr>
+              <a:lnSpc>
+                <a:spcPct val="100000"/>
+              </a:lnSpc>
+              <a:tabLst>
+                <a:tab algn="l" pos="0"/>
+              </a:tabLst>
+            </a:pPr>
+            <a:r>
+              <a:rPr b="0" lang="en-US" sz="1400" spc="-1" strike="noStrike">
                 <a:solidFill>
                   <a:srgbClr val="ffffff"/>
                 </a:solidFill>
                 <a:latin typeface="Calibri"/>
                 <a:ea typeface="Calibri"/>
               </a:rPr>
-              <a:t>01</a:t>
-            </a:r>
-            <a:endParaRPr b="0" lang="en-US" sz="1600" spc="-1" strike="noStrike">
-              <a:solidFill>
-                <a:srgbClr val="000000"/>
-              </a:solidFill>
-              <a:latin typeface="Arial"/>
-            </a:endParaRPr>
-          </a:p>
-        </p:txBody>
-      </p:sp>
-      <p:sp>
-        <p:nvSpPr>
-          <p:cNvPr id="95" name="Text 9"/>
-          <p:cNvSpPr/>
-          <p:nvPr/>
-        </p:nvSpPr>
-        <p:spPr>
-          <a:xfrm>
-            <a:off x="2194560" y="2027520"/>
-            <a:ext cx="1371240" cy="242640"/>
-          </a:xfrm>
-          <a:prstGeom prst="rect">
-            <a:avLst/>
-          </a:prstGeom>
-          <a:noFill/>
-          <a:ln w="12700">
-            <a:noFill/>
-          </a:ln>
-        </p:spPr>
-        <p:style>
-          <a:lnRef idx="0"/>
-          <a:fillRef idx="0"/>
-          <a:effectRef idx="0"/>
-          <a:fontRef idx="minor"/>
-        </p:style>
-        <p:txBody>
-          <a:bodyPr lIns="0" rIns="0" tIns="0" bIns="0" anchor="ctr">
-            <a:spAutoFit/>
-          </a:bodyPr>
-          <a:p>
-            <a:pPr>
-              <a:lnSpc>
-                <a:spcPct val="100000"/>
-              </a:lnSpc>
-              <a:tabLst>
-                <a:tab algn="l" pos="0"/>
-              </a:tabLst>
-            </a:pPr>
-            <a:r>
-              <a:rPr b="0" lang="en-US" sz="1600" spc="-1" strike="noStrike">
+              <a:t>AlexNet features.3</a:t>
+            </a:r>
+            <a:endParaRPr b="0" lang="en-US" sz="1400" spc="-1" strike="noStrike">
+              <a:solidFill>
+                <a:srgbClr val="000000"/>
+              </a:solidFill>
+              <a:latin typeface="Arial"/>
+            </a:endParaRPr>
+          </a:p>
+        </p:txBody>
+      </p:sp>
+      <p:sp>
+        <p:nvSpPr>
+          <p:cNvPr id="105" name="Text 8"/>
+          <p:cNvSpPr/>
+          <p:nvPr/>
+        </p:nvSpPr>
+        <p:spPr>
+          <a:xfrm>
+            <a:off x="3566160" y="1722600"/>
+            <a:ext cx="1461600" cy="212400"/>
+          </a:xfrm>
+          <a:prstGeom prst="rect">
+            <a:avLst/>
+          </a:prstGeom>
+          <a:noFill/>
+          <a:ln w="12700">
+            <a:noFill/>
+          </a:ln>
+        </p:spPr>
+        <p:style>
+          <a:lnRef idx="0"/>
+          <a:fillRef idx="0"/>
+          <a:effectRef idx="0"/>
+          <a:fontRef idx="minor"/>
+        </p:style>
+        <p:txBody>
+          <a:bodyPr lIns="0" rIns="0" tIns="0" bIns="0" anchor="ctr">
+            <a:spAutoFit/>
+          </a:bodyPr>
+          <a:p>
+            <a:pPr>
+              <a:lnSpc>
+                <a:spcPct val="100000"/>
+              </a:lnSpc>
+              <a:tabLst>
+                <a:tab algn="l" pos="0"/>
+              </a:tabLst>
+            </a:pPr>
+            <a:r>
+              <a:rPr b="0" lang="en-US" sz="1400" spc="-1" strike="noStrike">
                 <a:solidFill>
                   <a:srgbClr val="ffffff"/>
                 </a:solidFill>
                 <a:latin typeface="Calibri"/>
                 <a:ea typeface="Calibri"/>
               </a:rPr>
+              <a:t>3.9%</a:t>
+            </a:r>
+            <a:endParaRPr b="0" lang="en-US" sz="1400" spc="-1" strike="noStrike">
+              <a:solidFill>
+                <a:srgbClr val="000000"/>
+              </a:solidFill>
+              <a:latin typeface="Arial"/>
+            </a:endParaRPr>
+          </a:p>
+        </p:txBody>
+      </p:sp>
+      <p:sp>
+        <p:nvSpPr>
+          <p:cNvPr id="106" name="Text 9"/>
+          <p:cNvSpPr/>
+          <p:nvPr/>
+        </p:nvSpPr>
+        <p:spPr>
+          <a:xfrm>
+            <a:off x="5120640" y="1722600"/>
+            <a:ext cx="1461600" cy="212400"/>
+          </a:xfrm>
+          <a:prstGeom prst="rect">
+            <a:avLst/>
+          </a:prstGeom>
+          <a:noFill/>
+          <a:ln w="12700">
+            <a:noFill/>
+          </a:ln>
+        </p:spPr>
+        <p:style>
+          <a:lnRef idx="0"/>
+          <a:fillRef idx="0"/>
+          <a:effectRef idx="0"/>
+          <a:fontRef idx="minor"/>
+        </p:style>
+        <p:txBody>
+          <a:bodyPr lIns="0" rIns="0" tIns="0" bIns="0" anchor="ctr">
+            <a:spAutoFit/>
+          </a:bodyPr>
+          <a:p>
+            <a:pPr>
+              <a:lnSpc>
+                <a:spcPct val="100000"/>
+              </a:lnSpc>
+              <a:tabLst>
+                <a:tab algn="l" pos="0"/>
+              </a:tabLst>
+            </a:pPr>
+            <a:r>
+              <a:rPr b="0" lang="en-US" sz="1400" spc="-1" strike="noStrike">
+                <a:solidFill>
+                  <a:srgbClr val="ffffff"/>
+                </a:solidFill>
+                <a:latin typeface="Calibri"/>
+                <a:ea typeface="Calibri"/>
+              </a:rPr>
+              <a:t>11.8%</a:t>
+            </a:r>
+            <a:endParaRPr b="0" lang="en-US" sz="1400" spc="-1" strike="noStrike">
+              <a:solidFill>
+                <a:srgbClr val="000000"/>
+              </a:solidFill>
+              <a:latin typeface="Arial"/>
+            </a:endParaRPr>
+          </a:p>
+        </p:txBody>
+      </p:sp>
+      <p:sp>
+        <p:nvSpPr>
+          <p:cNvPr id="107" name="Text 10"/>
+          <p:cNvSpPr/>
+          <p:nvPr/>
+        </p:nvSpPr>
+        <p:spPr>
+          <a:xfrm>
+            <a:off x="6675120" y="1722600"/>
+            <a:ext cx="1644480" cy="212400"/>
+          </a:xfrm>
+          <a:prstGeom prst="rect">
+            <a:avLst/>
+          </a:prstGeom>
+          <a:noFill/>
+          <a:ln w="12700">
+            <a:noFill/>
+          </a:ln>
+        </p:spPr>
+        <p:style>
+          <a:lnRef idx="0"/>
+          <a:fillRef idx="0"/>
+          <a:effectRef idx="0"/>
+          <a:fontRef idx="minor"/>
+        </p:style>
+        <p:txBody>
+          <a:bodyPr lIns="0" rIns="0" tIns="0" bIns="0" anchor="ctr">
+            <a:spAutoFit/>
+          </a:bodyPr>
+          <a:p>
+            <a:pPr>
+              <a:lnSpc>
+                <a:spcPct val="100000"/>
+              </a:lnSpc>
+              <a:tabLst>
+                <a:tab algn="l" pos="0"/>
+              </a:tabLst>
+            </a:pPr>
+            <a:r>
+              <a:rPr b="0" lang="en-US" sz="1400" spc="-1" strike="noStrike">
+                <a:solidFill>
+                  <a:srgbClr val="ffffff"/>
+                </a:solidFill>
+                <a:latin typeface="Calibri"/>
+                <a:ea typeface="Calibri"/>
+              </a:rPr>
+              <a:t>25.5</a:t>
+            </a:r>
+            <a:endParaRPr b="0" lang="en-US" sz="1400" spc="-1" strike="noStrike">
+              <a:solidFill>
+                <a:srgbClr val="000000"/>
+              </a:solidFill>
+              <a:latin typeface="Arial"/>
+            </a:endParaRPr>
+          </a:p>
+        </p:txBody>
+      </p:sp>
+      <p:sp>
+        <p:nvSpPr>
+          <p:cNvPr id="108" name="Text 11"/>
+          <p:cNvSpPr/>
+          <p:nvPr/>
+        </p:nvSpPr>
+        <p:spPr>
+          <a:xfrm>
+            <a:off x="502920" y="2252880"/>
+            <a:ext cx="2924640" cy="212400"/>
+          </a:xfrm>
+          <a:prstGeom prst="rect">
+            <a:avLst/>
+          </a:prstGeom>
+          <a:noFill/>
+          <a:ln w="12700">
+            <a:noFill/>
+          </a:ln>
+        </p:spPr>
+        <p:style>
+          <a:lnRef idx="0"/>
+          <a:fillRef idx="0"/>
+          <a:effectRef idx="0"/>
+          <a:fontRef idx="minor"/>
+        </p:style>
+        <p:txBody>
+          <a:bodyPr lIns="0" rIns="0" tIns="0" bIns="0" anchor="ctr">
+            <a:spAutoFit/>
+          </a:bodyPr>
+          <a:p>
+            <a:pPr>
+              <a:lnSpc>
+                <a:spcPct val="100000"/>
+              </a:lnSpc>
+              <a:tabLst>
+                <a:tab algn="l" pos="0"/>
+              </a:tabLst>
+            </a:pPr>
+            <a:r>
+              <a:rPr b="0" lang="en-US" sz="1400" spc="-1" strike="noStrike">
+                <a:solidFill>
+                  <a:srgbClr val="ffffff"/>
+                </a:solidFill>
+                <a:latin typeface="Calibri"/>
+                <a:ea typeface="Calibri"/>
+              </a:rPr>
+              <a:t>DINO blocks.6</a:t>
+            </a:r>
+            <a:endParaRPr b="0" lang="en-US" sz="1400" spc="-1" strike="noStrike">
+              <a:solidFill>
+                <a:srgbClr val="000000"/>
+              </a:solidFill>
+              <a:latin typeface="Arial"/>
+            </a:endParaRPr>
+          </a:p>
+        </p:txBody>
+      </p:sp>
+      <p:sp>
+        <p:nvSpPr>
+          <p:cNvPr id="109" name="Text 12"/>
+          <p:cNvSpPr/>
+          <p:nvPr/>
+        </p:nvSpPr>
+        <p:spPr>
+          <a:xfrm>
+            <a:off x="3566160" y="2252880"/>
+            <a:ext cx="1461600" cy="212400"/>
+          </a:xfrm>
+          <a:prstGeom prst="rect">
+            <a:avLst/>
+          </a:prstGeom>
+          <a:noFill/>
+          <a:ln w="12700">
+            <a:noFill/>
+          </a:ln>
+        </p:spPr>
+        <p:style>
+          <a:lnRef idx="0"/>
+          <a:fillRef idx="0"/>
+          <a:effectRef idx="0"/>
+          <a:fontRef idx="minor"/>
+        </p:style>
+        <p:txBody>
+          <a:bodyPr lIns="0" rIns="0" tIns="0" bIns="0" anchor="ctr">
+            <a:spAutoFit/>
+          </a:bodyPr>
+          <a:p>
+            <a:pPr>
+              <a:lnSpc>
+                <a:spcPct val="100000"/>
+              </a:lnSpc>
+              <a:tabLst>
+                <a:tab algn="l" pos="0"/>
+              </a:tabLst>
+            </a:pPr>
+            <a:r>
+              <a:rPr b="0" lang="en-US" sz="1400" spc="-1" strike="noStrike">
+                <a:solidFill>
+                  <a:srgbClr val="ffffff"/>
+                </a:solidFill>
+                <a:latin typeface="Calibri"/>
+                <a:ea typeface="Calibri"/>
+              </a:rPr>
+              <a:t>4.9%</a:t>
+            </a:r>
+            <a:endParaRPr b="0" lang="en-US" sz="1400" spc="-1" strike="noStrike">
+              <a:solidFill>
+                <a:srgbClr val="000000"/>
+              </a:solidFill>
+              <a:latin typeface="Arial"/>
+            </a:endParaRPr>
+          </a:p>
+        </p:txBody>
+      </p:sp>
+      <p:sp>
+        <p:nvSpPr>
+          <p:cNvPr id="110" name="Text 13"/>
+          <p:cNvSpPr/>
+          <p:nvPr/>
+        </p:nvSpPr>
+        <p:spPr>
+          <a:xfrm>
+            <a:off x="5120640" y="2252880"/>
+            <a:ext cx="1461600" cy="212400"/>
+          </a:xfrm>
+          <a:prstGeom prst="rect">
+            <a:avLst/>
+          </a:prstGeom>
+          <a:noFill/>
+          <a:ln w="12700">
+            <a:noFill/>
+          </a:ln>
+        </p:spPr>
+        <p:style>
+          <a:lnRef idx="0"/>
+          <a:fillRef idx="0"/>
+          <a:effectRef idx="0"/>
+          <a:fontRef idx="minor"/>
+        </p:style>
+        <p:txBody>
+          <a:bodyPr lIns="0" rIns="0" tIns="0" bIns="0" anchor="ctr">
+            <a:spAutoFit/>
+          </a:bodyPr>
+          <a:p>
+            <a:pPr>
+              <a:lnSpc>
+                <a:spcPct val="100000"/>
+              </a:lnSpc>
+              <a:tabLst>
+                <a:tab algn="l" pos="0"/>
+              </a:tabLst>
+            </a:pPr>
+            <a:r>
+              <a:rPr b="0" lang="en-US" sz="1400" spc="-1" strike="noStrike">
+                <a:solidFill>
+                  <a:srgbClr val="ffffff"/>
+                </a:solidFill>
+                <a:latin typeface="Calibri"/>
+                <a:ea typeface="Calibri"/>
+              </a:rPr>
+              <a:t>30.4%</a:t>
+            </a:r>
+            <a:endParaRPr b="0" lang="en-US" sz="1400" spc="-1" strike="noStrike">
+              <a:solidFill>
+                <a:srgbClr val="000000"/>
+              </a:solidFill>
+              <a:latin typeface="Arial"/>
+            </a:endParaRPr>
+          </a:p>
+        </p:txBody>
+      </p:sp>
+      <p:sp>
+        <p:nvSpPr>
+          <p:cNvPr id="111" name="Text 14"/>
+          <p:cNvSpPr/>
+          <p:nvPr/>
+        </p:nvSpPr>
+        <p:spPr>
+          <a:xfrm>
+            <a:off x="6675120" y="2252880"/>
+            <a:ext cx="1644480" cy="212400"/>
+          </a:xfrm>
+          <a:prstGeom prst="rect">
+            <a:avLst/>
+          </a:prstGeom>
+          <a:noFill/>
+          <a:ln w="12700">
+            <a:noFill/>
+          </a:ln>
+        </p:spPr>
+        <p:style>
+          <a:lnRef idx="0"/>
+          <a:fillRef idx="0"/>
+          <a:effectRef idx="0"/>
+          <a:fontRef idx="minor"/>
+        </p:style>
+        <p:txBody>
+          <a:bodyPr lIns="0" rIns="0" tIns="0" bIns="0" anchor="ctr">
+            <a:spAutoFit/>
+          </a:bodyPr>
+          <a:p>
+            <a:pPr>
+              <a:lnSpc>
+                <a:spcPct val="100000"/>
+              </a:lnSpc>
+              <a:tabLst>
+                <a:tab algn="l" pos="0"/>
+              </a:tabLst>
+            </a:pPr>
+            <a:r>
+              <a:rPr b="0" lang="en-US" sz="1400" spc="-1" strike="noStrike">
+                <a:solidFill>
+                  <a:srgbClr val="ffffff"/>
+                </a:solidFill>
+                <a:latin typeface="Calibri"/>
+                <a:ea typeface="Calibri"/>
+              </a:rPr>
+              <a:t>13.0</a:t>
+            </a:r>
+            <a:endParaRPr b="0" lang="en-US" sz="1400" spc="-1" strike="noStrike">
+              <a:solidFill>
+                <a:srgbClr val="000000"/>
+              </a:solidFill>
+              <a:latin typeface="Arial"/>
+            </a:endParaRPr>
+          </a:p>
+        </p:txBody>
+      </p:sp>
+      <p:sp>
+        <p:nvSpPr>
+          <p:cNvPr id="112" name="Text 15"/>
+          <p:cNvSpPr/>
+          <p:nvPr/>
+        </p:nvSpPr>
+        <p:spPr>
+          <a:xfrm>
+            <a:off x="502920" y="2783160"/>
+            <a:ext cx="2924640" cy="212400"/>
+          </a:xfrm>
+          <a:prstGeom prst="rect">
+            <a:avLst/>
+          </a:prstGeom>
+          <a:noFill/>
+          <a:ln w="12700">
+            <a:noFill/>
+          </a:ln>
+        </p:spPr>
+        <p:style>
+          <a:lnRef idx="0"/>
+          <a:fillRef idx="0"/>
+          <a:effectRef idx="0"/>
+          <a:fontRef idx="minor"/>
+        </p:style>
+        <p:txBody>
+          <a:bodyPr lIns="0" rIns="0" tIns="0" bIns="0" anchor="ctr">
+            <a:spAutoFit/>
+          </a:bodyPr>
+          <a:p>
+            <a:pPr>
+              <a:lnSpc>
+                <a:spcPct val="100000"/>
+              </a:lnSpc>
+              <a:tabLst>
+                <a:tab algn="l" pos="0"/>
+              </a:tabLst>
+            </a:pPr>
+            <a:r>
+              <a:rPr b="0" lang="en-US" sz="1400" spc="-1" strike="noStrike">
+                <a:solidFill>
+                  <a:srgbClr val="ffffff"/>
+                </a:solidFill>
+                <a:latin typeface="Calibri"/>
+                <a:ea typeface="Calibri"/>
+              </a:rPr>
+              <a:t>CLIP resblocks.6</a:t>
+            </a:r>
+            <a:endParaRPr b="0" lang="en-US" sz="1400" spc="-1" strike="noStrike">
+              <a:solidFill>
+                <a:srgbClr val="000000"/>
+              </a:solidFill>
+              <a:latin typeface="Arial"/>
+            </a:endParaRPr>
+          </a:p>
+        </p:txBody>
+      </p:sp>
+      <p:sp>
+        <p:nvSpPr>
+          <p:cNvPr id="113" name="Text 16"/>
+          <p:cNvSpPr/>
+          <p:nvPr/>
+        </p:nvSpPr>
+        <p:spPr>
+          <a:xfrm>
+            <a:off x="3566160" y="2783160"/>
+            <a:ext cx="1461600" cy="212400"/>
+          </a:xfrm>
+          <a:prstGeom prst="rect">
+            <a:avLst/>
+          </a:prstGeom>
+          <a:noFill/>
+          <a:ln w="12700">
+            <a:noFill/>
+          </a:ln>
+        </p:spPr>
+        <p:style>
+          <a:lnRef idx="0"/>
+          <a:fillRef idx="0"/>
+          <a:effectRef idx="0"/>
+          <a:fontRef idx="minor"/>
+        </p:style>
+        <p:txBody>
+          <a:bodyPr lIns="0" rIns="0" tIns="0" bIns="0" anchor="ctr">
+            <a:spAutoFit/>
+          </a:bodyPr>
+          <a:p>
+            <a:pPr>
+              <a:lnSpc>
+                <a:spcPct val="100000"/>
+              </a:lnSpc>
+              <a:tabLst>
+                <a:tab algn="l" pos="0"/>
+              </a:tabLst>
+            </a:pPr>
+            <a:r>
+              <a:rPr b="0" lang="en-US" sz="1400" spc="-1" strike="noStrike">
+                <a:solidFill>
+                  <a:srgbClr val="ffffff"/>
+                </a:solidFill>
+                <a:latin typeface="Calibri"/>
+                <a:ea typeface="Calibri"/>
+              </a:rPr>
+              <a:t>3.9%</a:t>
+            </a:r>
+            <a:endParaRPr b="0" lang="en-US" sz="1400" spc="-1" strike="noStrike">
+              <a:solidFill>
+                <a:srgbClr val="000000"/>
+              </a:solidFill>
+              <a:latin typeface="Arial"/>
+            </a:endParaRPr>
+          </a:p>
+        </p:txBody>
+      </p:sp>
+      <p:sp>
+        <p:nvSpPr>
+          <p:cNvPr id="114" name="Text 17"/>
+          <p:cNvSpPr/>
+          <p:nvPr/>
+        </p:nvSpPr>
+        <p:spPr>
+          <a:xfrm>
+            <a:off x="5120640" y="2783160"/>
+            <a:ext cx="1461600" cy="212400"/>
+          </a:xfrm>
+          <a:prstGeom prst="rect">
+            <a:avLst/>
+          </a:prstGeom>
+          <a:noFill/>
+          <a:ln w="12700">
+            <a:noFill/>
+          </a:ln>
+        </p:spPr>
+        <p:style>
+          <a:lnRef idx="0"/>
+          <a:fillRef idx="0"/>
+          <a:effectRef idx="0"/>
+          <a:fontRef idx="minor"/>
+        </p:style>
+        <p:txBody>
+          <a:bodyPr lIns="0" rIns="0" tIns="0" bIns="0" anchor="ctr">
+            <a:spAutoFit/>
+          </a:bodyPr>
+          <a:p>
+            <a:pPr>
+              <a:lnSpc>
+                <a:spcPct val="100000"/>
+              </a:lnSpc>
+              <a:tabLst>
+                <a:tab algn="l" pos="0"/>
+              </a:tabLst>
+            </a:pPr>
+            <a:r>
+              <a:rPr b="0" lang="en-US" sz="1400" spc="-1" strike="noStrike">
+                <a:solidFill>
+                  <a:srgbClr val="ffffff"/>
+                </a:solidFill>
+                <a:latin typeface="Calibri"/>
+                <a:ea typeface="Calibri"/>
+              </a:rPr>
+              <a:t>16.7%</a:t>
+            </a:r>
+            <a:endParaRPr b="0" lang="en-US" sz="1400" spc="-1" strike="noStrike">
+              <a:solidFill>
+                <a:srgbClr val="000000"/>
+              </a:solidFill>
+              <a:latin typeface="Arial"/>
+            </a:endParaRPr>
+          </a:p>
+        </p:txBody>
+      </p:sp>
+      <p:sp>
+        <p:nvSpPr>
+          <p:cNvPr id="115" name="Text 18"/>
+          <p:cNvSpPr/>
+          <p:nvPr/>
+        </p:nvSpPr>
+        <p:spPr>
+          <a:xfrm>
+            <a:off x="6675120" y="2783160"/>
+            <a:ext cx="1644480" cy="212400"/>
+          </a:xfrm>
+          <a:prstGeom prst="rect">
+            <a:avLst/>
+          </a:prstGeom>
+          <a:noFill/>
+          <a:ln w="12700">
+            <a:noFill/>
+          </a:ln>
+        </p:spPr>
+        <p:style>
+          <a:lnRef idx="0"/>
+          <a:fillRef idx="0"/>
+          <a:effectRef idx="0"/>
+          <a:fontRef idx="minor"/>
+        </p:style>
+        <p:txBody>
+          <a:bodyPr lIns="0" rIns="0" tIns="0" bIns="0" anchor="ctr">
+            <a:spAutoFit/>
+          </a:bodyPr>
+          <a:p>
+            <a:pPr>
+              <a:lnSpc>
+                <a:spcPct val="100000"/>
+              </a:lnSpc>
+              <a:tabLst>
+                <a:tab algn="l" pos="0"/>
+              </a:tabLst>
+            </a:pPr>
+            <a:r>
+              <a:rPr b="0" lang="en-US" sz="1400" spc="-1" strike="noStrike">
+                <a:solidFill>
+                  <a:srgbClr val="ffffff"/>
+                </a:solidFill>
+                <a:latin typeface="Calibri"/>
+                <a:ea typeface="Calibri"/>
+              </a:rPr>
+              <a:t>17.0</a:t>
+            </a:r>
+            <a:endParaRPr b="0" lang="en-US" sz="1400" spc="-1" strike="noStrike">
+              <a:solidFill>
+                <a:srgbClr val="000000"/>
+              </a:solidFill>
+              <a:latin typeface="Arial"/>
+            </a:endParaRPr>
+          </a:p>
+        </p:txBody>
+      </p:sp>
+      <p:sp>
+        <p:nvSpPr>
+          <p:cNvPr id="116" name="Text 19"/>
+          <p:cNvSpPr/>
+          <p:nvPr/>
+        </p:nvSpPr>
+        <p:spPr>
+          <a:xfrm>
+            <a:off x="502920" y="3313800"/>
+            <a:ext cx="2924640" cy="212400"/>
+          </a:xfrm>
+          <a:prstGeom prst="rect">
+            <a:avLst/>
+          </a:prstGeom>
+          <a:noFill/>
+          <a:ln w="12700">
+            <a:noFill/>
+          </a:ln>
+        </p:spPr>
+        <p:style>
+          <a:lnRef idx="0"/>
+          <a:fillRef idx="0"/>
+          <a:effectRef idx="0"/>
+          <a:fontRef idx="minor"/>
+        </p:style>
+        <p:txBody>
+          <a:bodyPr lIns="0" rIns="0" tIns="0" bIns="0" anchor="ctr">
+            <a:spAutoFit/>
+          </a:bodyPr>
+          <a:p>
+            <a:pPr>
+              <a:lnSpc>
+                <a:spcPct val="100000"/>
+              </a:lnSpc>
+              <a:tabLst>
+                <a:tab algn="l" pos="0"/>
+              </a:tabLst>
+            </a:pPr>
+            <a:r>
+              <a:rPr b="0" lang="en-US" sz="1400" spc="-1" strike="noStrike">
+                <a:solidFill>
+                  <a:srgbClr val="ffffff"/>
+                </a:solidFill>
+                <a:latin typeface="Calibri"/>
+                <a:ea typeface="Calibri"/>
+              </a:rPr>
+              <a:t>CLIP resblocks.7</a:t>
+            </a:r>
+            <a:endParaRPr b="0" lang="en-US" sz="1400" spc="-1" strike="noStrike">
+              <a:solidFill>
+                <a:srgbClr val="000000"/>
+              </a:solidFill>
+              <a:latin typeface="Arial"/>
+            </a:endParaRPr>
+          </a:p>
+        </p:txBody>
+      </p:sp>
+      <p:sp>
+        <p:nvSpPr>
+          <p:cNvPr id="117" name="Text 20"/>
+          <p:cNvSpPr/>
+          <p:nvPr/>
+        </p:nvSpPr>
+        <p:spPr>
+          <a:xfrm>
+            <a:off x="3566160" y="3313800"/>
+            <a:ext cx="1461600" cy="212400"/>
+          </a:xfrm>
+          <a:prstGeom prst="rect">
+            <a:avLst/>
+          </a:prstGeom>
+          <a:noFill/>
+          <a:ln w="12700">
+            <a:noFill/>
+          </a:ln>
+        </p:spPr>
+        <p:style>
+          <a:lnRef idx="0"/>
+          <a:fillRef idx="0"/>
+          <a:effectRef idx="0"/>
+          <a:fontRef idx="minor"/>
+        </p:style>
+        <p:txBody>
+          <a:bodyPr lIns="0" rIns="0" tIns="0" bIns="0" anchor="ctr">
+            <a:spAutoFit/>
+          </a:bodyPr>
+          <a:p>
+            <a:pPr>
+              <a:lnSpc>
+                <a:spcPct val="100000"/>
+              </a:lnSpc>
+              <a:tabLst>
+                <a:tab algn="l" pos="0"/>
+              </a:tabLst>
+            </a:pPr>
+            <a:r>
+              <a:rPr b="0" lang="en-US" sz="1400" spc="-1" strike="noStrike">
+                <a:solidFill>
+                  <a:srgbClr val="ffffff"/>
+                </a:solidFill>
+                <a:latin typeface="Calibri"/>
+                <a:ea typeface="Calibri"/>
+              </a:rPr>
+              <a:t>4.9%</a:t>
+            </a:r>
+            <a:endParaRPr b="0" lang="en-US" sz="1400" spc="-1" strike="noStrike">
+              <a:solidFill>
+                <a:srgbClr val="000000"/>
+              </a:solidFill>
+              <a:latin typeface="Arial"/>
+            </a:endParaRPr>
+          </a:p>
+        </p:txBody>
+      </p:sp>
+      <p:sp>
+        <p:nvSpPr>
+          <p:cNvPr id="118" name="Text 21"/>
+          <p:cNvSpPr/>
+          <p:nvPr/>
+        </p:nvSpPr>
+        <p:spPr>
+          <a:xfrm>
+            <a:off x="5120640" y="3313800"/>
+            <a:ext cx="1461600" cy="212400"/>
+          </a:xfrm>
+          <a:prstGeom prst="rect">
+            <a:avLst/>
+          </a:prstGeom>
+          <a:noFill/>
+          <a:ln w="12700">
+            <a:noFill/>
+          </a:ln>
+        </p:spPr>
+        <p:style>
+          <a:lnRef idx="0"/>
+          <a:fillRef idx="0"/>
+          <a:effectRef idx="0"/>
+          <a:fontRef idx="minor"/>
+        </p:style>
+        <p:txBody>
+          <a:bodyPr lIns="0" rIns="0" tIns="0" bIns="0" anchor="ctr">
+            <a:spAutoFit/>
+          </a:bodyPr>
+          <a:p>
+            <a:pPr>
+              <a:lnSpc>
+                <a:spcPct val="100000"/>
+              </a:lnSpc>
+              <a:tabLst>
+                <a:tab algn="l" pos="0"/>
+              </a:tabLst>
+            </a:pPr>
+            <a:r>
+              <a:rPr b="0" lang="en-US" sz="1400" spc="-1" strike="noStrike">
+                <a:solidFill>
+                  <a:srgbClr val="ffffff"/>
+                </a:solidFill>
+                <a:latin typeface="Calibri"/>
+                <a:ea typeface="Calibri"/>
+              </a:rPr>
+              <a:t>21.6%</a:t>
+            </a:r>
+            <a:endParaRPr b="0" lang="en-US" sz="1400" spc="-1" strike="noStrike">
+              <a:solidFill>
+                <a:srgbClr val="000000"/>
+              </a:solidFill>
+              <a:latin typeface="Arial"/>
+            </a:endParaRPr>
+          </a:p>
+        </p:txBody>
+      </p:sp>
+      <p:sp>
+        <p:nvSpPr>
+          <p:cNvPr id="119" name="Text 22"/>
+          <p:cNvSpPr/>
+          <p:nvPr/>
+        </p:nvSpPr>
+        <p:spPr>
+          <a:xfrm>
+            <a:off x="6675120" y="3313800"/>
+            <a:ext cx="1644480" cy="212400"/>
+          </a:xfrm>
+          <a:prstGeom prst="rect">
+            <a:avLst/>
+          </a:prstGeom>
+          <a:noFill/>
+          <a:ln w="12700">
+            <a:noFill/>
+          </a:ln>
+        </p:spPr>
+        <p:style>
+          <a:lnRef idx="0"/>
+          <a:fillRef idx="0"/>
+          <a:effectRef idx="0"/>
+          <a:fontRef idx="minor"/>
+        </p:style>
+        <p:txBody>
+          <a:bodyPr lIns="0" rIns="0" tIns="0" bIns="0" anchor="ctr">
+            <a:spAutoFit/>
+          </a:bodyPr>
+          <a:p>
+            <a:pPr>
+              <a:lnSpc>
+                <a:spcPct val="100000"/>
+              </a:lnSpc>
+              <a:tabLst>
+                <a:tab algn="l" pos="0"/>
+              </a:tabLst>
+            </a:pPr>
+            <a:r>
+              <a:rPr b="0" lang="en-US" sz="1400" spc="-1" strike="noStrike">
+                <a:solidFill>
+                  <a:srgbClr val="ffffff"/>
+                </a:solidFill>
+                <a:latin typeface="Calibri"/>
+                <a:ea typeface="Calibri"/>
+              </a:rPr>
+              <a:t>14.0</a:t>
+            </a:r>
+            <a:endParaRPr b="0" lang="en-US" sz="1400" spc="-1" strike="noStrike">
+              <a:solidFill>
+                <a:srgbClr val="000000"/>
+              </a:solidFill>
+              <a:latin typeface="Arial"/>
+            </a:endParaRPr>
+          </a:p>
+        </p:txBody>
+      </p:sp>
+      <p:sp>
+        <p:nvSpPr>
+          <p:cNvPr id="120" name="Text 23"/>
+          <p:cNvSpPr/>
+          <p:nvPr/>
+        </p:nvSpPr>
+        <p:spPr>
+          <a:xfrm>
+            <a:off x="502920" y="3844080"/>
+            <a:ext cx="2924640" cy="212400"/>
+          </a:xfrm>
+          <a:prstGeom prst="rect">
+            <a:avLst/>
+          </a:prstGeom>
+          <a:noFill/>
+          <a:ln w="12700">
+            <a:noFill/>
+          </a:ln>
+        </p:spPr>
+        <p:style>
+          <a:lnRef idx="0"/>
+          <a:fillRef idx="0"/>
+          <a:effectRef idx="0"/>
+          <a:fontRef idx="minor"/>
+        </p:style>
+        <p:txBody>
+          <a:bodyPr lIns="0" rIns="0" tIns="0" bIns="0" anchor="ctr">
+            <a:spAutoFit/>
+          </a:bodyPr>
+          <a:p>
+            <a:pPr>
+              <a:lnSpc>
+                <a:spcPct val="100000"/>
+              </a:lnSpc>
+              <a:tabLst>
+                <a:tab algn="l" pos="0"/>
+              </a:tabLst>
+            </a:pPr>
+            <a:r>
+              <a:rPr b="0" lang="en-US" sz="1400" spc="-1" strike="noStrike">
+                <a:solidFill>
+                  <a:srgbClr val="ffffff"/>
+                </a:solidFill>
+                <a:latin typeface="Calibri"/>
+                <a:ea typeface="Calibri"/>
+              </a:rPr>
+              <a:t>Ensemble (submitted)</a:t>
+            </a:r>
+            <a:endParaRPr b="0" lang="en-US" sz="1400" spc="-1" strike="noStrike">
+              <a:solidFill>
+                <a:srgbClr val="000000"/>
+              </a:solidFill>
+              <a:latin typeface="Arial"/>
+            </a:endParaRPr>
+          </a:p>
+        </p:txBody>
+      </p:sp>
+      <p:sp>
+        <p:nvSpPr>
+          <p:cNvPr id="121" name="Text 24"/>
+          <p:cNvSpPr/>
+          <p:nvPr/>
+        </p:nvSpPr>
+        <p:spPr>
+          <a:xfrm>
+            <a:off x="3566160" y="3844080"/>
+            <a:ext cx="1461600" cy="212400"/>
+          </a:xfrm>
+          <a:prstGeom prst="rect">
+            <a:avLst/>
+          </a:prstGeom>
+          <a:noFill/>
+          <a:ln w="12700">
+            <a:noFill/>
+          </a:ln>
+        </p:spPr>
+        <p:style>
+          <a:lnRef idx="0"/>
+          <a:fillRef idx="0"/>
+          <a:effectRef idx="0"/>
+          <a:fontRef idx="minor"/>
+        </p:style>
+        <p:txBody>
+          <a:bodyPr lIns="0" rIns="0" tIns="0" bIns="0" anchor="ctr">
+            <a:spAutoFit/>
+          </a:bodyPr>
+          <a:p>
+            <a:pPr>
+              <a:lnSpc>
+                <a:spcPct val="100000"/>
+              </a:lnSpc>
+              <a:tabLst>
+                <a:tab algn="l" pos="0"/>
+              </a:tabLst>
+            </a:pPr>
+            <a:r>
+              <a:rPr b="0" lang="en-US" sz="1400" spc="-1" strike="noStrike">
+                <a:solidFill>
+                  <a:srgbClr val="ffffff"/>
+                </a:solidFill>
+                <a:latin typeface="Calibri"/>
+                <a:ea typeface="Calibri"/>
+              </a:rPr>
               <a:t>5.9%</a:t>
             </a:r>
-            <a:endParaRPr b="0" lang="en-US" sz="1600" spc="-1" strike="noStrike">
-              <a:solidFill>
-                <a:srgbClr val="000000"/>
-              </a:solidFill>
-              <a:latin typeface="Arial"/>
-            </a:endParaRPr>
-          </a:p>
-        </p:txBody>
-      </p:sp>
-      <p:sp>
-        <p:nvSpPr>
-          <p:cNvPr id="96" name="Text 10"/>
-          <p:cNvSpPr/>
-          <p:nvPr/>
-        </p:nvSpPr>
-        <p:spPr>
-          <a:xfrm>
-            <a:off x="3840480" y="2027520"/>
-            <a:ext cx="1371240" cy="242640"/>
-          </a:xfrm>
-          <a:prstGeom prst="rect">
-            <a:avLst/>
-          </a:prstGeom>
-          <a:noFill/>
-          <a:ln w="12700">
-            <a:noFill/>
-          </a:ln>
-        </p:spPr>
-        <p:style>
-          <a:lnRef idx="0"/>
-          <a:fillRef idx="0"/>
-          <a:effectRef idx="0"/>
-          <a:fontRef idx="minor"/>
-        </p:style>
-        <p:txBody>
-          <a:bodyPr lIns="0" rIns="0" tIns="0" bIns="0" anchor="ctr">
-            <a:spAutoFit/>
-          </a:bodyPr>
-          <a:p>
-            <a:pPr>
-              <a:lnSpc>
-                <a:spcPct val="100000"/>
-              </a:lnSpc>
-              <a:tabLst>
-                <a:tab algn="l" pos="0"/>
-              </a:tabLst>
-            </a:pPr>
-            <a:r>
-              <a:rPr b="0" lang="en-US" sz="1600" spc="-1" strike="noStrike">
+            <a:endParaRPr b="0" lang="en-US" sz="1400" spc="-1" strike="noStrike">
+              <a:solidFill>
+                <a:srgbClr val="000000"/>
+              </a:solidFill>
+              <a:latin typeface="Arial"/>
+            </a:endParaRPr>
+          </a:p>
+        </p:txBody>
+      </p:sp>
+      <p:sp>
+        <p:nvSpPr>
+          <p:cNvPr id="122" name="Text 25"/>
+          <p:cNvSpPr/>
+          <p:nvPr/>
+        </p:nvSpPr>
+        <p:spPr>
+          <a:xfrm>
+            <a:off x="5120640" y="3844080"/>
+            <a:ext cx="1461600" cy="212400"/>
+          </a:xfrm>
+          <a:prstGeom prst="rect">
+            <a:avLst/>
+          </a:prstGeom>
+          <a:noFill/>
+          <a:ln w="12700">
+            <a:noFill/>
+          </a:ln>
+        </p:spPr>
+        <p:style>
+          <a:lnRef idx="0"/>
+          <a:fillRef idx="0"/>
+          <a:effectRef idx="0"/>
+          <a:fontRef idx="minor"/>
+        </p:style>
+        <p:txBody>
+          <a:bodyPr lIns="0" rIns="0" tIns="0" bIns="0" anchor="ctr">
+            <a:spAutoFit/>
+          </a:bodyPr>
+          <a:p>
+            <a:pPr>
+              <a:lnSpc>
+                <a:spcPct val="100000"/>
+              </a:lnSpc>
+              <a:tabLst>
+                <a:tab algn="l" pos="0"/>
+              </a:tabLst>
+            </a:pPr>
+            <a:r>
+              <a:rPr b="0" lang="en-US" sz="1400" spc="-1" strike="noStrike">
                 <a:solidFill>
                   <a:srgbClr val="ffffff"/>
                 </a:solidFill>
                 <a:latin typeface="Calibri"/>
                 <a:ea typeface="Calibri"/>
               </a:rPr>
-              <a:t>24.5%</a:t>
-            </a:r>
-            <a:endParaRPr b="0" lang="en-US" sz="1600" spc="-1" strike="noStrike">
-              <a:solidFill>
-                <a:srgbClr val="000000"/>
-              </a:solidFill>
-              <a:latin typeface="Arial"/>
-            </a:endParaRPr>
-          </a:p>
-        </p:txBody>
-      </p:sp>
-      <p:sp>
-        <p:nvSpPr>
-          <p:cNvPr id="97" name="Text 11"/>
-          <p:cNvSpPr/>
-          <p:nvPr/>
-        </p:nvSpPr>
-        <p:spPr>
-          <a:xfrm>
-            <a:off x="5486400" y="2027520"/>
-            <a:ext cx="2285640" cy="242640"/>
-          </a:xfrm>
-          <a:prstGeom prst="rect">
-            <a:avLst/>
-          </a:prstGeom>
-          <a:noFill/>
-          <a:ln w="12700">
-            <a:noFill/>
-          </a:ln>
-        </p:spPr>
-        <p:style>
-          <a:lnRef idx="0"/>
-          <a:fillRef idx="0"/>
-          <a:effectRef idx="0"/>
-          <a:fontRef idx="minor"/>
-        </p:style>
-        <p:txBody>
-          <a:bodyPr lIns="0" rIns="0" tIns="0" bIns="0" anchor="ctr">
-            <a:spAutoFit/>
-          </a:bodyPr>
-          <a:p>
-            <a:pPr>
-              <a:lnSpc>
-                <a:spcPct val="100000"/>
-              </a:lnSpc>
-              <a:tabLst>
-                <a:tab algn="l" pos="0"/>
-              </a:tabLst>
-            </a:pPr>
-            <a:r>
-              <a:rPr b="0" lang="en-US" sz="1600" spc="-1" strike="noStrike">
+              <a:t>26.5%</a:t>
+            </a:r>
+            <a:endParaRPr b="0" lang="en-US" sz="1400" spc="-1" strike="noStrike">
+              <a:solidFill>
+                <a:srgbClr val="000000"/>
+              </a:solidFill>
+              <a:latin typeface="Arial"/>
+            </a:endParaRPr>
+          </a:p>
+        </p:txBody>
+      </p:sp>
+      <p:sp>
+        <p:nvSpPr>
+          <p:cNvPr id="123" name="Text 26"/>
+          <p:cNvSpPr/>
+          <p:nvPr/>
+        </p:nvSpPr>
+        <p:spPr>
+          <a:xfrm>
+            <a:off x="6675120" y="3844080"/>
+            <a:ext cx="1644480" cy="212400"/>
+          </a:xfrm>
+          <a:prstGeom prst="rect">
+            <a:avLst/>
+          </a:prstGeom>
+          <a:noFill/>
+          <a:ln w="12700">
+            <a:noFill/>
+          </a:ln>
+        </p:spPr>
+        <p:style>
+          <a:lnRef idx="0"/>
+          <a:fillRef idx="0"/>
+          <a:effectRef idx="0"/>
+          <a:fontRef idx="minor"/>
+        </p:style>
+        <p:txBody>
+          <a:bodyPr lIns="0" rIns="0" tIns="0" bIns="0" anchor="ctr">
+            <a:spAutoFit/>
+          </a:bodyPr>
+          <a:p>
+            <a:pPr>
+              <a:lnSpc>
+                <a:spcPct val="100000"/>
+              </a:lnSpc>
+              <a:tabLst>
+                <a:tab algn="l" pos="0"/>
+              </a:tabLst>
+            </a:pPr>
+            <a:r>
+              <a:rPr b="0" lang="en-US" sz="1400" spc="-1" strike="noStrike">
                 <a:solidFill>
                   <a:srgbClr val="ffffff"/>
                 </a:solidFill>
                 <a:latin typeface="Calibri"/>
                 <a:ea typeface="Calibri"/>
               </a:rPr>
-              <a:t>15.0</a:t>
-            </a:r>
-            <a:endParaRPr b="0" lang="en-US" sz="1600" spc="-1" strike="noStrike">
-              <a:solidFill>
-                <a:srgbClr val="000000"/>
-              </a:solidFill>
-              <a:latin typeface="Arial"/>
-            </a:endParaRPr>
-          </a:p>
-        </p:txBody>
-      </p:sp>
-      <p:sp>
-        <p:nvSpPr>
-          <p:cNvPr id="98" name="Text 12"/>
-          <p:cNvSpPr/>
-          <p:nvPr/>
-        </p:nvSpPr>
-        <p:spPr>
-          <a:xfrm>
-            <a:off x="548640" y="2530440"/>
-            <a:ext cx="1371240" cy="242640"/>
-          </a:xfrm>
-          <a:prstGeom prst="rect">
-            <a:avLst/>
-          </a:prstGeom>
-          <a:noFill/>
-          <a:ln w="12700">
-            <a:noFill/>
-          </a:ln>
-        </p:spPr>
-        <p:style>
-          <a:lnRef idx="0"/>
-          <a:fillRef idx="0"/>
-          <a:effectRef idx="0"/>
-          <a:fontRef idx="minor"/>
-        </p:style>
-        <p:txBody>
-          <a:bodyPr lIns="0" rIns="0" tIns="0" bIns="0" anchor="ctr">
-            <a:spAutoFit/>
-          </a:bodyPr>
-          <a:p>
-            <a:pPr>
-              <a:lnSpc>
-                <a:spcPct val="100000"/>
-              </a:lnSpc>
-              <a:tabLst>
-                <a:tab algn="l" pos="0"/>
-              </a:tabLst>
-            </a:pPr>
-            <a:r>
-              <a:rPr b="0" lang="en-US" sz="1600" spc="-1" strike="noStrike">
-                <a:solidFill>
-                  <a:srgbClr val="ffffff"/>
-                </a:solidFill>
-                <a:latin typeface="Calibri"/>
-                <a:ea typeface="Calibri"/>
-              </a:rPr>
-              <a:t>02</a:t>
-            </a:r>
-            <a:endParaRPr b="0" lang="en-US" sz="1600" spc="-1" strike="noStrike">
-              <a:solidFill>
-                <a:srgbClr val="000000"/>
-              </a:solidFill>
-              <a:latin typeface="Arial"/>
-            </a:endParaRPr>
-          </a:p>
-        </p:txBody>
-      </p:sp>
-      <p:sp>
-        <p:nvSpPr>
-          <p:cNvPr id="99" name="Text 13"/>
-          <p:cNvSpPr/>
-          <p:nvPr/>
-        </p:nvSpPr>
-        <p:spPr>
-          <a:xfrm>
-            <a:off x="2194560" y="2530440"/>
-            <a:ext cx="1371240" cy="242640"/>
-          </a:xfrm>
-          <a:prstGeom prst="rect">
-            <a:avLst/>
-          </a:prstGeom>
-          <a:noFill/>
-          <a:ln w="12700">
-            <a:noFill/>
-          </a:ln>
-        </p:spPr>
-        <p:style>
-          <a:lnRef idx="0"/>
-          <a:fillRef idx="0"/>
-          <a:effectRef idx="0"/>
-          <a:fontRef idx="minor"/>
-        </p:style>
-        <p:txBody>
-          <a:bodyPr lIns="0" rIns="0" tIns="0" bIns="0" anchor="ctr">
-            <a:spAutoFit/>
-          </a:bodyPr>
-          <a:p>
-            <a:pPr>
-              <a:lnSpc>
-                <a:spcPct val="100000"/>
-              </a:lnSpc>
-              <a:tabLst>
-                <a:tab algn="l" pos="0"/>
-              </a:tabLst>
-            </a:pPr>
-            <a:r>
-              <a:rPr b="0" lang="en-US" sz="1600" spc="-1" strike="noStrike">
-                <a:solidFill>
-                  <a:srgbClr val="ffffff"/>
-                </a:solidFill>
-                <a:latin typeface="Calibri"/>
-                <a:ea typeface="Calibri"/>
-              </a:rPr>
-              <a:t>3.9%</a:t>
-            </a:r>
-            <a:endParaRPr b="0" lang="en-US" sz="1600" spc="-1" strike="noStrike">
-              <a:solidFill>
-                <a:srgbClr val="000000"/>
-              </a:solidFill>
-              <a:latin typeface="Arial"/>
-            </a:endParaRPr>
-          </a:p>
-        </p:txBody>
-      </p:sp>
-      <p:sp>
-        <p:nvSpPr>
-          <p:cNvPr id="100" name="Text 14"/>
-          <p:cNvSpPr/>
-          <p:nvPr/>
-        </p:nvSpPr>
-        <p:spPr>
-          <a:xfrm>
-            <a:off x="3840480" y="2530440"/>
-            <a:ext cx="1371240" cy="242640"/>
-          </a:xfrm>
-          <a:prstGeom prst="rect">
-            <a:avLst/>
-          </a:prstGeom>
-          <a:noFill/>
-          <a:ln w="12700">
-            <a:noFill/>
-          </a:ln>
-        </p:spPr>
-        <p:style>
-          <a:lnRef idx="0"/>
-          <a:fillRef idx="0"/>
-          <a:effectRef idx="0"/>
-          <a:fontRef idx="minor"/>
-        </p:style>
-        <p:txBody>
-          <a:bodyPr lIns="0" rIns="0" tIns="0" bIns="0" anchor="ctr">
-            <a:spAutoFit/>
-          </a:bodyPr>
-          <a:p>
-            <a:pPr>
-              <a:lnSpc>
-                <a:spcPct val="100000"/>
-              </a:lnSpc>
-              <a:tabLst>
-                <a:tab algn="l" pos="0"/>
-              </a:tabLst>
-            </a:pPr>
-            <a:r>
-              <a:rPr b="0" lang="en-US" sz="1600" spc="-1" strike="noStrike">
-                <a:solidFill>
-                  <a:srgbClr val="ffffff"/>
-                </a:solidFill>
-                <a:latin typeface="Calibri"/>
-                <a:ea typeface="Calibri"/>
-              </a:rPr>
-              <a:t>24.5%</a:t>
-            </a:r>
-            <a:endParaRPr b="0" lang="en-US" sz="1600" spc="-1" strike="noStrike">
-              <a:solidFill>
-                <a:srgbClr val="000000"/>
-              </a:solidFill>
-              <a:latin typeface="Arial"/>
-            </a:endParaRPr>
-          </a:p>
-        </p:txBody>
-      </p:sp>
-      <p:sp>
-        <p:nvSpPr>
-          <p:cNvPr id="101" name="Text 15"/>
-          <p:cNvSpPr/>
-          <p:nvPr/>
-        </p:nvSpPr>
-        <p:spPr>
-          <a:xfrm>
-            <a:off x="5486400" y="2530440"/>
-            <a:ext cx="2285640" cy="242640"/>
-          </a:xfrm>
-          <a:prstGeom prst="rect">
-            <a:avLst/>
-          </a:prstGeom>
-          <a:noFill/>
-          <a:ln w="12700">
-            <a:noFill/>
-          </a:ln>
-        </p:spPr>
-        <p:style>
-          <a:lnRef idx="0"/>
-          <a:fillRef idx="0"/>
-          <a:effectRef idx="0"/>
-          <a:fontRef idx="minor"/>
-        </p:style>
-        <p:txBody>
-          <a:bodyPr lIns="0" rIns="0" tIns="0" bIns="0" anchor="ctr">
-            <a:spAutoFit/>
-          </a:bodyPr>
-          <a:p>
-            <a:pPr>
-              <a:lnSpc>
-                <a:spcPct val="100000"/>
-              </a:lnSpc>
-              <a:tabLst>
-                <a:tab algn="l" pos="0"/>
-              </a:tabLst>
-            </a:pPr>
-            <a:r>
-              <a:rPr b="0" lang="en-US" sz="1600" spc="-1" strike="noStrike">
-                <a:solidFill>
-                  <a:srgbClr val="ffffff"/>
-                </a:solidFill>
-                <a:latin typeface="Calibri"/>
-                <a:ea typeface="Calibri"/>
-              </a:rPr>
-              <a:t>19.5</a:t>
-            </a:r>
-            <a:endParaRPr b="0" lang="en-US" sz="1600" spc="-1" strike="noStrike">
-              <a:solidFill>
-                <a:srgbClr val="000000"/>
-              </a:solidFill>
-              <a:latin typeface="Arial"/>
-            </a:endParaRPr>
-          </a:p>
-        </p:txBody>
-      </p:sp>
-      <p:sp>
-        <p:nvSpPr>
-          <p:cNvPr id="102" name="Text 16"/>
-          <p:cNvSpPr/>
-          <p:nvPr/>
-        </p:nvSpPr>
-        <p:spPr>
-          <a:xfrm>
-            <a:off x="548640" y="3033360"/>
-            <a:ext cx="1371240" cy="242640"/>
-          </a:xfrm>
-          <a:prstGeom prst="rect">
-            <a:avLst/>
-          </a:prstGeom>
-          <a:noFill/>
-          <a:ln w="12700">
-            <a:noFill/>
-          </a:ln>
-        </p:spPr>
-        <p:style>
-          <a:lnRef idx="0"/>
-          <a:fillRef idx="0"/>
-          <a:effectRef idx="0"/>
-          <a:fontRef idx="minor"/>
-        </p:style>
-        <p:txBody>
-          <a:bodyPr lIns="0" rIns="0" tIns="0" bIns="0" anchor="ctr">
-            <a:spAutoFit/>
-          </a:bodyPr>
-          <a:p>
-            <a:pPr>
-              <a:lnSpc>
-                <a:spcPct val="100000"/>
-              </a:lnSpc>
-              <a:tabLst>
-                <a:tab algn="l" pos="0"/>
-              </a:tabLst>
-            </a:pPr>
-            <a:r>
-              <a:rPr b="0" lang="en-US" sz="1600" spc="-1" strike="noStrike">
-                <a:solidFill>
-                  <a:srgbClr val="ffffff"/>
-                </a:solidFill>
-                <a:latin typeface="Calibri"/>
-                <a:ea typeface="Calibri"/>
-              </a:rPr>
-              <a:t>03</a:t>
-            </a:r>
-            <a:endParaRPr b="0" lang="en-US" sz="1600" spc="-1" strike="noStrike">
-              <a:solidFill>
-                <a:srgbClr val="000000"/>
-              </a:solidFill>
-              <a:latin typeface="Arial"/>
-            </a:endParaRPr>
-          </a:p>
-        </p:txBody>
-      </p:sp>
-      <p:sp>
-        <p:nvSpPr>
-          <p:cNvPr id="103" name="Text 17"/>
-          <p:cNvSpPr/>
-          <p:nvPr/>
-        </p:nvSpPr>
-        <p:spPr>
-          <a:xfrm>
-            <a:off x="2194560" y="3033360"/>
-            <a:ext cx="1371240" cy="242640"/>
-          </a:xfrm>
-          <a:prstGeom prst="rect">
-            <a:avLst/>
-          </a:prstGeom>
-          <a:noFill/>
-          <a:ln w="12700">
-            <a:noFill/>
-          </a:ln>
-        </p:spPr>
-        <p:style>
-          <a:lnRef idx="0"/>
-          <a:fillRef idx="0"/>
-          <a:effectRef idx="0"/>
-          <a:fontRef idx="minor"/>
-        </p:style>
-        <p:txBody>
-          <a:bodyPr lIns="0" rIns="0" tIns="0" bIns="0" anchor="ctr">
-            <a:spAutoFit/>
-          </a:bodyPr>
-          <a:p>
-            <a:pPr>
-              <a:lnSpc>
-                <a:spcPct val="100000"/>
-              </a:lnSpc>
-              <a:tabLst>
-                <a:tab algn="l" pos="0"/>
-              </a:tabLst>
-            </a:pPr>
-            <a:r>
-              <a:rPr b="0" lang="en-US" sz="1600" spc="-1" strike="noStrike">
-                <a:solidFill>
-                  <a:srgbClr val="ffffff"/>
-                </a:solidFill>
-                <a:latin typeface="Calibri"/>
-                <a:ea typeface="Calibri"/>
-              </a:rPr>
-              <a:t>4.9%</a:t>
-            </a:r>
-            <a:endParaRPr b="0" lang="en-US" sz="1600" spc="-1" strike="noStrike">
-              <a:solidFill>
-                <a:srgbClr val="000000"/>
-              </a:solidFill>
-              <a:latin typeface="Arial"/>
-            </a:endParaRPr>
-          </a:p>
-        </p:txBody>
-      </p:sp>
-      <p:sp>
-        <p:nvSpPr>
-          <p:cNvPr id="104" name="Text 18"/>
-          <p:cNvSpPr/>
-          <p:nvPr/>
-        </p:nvSpPr>
-        <p:spPr>
-          <a:xfrm>
-            <a:off x="3840480" y="3033360"/>
-            <a:ext cx="1371240" cy="242640"/>
-          </a:xfrm>
-          <a:prstGeom prst="rect">
-            <a:avLst/>
-          </a:prstGeom>
-          <a:noFill/>
-          <a:ln w="12700">
-            <a:noFill/>
-          </a:ln>
-        </p:spPr>
-        <p:style>
-          <a:lnRef idx="0"/>
-          <a:fillRef idx="0"/>
-          <a:effectRef idx="0"/>
-          <a:fontRef idx="minor"/>
-        </p:style>
-        <p:txBody>
-          <a:bodyPr lIns="0" rIns="0" tIns="0" bIns="0" anchor="ctr">
-            <a:spAutoFit/>
-          </a:bodyPr>
-          <a:p>
-            <a:pPr>
-              <a:lnSpc>
-                <a:spcPct val="100000"/>
-              </a:lnSpc>
-              <a:tabLst>
-                <a:tab algn="l" pos="0"/>
-              </a:tabLst>
-            </a:pPr>
-            <a:r>
-              <a:rPr b="0" lang="en-US" sz="1600" spc="-1" strike="noStrike">
-                <a:solidFill>
-                  <a:srgbClr val="ffffff"/>
-                </a:solidFill>
-                <a:latin typeface="Calibri"/>
-                <a:ea typeface="Calibri"/>
-              </a:rPr>
-              <a:t>17.7%</a:t>
-            </a:r>
-            <a:endParaRPr b="0" lang="en-US" sz="1600" spc="-1" strike="noStrike">
-              <a:solidFill>
-                <a:srgbClr val="000000"/>
-              </a:solidFill>
-              <a:latin typeface="Arial"/>
-            </a:endParaRPr>
-          </a:p>
-        </p:txBody>
-      </p:sp>
-      <p:sp>
-        <p:nvSpPr>
-          <p:cNvPr id="105" name="Text 19"/>
-          <p:cNvSpPr/>
-          <p:nvPr/>
-        </p:nvSpPr>
-        <p:spPr>
-          <a:xfrm>
-            <a:off x="5486400" y="3033360"/>
-            <a:ext cx="2285640" cy="242640"/>
-          </a:xfrm>
-          <a:prstGeom prst="rect">
-            <a:avLst/>
-          </a:prstGeom>
-          <a:noFill/>
-          <a:ln w="12700">
-            <a:noFill/>
-          </a:ln>
-        </p:spPr>
-        <p:style>
-          <a:lnRef idx="0"/>
-          <a:fillRef idx="0"/>
-          <a:effectRef idx="0"/>
-          <a:fontRef idx="minor"/>
-        </p:style>
-        <p:txBody>
-          <a:bodyPr lIns="0" rIns="0" tIns="0" bIns="0" anchor="ctr">
-            <a:spAutoFit/>
-          </a:bodyPr>
-          <a:p>
-            <a:pPr>
-              <a:lnSpc>
-                <a:spcPct val="100000"/>
-              </a:lnSpc>
-              <a:tabLst>
-                <a:tab algn="l" pos="0"/>
-              </a:tabLst>
-            </a:pPr>
-            <a:r>
-              <a:rPr b="0" lang="en-US" sz="1600" spc="-1" strike="noStrike">
-                <a:solidFill>
-                  <a:srgbClr val="ffffff"/>
-                </a:solidFill>
-                <a:latin typeface="Calibri"/>
-                <a:ea typeface="Calibri"/>
-              </a:rPr>
-              <a:t>20.5</a:t>
-            </a:r>
-            <a:endParaRPr b="0" lang="en-US" sz="1600" spc="-1" strike="noStrike">
-              <a:solidFill>
-                <a:srgbClr val="000000"/>
-              </a:solidFill>
-              <a:latin typeface="Arial"/>
-            </a:endParaRPr>
-          </a:p>
-        </p:txBody>
-      </p:sp>
-      <p:sp>
-        <p:nvSpPr>
-          <p:cNvPr id="106" name="Text 20"/>
-          <p:cNvSpPr/>
-          <p:nvPr/>
-        </p:nvSpPr>
-        <p:spPr>
-          <a:xfrm>
-            <a:off x="548640" y="3536280"/>
-            <a:ext cx="1371240" cy="242640"/>
-          </a:xfrm>
-          <a:prstGeom prst="rect">
-            <a:avLst/>
-          </a:prstGeom>
-          <a:noFill/>
-          <a:ln w="12700">
-            <a:noFill/>
-          </a:ln>
-        </p:spPr>
-        <p:style>
-          <a:lnRef idx="0"/>
-          <a:fillRef idx="0"/>
-          <a:effectRef idx="0"/>
-          <a:fontRef idx="minor"/>
-        </p:style>
-        <p:txBody>
-          <a:bodyPr lIns="0" rIns="0" tIns="0" bIns="0" anchor="ctr">
-            <a:spAutoFit/>
-          </a:bodyPr>
-          <a:p>
-            <a:pPr>
-              <a:lnSpc>
-                <a:spcPct val="100000"/>
-              </a:lnSpc>
-              <a:tabLst>
-                <a:tab algn="l" pos="0"/>
-              </a:tabLst>
-            </a:pPr>
-            <a:r>
-              <a:rPr b="0" lang="en-US" sz="1600" spc="-1" strike="noStrike">
-                <a:solidFill>
-                  <a:srgbClr val="ffffff"/>
-                </a:solidFill>
-                <a:latin typeface="Calibri"/>
-                <a:ea typeface="Calibri"/>
-              </a:rPr>
-              <a:t>04</a:t>
-            </a:r>
-            <a:endParaRPr b="0" lang="en-US" sz="1600" spc="-1" strike="noStrike">
-              <a:solidFill>
-                <a:srgbClr val="000000"/>
-              </a:solidFill>
-              <a:latin typeface="Arial"/>
-            </a:endParaRPr>
-          </a:p>
-        </p:txBody>
-      </p:sp>
-      <p:sp>
-        <p:nvSpPr>
-          <p:cNvPr id="107" name="Text 21"/>
-          <p:cNvSpPr/>
-          <p:nvPr/>
-        </p:nvSpPr>
-        <p:spPr>
-          <a:xfrm>
-            <a:off x="2194560" y="3536280"/>
-            <a:ext cx="1371240" cy="242640"/>
-          </a:xfrm>
-          <a:prstGeom prst="rect">
-            <a:avLst/>
-          </a:prstGeom>
-          <a:noFill/>
-          <a:ln w="12700">
-            <a:noFill/>
-          </a:ln>
-        </p:spPr>
-        <p:style>
-          <a:lnRef idx="0"/>
-          <a:fillRef idx="0"/>
-          <a:effectRef idx="0"/>
-          <a:fontRef idx="minor"/>
-        </p:style>
-        <p:txBody>
-          <a:bodyPr lIns="0" rIns="0" tIns="0" bIns="0" anchor="ctr">
-            <a:spAutoFit/>
-          </a:bodyPr>
-          <a:p>
-            <a:pPr>
-              <a:lnSpc>
-                <a:spcPct val="100000"/>
-              </a:lnSpc>
-              <a:tabLst>
-                <a:tab algn="l" pos="0"/>
-              </a:tabLst>
-            </a:pPr>
-            <a:r>
-              <a:rPr b="0" lang="en-US" sz="1600" spc="-1" strike="noStrike">
-                <a:solidFill>
-                  <a:srgbClr val="ffffff"/>
-                </a:solidFill>
-                <a:latin typeface="Calibri"/>
-                <a:ea typeface="Calibri"/>
-              </a:rPr>
-              <a:t>4.9%</a:t>
-            </a:r>
-            <a:endParaRPr b="0" lang="en-US" sz="1600" spc="-1" strike="noStrike">
-              <a:solidFill>
-                <a:srgbClr val="000000"/>
-              </a:solidFill>
-              <a:latin typeface="Arial"/>
-            </a:endParaRPr>
-          </a:p>
-        </p:txBody>
-      </p:sp>
-      <p:sp>
-        <p:nvSpPr>
-          <p:cNvPr id="108" name="Text 22"/>
-          <p:cNvSpPr/>
-          <p:nvPr/>
-        </p:nvSpPr>
-        <p:spPr>
-          <a:xfrm>
-            <a:off x="3840480" y="3536280"/>
-            <a:ext cx="1371240" cy="242640"/>
-          </a:xfrm>
-          <a:prstGeom prst="rect">
-            <a:avLst/>
-          </a:prstGeom>
-          <a:noFill/>
-          <a:ln w="12700">
-            <a:noFill/>
-          </a:ln>
-        </p:spPr>
-        <p:style>
-          <a:lnRef idx="0"/>
-          <a:fillRef idx="0"/>
-          <a:effectRef idx="0"/>
-          <a:fontRef idx="minor"/>
-        </p:style>
-        <p:txBody>
-          <a:bodyPr lIns="0" rIns="0" tIns="0" bIns="0" anchor="ctr">
-            <a:spAutoFit/>
-          </a:bodyPr>
-          <a:p>
-            <a:pPr>
-              <a:lnSpc>
-                <a:spcPct val="100000"/>
-              </a:lnSpc>
-              <a:tabLst>
-                <a:tab algn="l" pos="0"/>
-              </a:tabLst>
-            </a:pPr>
-            <a:r>
-              <a:rPr b="0" lang="en-US" sz="1600" spc="-1" strike="noStrike">
-                <a:solidFill>
-                  <a:srgbClr val="ffffff"/>
-                </a:solidFill>
-                <a:latin typeface="Calibri"/>
-                <a:ea typeface="Calibri"/>
-              </a:rPr>
-              <a:t>14.7%</a:t>
-            </a:r>
-            <a:endParaRPr b="0" lang="en-US" sz="1600" spc="-1" strike="noStrike">
-              <a:solidFill>
-                <a:srgbClr val="000000"/>
-              </a:solidFill>
-              <a:latin typeface="Arial"/>
-            </a:endParaRPr>
-          </a:p>
-        </p:txBody>
-      </p:sp>
-      <p:sp>
-        <p:nvSpPr>
-          <p:cNvPr id="109" name="Text 23"/>
-          <p:cNvSpPr/>
-          <p:nvPr/>
-        </p:nvSpPr>
-        <p:spPr>
-          <a:xfrm>
-            <a:off x="5486400" y="3536280"/>
-            <a:ext cx="2285640" cy="242640"/>
-          </a:xfrm>
-          <a:prstGeom prst="rect">
-            <a:avLst/>
-          </a:prstGeom>
-          <a:noFill/>
-          <a:ln w="12700">
-            <a:noFill/>
-          </a:ln>
-        </p:spPr>
-        <p:style>
-          <a:lnRef idx="0"/>
-          <a:fillRef idx="0"/>
-          <a:effectRef idx="0"/>
-          <a:fontRef idx="minor"/>
-        </p:style>
-        <p:txBody>
-          <a:bodyPr lIns="0" rIns="0" tIns="0" bIns="0" anchor="ctr">
-            <a:spAutoFit/>
-          </a:bodyPr>
-          <a:p>
-            <a:pPr>
-              <a:lnSpc>
-                <a:spcPct val="100000"/>
-              </a:lnSpc>
-              <a:tabLst>
-                <a:tab algn="l" pos="0"/>
-              </a:tabLst>
-            </a:pPr>
-            <a:r>
-              <a:rPr b="0" lang="en-US" sz="1600" spc="-1" strike="noStrike">
-                <a:solidFill>
-                  <a:srgbClr val="ffffff"/>
-                </a:solidFill>
-                <a:latin typeface="Calibri"/>
-                <a:ea typeface="Calibri"/>
-              </a:rPr>
-              <a:t>22.5</a:t>
-            </a:r>
-            <a:endParaRPr b="0" lang="en-US" sz="1600" spc="-1" strike="noStrike">
-              <a:solidFill>
-                <a:srgbClr val="000000"/>
-              </a:solidFill>
-              <a:latin typeface="Arial"/>
-            </a:endParaRPr>
-          </a:p>
-        </p:txBody>
-      </p:sp>
-      <p:sp>
-        <p:nvSpPr>
-          <p:cNvPr id="110" name="Shape 24"/>
+              <a:t>14.0</a:t>
+            </a:r>
+            <a:endParaRPr b="0" lang="en-US" sz="1400" spc="-1" strike="noStrike">
+              <a:solidFill>
+                <a:srgbClr val="000000"/>
+              </a:solidFill>
+              <a:latin typeface="Arial"/>
+            </a:endParaRPr>
+          </a:p>
+        </p:txBody>
+      </p:sp>
+      <p:sp>
+        <p:nvSpPr>
+          <p:cNvPr id="124" name="Shape 27"/>
           <p:cNvSpPr/>
           <p:nvPr/>
         </p:nvSpPr>
         <p:spPr>
           <a:xfrm>
             <a:off x="0" y="4800600"/>
-            <a:ext cx="9143640" cy="342720"/>
+            <a:ext cx="9142560" cy="341640"/>
           </a:xfrm>
           <a:prstGeom prst="rect">
             <a:avLst/>
@@ -6443,14 +7272,14 @@
       </p:sp>
       <p:sp>
         <p:nvSpPr>
-          <p:cNvPr id="111" name="Text 25"/>
+          <p:cNvPr id="125" name="Text 28"/>
           <p:cNvSpPr/>
           <p:nvPr/>
         </p:nvSpPr>
         <p:spPr>
           <a:xfrm>
             <a:off x="365760" y="4884840"/>
-            <a:ext cx="6857640" cy="151560"/>
+            <a:ext cx="6856560" cy="151560"/>
           </a:xfrm>
           <a:prstGeom prst="rect">
             <a:avLst/>
@@ -6500,14 +7329,14 @@
       </p:sp>
       <p:sp>
         <p:nvSpPr>
-          <p:cNvPr id="112" name="Text 26"/>
+          <p:cNvPr id="126" name="Text 29"/>
           <p:cNvSpPr/>
           <p:nvPr/>
         </p:nvSpPr>
         <p:spPr>
           <a:xfrm>
             <a:off x="8412480" y="4884840"/>
-            <a:ext cx="456840" cy="151560"/>
+            <a:ext cx="455760" cy="151560"/>
           </a:xfrm>
           <a:prstGeom prst="rect">
             <a:avLst/>
@@ -6544,7 +7373,7 @@
                 <a:latin typeface="Calibri"/>
                 <a:ea typeface="Calibri"/>
               </a:rPr>
-              <a:t>5</a:t>
+              <a:t>3</a:t>
             </a:r>
             <a:endParaRPr b="0" lang="en-US" sz="1000" spc="-1" strike="noStrike">
               <a:solidFill>
@@ -6587,7 +7416,7 @@
       </p:grpSpPr>
       <p:pic>
         <p:nvPicPr>
-          <p:cNvPr id="113" name="Image 0" descr="Image 0"/>
+          <p:cNvPr id="127" name="Image 0" descr="Image 0"/>
           <p:cNvPicPr/>
           <p:nvPr/>
         </p:nvPicPr>
@@ -6598,7 +7427,7 @@
         <p:spPr>
           <a:xfrm>
             <a:off x="0" y="0"/>
-            <a:ext cx="9143640" cy="5143320"/>
+            <a:ext cx="9142560" cy="5142240"/>
           </a:xfrm>
           <a:prstGeom prst="rect">
             <a:avLst/>
@@ -6610,14 +7439,14 @@
       </p:pic>
       <p:sp>
         <p:nvSpPr>
-          <p:cNvPr id="114" name="Shape 0"/>
+          <p:cNvPr id="128" name="Shape 0"/>
           <p:cNvSpPr/>
           <p:nvPr/>
         </p:nvSpPr>
         <p:spPr>
           <a:xfrm>
             <a:off x="320040" y="1051560"/>
-            <a:ext cx="8503560" cy="3611520"/>
+            <a:ext cx="8502480" cy="3610440"/>
           </a:xfrm>
           <a:prstGeom prst="roundRect">
             <a:avLst>
@@ -6664,51 +7493,51 @@
       </p:sp>
       <p:sp>
         <p:nvSpPr>
-          <p:cNvPr id="115" name="Text 1"/>
+          <p:cNvPr id="129" name="Text 1"/>
           <p:cNvSpPr/>
           <p:nvPr/>
         </p:nvSpPr>
         <p:spPr>
           <a:xfrm>
             <a:off x="411480" y="212040"/>
-            <a:ext cx="8229240" cy="197280"/>
-          </a:xfrm>
-          <a:prstGeom prst="rect">
-            <a:avLst/>
-          </a:prstGeom>
-          <a:noFill/>
-          <a:ln w="12700">
-            <a:noFill/>
-          </a:ln>
-        </p:spPr>
-        <p:style>
-          <a:lnRef idx="0"/>
-          <a:fillRef idx="0"/>
-          <a:effectRef idx="0"/>
-          <a:fontRef idx="minor"/>
-        </p:style>
-        <p:txBody>
-          <a:bodyPr lIns="0" rIns="0" tIns="0" bIns="0" anchor="ctr">
-            <a:spAutoFit/>
-          </a:bodyPr>
-          <a:p>
-            <a:pPr>
-              <a:lnSpc>
-                <a:spcPct val="100000"/>
-              </a:lnSpc>
-              <a:tabLst>
-                <a:tab algn="l" pos="0"/>
-              </a:tabLst>
-            </a:pPr>
-            <a:r>
-              <a:rPr b="1" lang="en-US" sz="1300" spc="398" strike="noStrike">
+            <a:ext cx="8228160" cy="197280"/>
+          </a:xfrm>
+          <a:prstGeom prst="rect">
+            <a:avLst/>
+          </a:prstGeom>
+          <a:noFill/>
+          <a:ln w="12700">
+            <a:noFill/>
+          </a:ln>
+        </p:spPr>
+        <p:style>
+          <a:lnRef idx="0"/>
+          <a:fillRef idx="0"/>
+          <a:effectRef idx="0"/>
+          <a:fontRef idx="minor"/>
+        </p:style>
+        <p:txBody>
+          <a:bodyPr lIns="0" rIns="0" tIns="0" bIns="0" anchor="ctr">
+            <a:spAutoFit/>
+          </a:bodyPr>
+          <a:p>
+            <a:pPr>
+              <a:lnSpc>
+                <a:spcPct val="100000"/>
+              </a:lnSpc>
+              <a:tabLst>
+                <a:tab algn="l" pos="0"/>
+              </a:tabLst>
+            </a:pPr>
+            <a:r>
+              <a:rPr b="1" lang="en-US" sz="1300" spc="389" strike="noStrike">
                 <a:solidFill>
                   <a:srgbClr val="2ee5ba"/>
                 </a:solidFill>
                 <a:latin typeface="Calibri"/>
                 <a:ea typeface="Calibri"/>
               </a:rPr>
-              <a:t>FEATURE ABLATION</a:t>
+              <a:t>OTHER APPROACHES</a:t>
             </a:r>
             <a:endParaRPr b="0" lang="en-US" sz="1300" spc="-1" strike="noStrike">
               <a:solidFill>
@@ -6721,14 +7550,14 @@
       </p:sp>
       <p:sp>
         <p:nvSpPr>
-          <p:cNvPr id="116" name="Text 2"/>
+          <p:cNvPr id="130" name="Text 2"/>
           <p:cNvSpPr/>
           <p:nvPr/>
         </p:nvSpPr>
         <p:spPr>
           <a:xfrm>
             <a:off x="411480" y="545760"/>
-            <a:ext cx="8320680" cy="425880"/>
+            <a:ext cx="8319600" cy="425880"/>
           </a:xfrm>
           <a:prstGeom prst="rect">
             <a:avLst/>
@@ -6765,7 +7594,7 @@
                 <a:latin typeface="Calibri"/>
                 <a:ea typeface="Calibri"/>
               </a:rPr>
-              <a:t>Subject 1 — what worked best</a:t>
+              <a:t>Why Ridge on raw EEG won</a:t>
             </a:r>
             <a:endParaRPr b="0" lang="en-US" sz="2800" spc="-1" strike="noStrike">
               <a:solidFill>
@@ -6778,242 +7607,413 @@
       </p:sp>
       <p:sp>
         <p:nvSpPr>
-          <p:cNvPr id="117" name="Text 3"/>
-          <p:cNvSpPr/>
-          <p:nvPr/>
-        </p:nvSpPr>
-        <p:spPr>
-          <a:xfrm>
-            <a:off x="502920" y="1318320"/>
-            <a:ext cx="2925720" cy="197280"/>
-          </a:xfrm>
-          <a:prstGeom prst="rect">
-            <a:avLst/>
-          </a:prstGeom>
-          <a:noFill/>
-          <a:ln w="12700">
-            <a:noFill/>
-          </a:ln>
-        </p:spPr>
-        <p:style>
-          <a:lnRef idx="0"/>
-          <a:fillRef idx="0"/>
-          <a:effectRef idx="0"/>
-          <a:fontRef idx="minor"/>
-        </p:style>
-        <p:txBody>
-          <a:bodyPr lIns="0" rIns="0" tIns="0" bIns="0" anchor="ctr">
-            <a:spAutoFit/>
-          </a:bodyPr>
-          <a:p>
-            <a:pPr>
-              <a:lnSpc>
-                <a:spcPct val="100000"/>
-              </a:lnSpc>
-              <a:tabLst>
-                <a:tab algn="l" pos="0"/>
-              </a:tabLst>
-            </a:pPr>
-            <a:r>
-              <a:rPr b="1" lang="en-US" sz="1300" spc="-1" strike="noStrike">
+          <p:cNvPr id="131" name="Text 3"/>
+          <p:cNvSpPr/>
+          <p:nvPr/>
+        </p:nvSpPr>
+        <p:spPr>
+          <a:xfrm>
+            <a:off x="502920" y="1387440"/>
+            <a:ext cx="2924640" cy="242640"/>
+          </a:xfrm>
+          <a:prstGeom prst="rect">
+            <a:avLst/>
+          </a:prstGeom>
+          <a:noFill/>
+          <a:ln w="12700">
+            <a:noFill/>
+          </a:ln>
+        </p:spPr>
+        <p:style>
+          <a:lnRef idx="0"/>
+          <a:fillRef idx="0"/>
+          <a:effectRef idx="0"/>
+          <a:fontRef idx="minor"/>
+        </p:style>
+        <p:txBody>
+          <a:bodyPr lIns="0" rIns="0" tIns="0" bIns="0" anchor="ctr">
+            <a:spAutoFit/>
+          </a:bodyPr>
+          <a:p>
+            <a:pPr>
+              <a:lnSpc>
+                <a:spcPct val="100000"/>
+              </a:lnSpc>
+              <a:tabLst>
+                <a:tab algn="l" pos="0"/>
+              </a:tabLst>
+            </a:pPr>
+            <a:r>
+              <a:rPr b="1" lang="en-US" sz="1600" spc="-1" strike="noStrike">
                 <a:solidFill>
                   <a:srgbClr val="2ee5ba"/>
                 </a:solidFill>
                 <a:latin typeface="Calibri"/>
                 <a:ea typeface="Calibri"/>
               </a:rPr>
-              <a:t>Features</a:t>
-            </a:r>
-            <a:endParaRPr b="0" lang="en-US" sz="1300" spc="-1" strike="noStrike">
-              <a:solidFill>
-                <a:srgbClr val="000000"/>
-              </a:solidFill>
-              <a:latin typeface="Arial"/>
-            </a:endParaRPr>
-          </a:p>
-        </p:txBody>
-      </p:sp>
-      <p:sp>
-        <p:nvSpPr>
-          <p:cNvPr id="118" name="Text 4"/>
-          <p:cNvSpPr/>
-          <p:nvPr/>
-        </p:nvSpPr>
-        <p:spPr>
-          <a:xfrm>
-            <a:off x="3566160" y="1318320"/>
-            <a:ext cx="1462680" cy="197280"/>
-          </a:xfrm>
-          <a:prstGeom prst="rect">
-            <a:avLst/>
-          </a:prstGeom>
-          <a:noFill/>
-          <a:ln w="12700">
-            <a:noFill/>
-          </a:ln>
-        </p:spPr>
-        <p:style>
-          <a:lnRef idx="0"/>
-          <a:fillRef idx="0"/>
-          <a:effectRef idx="0"/>
-          <a:fontRef idx="minor"/>
-        </p:style>
-        <p:txBody>
-          <a:bodyPr lIns="0" rIns="0" tIns="0" bIns="0" anchor="ctr">
-            <a:spAutoFit/>
-          </a:bodyPr>
-          <a:p>
-            <a:pPr>
-              <a:lnSpc>
-                <a:spcPct val="100000"/>
-              </a:lnSpc>
-              <a:tabLst>
-                <a:tab algn="l" pos="0"/>
-              </a:tabLst>
-            </a:pPr>
-            <a:r>
-              <a:rPr b="1" lang="en-US" sz="1300" spc="-1" strike="noStrike">
+              <a:t>CCA</a:t>
+            </a:r>
+            <a:endParaRPr b="0" lang="en-US" sz="1600" spc="-1" strike="noStrike">
+              <a:solidFill>
+                <a:srgbClr val="000000"/>
+              </a:solidFill>
+              <a:latin typeface="Arial"/>
+            </a:endParaRPr>
+          </a:p>
+        </p:txBody>
+      </p:sp>
+      <p:sp>
+        <p:nvSpPr>
+          <p:cNvPr id="132" name="Text 4"/>
+          <p:cNvSpPr/>
+          <p:nvPr/>
+        </p:nvSpPr>
+        <p:spPr>
+          <a:xfrm>
+            <a:off x="3566160" y="1448280"/>
+            <a:ext cx="5027760" cy="212400"/>
+          </a:xfrm>
+          <a:prstGeom prst="rect">
+            <a:avLst/>
+          </a:prstGeom>
+          <a:noFill/>
+          <a:ln w="12700">
+            <a:noFill/>
+          </a:ln>
+        </p:spPr>
+        <p:style>
+          <a:lnRef idx="0"/>
+          <a:fillRef idx="0"/>
+          <a:effectRef idx="0"/>
+          <a:fontRef idx="minor"/>
+        </p:style>
+        <p:txBody>
+          <a:bodyPr lIns="0" rIns="0" tIns="0" bIns="0" anchor="ctr">
+            <a:spAutoFit/>
+          </a:bodyPr>
+          <a:p>
+            <a:pPr>
+              <a:lnSpc>
+                <a:spcPct val="100000"/>
+              </a:lnSpc>
+              <a:tabLst>
+                <a:tab algn="l" pos="0"/>
+              </a:tabLst>
+            </a:pPr>
+            <a:r>
+              <a:rPr b="0" lang="en-US" sz="1400" spc="-1" strike="noStrike">
+                <a:solidFill>
+                  <a:srgbClr val="ffffff"/>
+                </a:solidFill>
+                <a:latin typeface="Calibri"/>
+                <a:ea typeface="Calibri"/>
+              </a:rPr>
+              <a:t>100% train top-1, but test at chance (median rank ~50)</a:t>
+            </a:r>
+            <a:endParaRPr b="0" lang="en-US" sz="1400" spc="-1" strike="noStrike">
+              <a:solidFill>
+                <a:srgbClr val="000000"/>
+              </a:solidFill>
+              <a:latin typeface="Arial"/>
+            </a:endParaRPr>
+          </a:p>
+        </p:txBody>
+      </p:sp>
+      <p:sp>
+        <p:nvSpPr>
+          <p:cNvPr id="133" name="Text 5"/>
+          <p:cNvSpPr/>
+          <p:nvPr/>
+        </p:nvSpPr>
+        <p:spPr>
+          <a:xfrm>
+            <a:off x="502920" y="2164680"/>
+            <a:ext cx="2924640" cy="242640"/>
+          </a:xfrm>
+          <a:prstGeom prst="rect">
+            <a:avLst/>
+          </a:prstGeom>
+          <a:noFill/>
+          <a:ln w="12700">
+            <a:noFill/>
+          </a:ln>
+        </p:spPr>
+        <p:style>
+          <a:lnRef idx="0"/>
+          <a:fillRef idx="0"/>
+          <a:effectRef idx="0"/>
+          <a:fontRef idx="minor"/>
+        </p:style>
+        <p:txBody>
+          <a:bodyPr lIns="0" rIns="0" tIns="0" bIns="0" anchor="ctr">
+            <a:spAutoFit/>
+          </a:bodyPr>
+          <a:p>
+            <a:pPr>
+              <a:lnSpc>
+                <a:spcPct val="100000"/>
+              </a:lnSpc>
+              <a:tabLst>
+                <a:tab algn="l" pos="0"/>
+              </a:tabLst>
+            </a:pPr>
+            <a:r>
+              <a:rPr b="1" lang="en-US" sz="1600" spc="-1" strike="noStrike">
                 <a:solidFill>
                   <a:srgbClr val="2ee5ba"/>
                 </a:solidFill>
                 <a:latin typeface="Calibri"/>
                 <a:ea typeface="Calibri"/>
               </a:rPr>
-              <a:t>Test Top-1</a:t>
-            </a:r>
-            <a:endParaRPr b="0" lang="en-US" sz="1300" spc="-1" strike="noStrike">
-              <a:solidFill>
-                <a:srgbClr val="000000"/>
-              </a:solidFill>
-              <a:latin typeface="Arial"/>
-            </a:endParaRPr>
-          </a:p>
-        </p:txBody>
-      </p:sp>
-      <p:sp>
-        <p:nvSpPr>
-          <p:cNvPr id="119" name="Text 5"/>
-          <p:cNvSpPr/>
-          <p:nvPr/>
-        </p:nvSpPr>
-        <p:spPr>
-          <a:xfrm>
-            <a:off x="5120640" y="1318320"/>
-            <a:ext cx="1462680" cy="197280"/>
-          </a:xfrm>
-          <a:prstGeom prst="rect">
-            <a:avLst/>
-          </a:prstGeom>
-          <a:noFill/>
-          <a:ln w="12700">
-            <a:noFill/>
-          </a:ln>
-        </p:spPr>
-        <p:style>
-          <a:lnRef idx="0"/>
-          <a:fillRef idx="0"/>
-          <a:effectRef idx="0"/>
-          <a:fontRef idx="minor"/>
-        </p:style>
-        <p:txBody>
-          <a:bodyPr lIns="0" rIns="0" tIns="0" bIns="0" anchor="ctr">
-            <a:spAutoFit/>
-          </a:bodyPr>
-          <a:p>
-            <a:pPr>
-              <a:lnSpc>
-                <a:spcPct val="100000"/>
-              </a:lnSpc>
-              <a:tabLst>
-                <a:tab algn="l" pos="0"/>
-              </a:tabLst>
-            </a:pPr>
-            <a:r>
-              <a:rPr b="1" lang="en-US" sz="1300" spc="-1" strike="noStrike">
+              <a:t>CLIP-style contrastive</a:t>
+            </a:r>
+            <a:endParaRPr b="0" lang="en-US" sz="1600" spc="-1" strike="noStrike">
+              <a:solidFill>
+                <a:srgbClr val="000000"/>
+              </a:solidFill>
+              <a:latin typeface="Arial"/>
+            </a:endParaRPr>
+          </a:p>
+        </p:txBody>
+      </p:sp>
+      <p:sp>
+        <p:nvSpPr>
+          <p:cNvPr id="134" name="Text 6"/>
+          <p:cNvSpPr/>
+          <p:nvPr/>
+        </p:nvSpPr>
+        <p:spPr>
+          <a:xfrm>
+            <a:off x="3566160" y="2225520"/>
+            <a:ext cx="5027760" cy="212400"/>
+          </a:xfrm>
+          <a:prstGeom prst="rect">
+            <a:avLst/>
+          </a:prstGeom>
+          <a:noFill/>
+          <a:ln w="12700">
+            <a:noFill/>
+          </a:ln>
+        </p:spPr>
+        <p:style>
+          <a:lnRef idx="0"/>
+          <a:fillRef idx="0"/>
+          <a:effectRef idx="0"/>
+          <a:fontRef idx="minor"/>
+        </p:style>
+        <p:txBody>
+          <a:bodyPr lIns="0" rIns="0" tIns="0" bIns="0" anchor="ctr">
+            <a:spAutoFit/>
+          </a:bodyPr>
+          <a:p>
+            <a:pPr>
+              <a:lnSpc>
+                <a:spcPct val="100000"/>
+              </a:lnSpc>
+              <a:tabLst>
+                <a:tab algn="l" pos="0"/>
+              </a:tabLst>
+            </a:pPr>
+            <a:r>
+              <a:rPr b="0" lang="en-US" sz="1400" spc="-1" strike="noStrike">
+                <a:solidFill>
+                  <a:srgbClr val="ffffff"/>
+                </a:solidFill>
+                <a:latin typeface="Calibri"/>
+                <a:ea typeface="Calibri"/>
+              </a:rPr>
+              <a:t>Heavy overfitting; memorizes training pairs</a:t>
+            </a:r>
+            <a:endParaRPr b="0" lang="en-US" sz="1400" spc="-1" strike="noStrike">
+              <a:solidFill>
+                <a:srgbClr val="000000"/>
+              </a:solidFill>
+              <a:latin typeface="Arial"/>
+            </a:endParaRPr>
+          </a:p>
+        </p:txBody>
+      </p:sp>
+      <p:sp>
+        <p:nvSpPr>
+          <p:cNvPr id="135" name="Text 7"/>
+          <p:cNvSpPr/>
+          <p:nvPr/>
+        </p:nvSpPr>
+        <p:spPr>
+          <a:xfrm>
+            <a:off x="502920" y="2941920"/>
+            <a:ext cx="2924640" cy="242640"/>
+          </a:xfrm>
+          <a:prstGeom prst="rect">
+            <a:avLst/>
+          </a:prstGeom>
+          <a:noFill/>
+          <a:ln w="12700">
+            <a:noFill/>
+          </a:ln>
+        </p:spPr>
+        <p:style>
+          <a:lnRef idx="0"/>
+          <a:fillRef idx="0"/>
+          <a:effectRef idx="0"/>
+          <a:fontRef idx="minor"/>
+        </p:style>
+        <p:txBody>
+          <a:bodyPr lIns="0" rIns="0" tIns="0" bIns="0" anchor="ctr">
+            <a:spAutoFit/>
+          </a:bodyPr>
+          <a:p>
+            <a:pPr>
+              <a:lnSpc>
+                <a:spcPct val="100000"/>
+              </a:lnSpc>
+              <a:tabLst>
+                <a:tab algn="l" pos="0"/>
+              </a:tabLst>
+            </a:pPr>
+            <a:r>
+              <a:rPr b="1" lang="en-US" sz="1600" spc="-1" strike="noStrike">
                 <a:solidFill>
                   <a:srgbClr val="2ee5ba"/>
                 </a:solidFill>
                 <a:latin typeface="Calibri"/>
                 <a:ea typeface="Calibri"/>
               </a:rPr>
-              <a:t>Test Top-5</a:t>
-            </a:r>
-            <a:endParaRPr b="0" lang="en-US" sz="1300" spc="-1" strike="noStrike">
-              <a:solidFill>
-                <a:srgbClr val="000000"/>
-              </a:solidFill>
-              <a:latin typeface="Arial"/>
-            </a:endParaRPr>
-          </a:p>
-        </p:txBody>
-      </p:sp>
-      <p:sp>
-        <p:nvSpPr>
-          <p:cNvPr id="120" name="Text 6"/>
-          <p:cNvSpPr/>
-          <p:nvPr/>
-        </p:nvSpPr>
-        <p:spPr>
-          <a:xfrm>
-            <a:off x="6675120" y="1318320"/>
-            <a:ext cx="1645560" cy="197280"/>
-          </a:xfrm>
-          <a:prstGeom prst="rect">
-            <a:avLst/>
-          </a:prstGeom>
-          <a:noFill/>
-          <a:ln w="12700">
-            <a:noFill/>
-          </a:ln>
-        </p:spPr>
-        <p:style>
-          <a:lnRef idx="0"/>
-          <a:fillRef idx="0"/>
-          <a:effectRef idx="0"/>
-          <a:fontRef idx="minor"/>
-        </p:style>
-        <p:txBody>
-          <a:bodyPr lIns="0" rIns="0" tIns="0" bIns="0" anchor="ctr">
-            <a:spAutoFit/>
-          </a:bodyPr>
-          <a:p>
-            <a:pPr>
-              <a:lnSpc>
-                <a:spcPct val="100000"/>
-              </a:lnSpc>
-              <a:tabLst>
-                <a:tab algn="l" pos="0"/>
-              </a:tabLst>
-            </a:pPr>
-            <a:r>
-              <a:rPr b="1" lang="en-US" sz="1300" spc="-1" strike="noStrike">
+              <a:t>MLP regression</a:t>
+            </a:r>
+            <a:endParaRPr b="0" lang="en-US" sz="1600" spc="-1" strike="noStrike">
+              <a:solidFill>
+                <a:srgbClr val="000000"/>
+              </a:solidFill>
+              <a:latin typeface="Arial"/>
+            </a:endParaRPr>
+          </a:p>
+        </p:txBody>
+      </p:sp>
+      <p:sp>
+        <p:nvSpPr>
+          <p:cNvPr id="136" name="Text 8"/>
+          <p:cNvSpPr/>
+          <p:nvPr/>
+        </p:nvSpPr>
+        <p:spPr>
+          <a:xfrm>
+            <a:off x="3566160" y="3002760"/>
+            <a:ext cx="5027760" cy="212400"/>
+          </a:xfrm>
+          <a:prstGeom prst="rect">
+            <a:avLst/>
+          </a:prstGeom>
+          <a:noFill/>
+          <a:ln w="12700">
+            <a:noFill/>
+          </a:ln>
+        </p:spPr>
+        <p:style>
+          <a:lnRef idx="0"/>
+          <a:fillRef idx="0"/>
+          <a:effectRef idx="0"/>
+          <a:fontRef idx="minor"/>
+        </p:style>
+        <p:txBody>
+          <a:bodyPr lIns="0" rIns="0" tIns="0" bIns="0" anchor="ctr">
+            <a:spAutoFit/>
+          </a:bodyPr>
+          <a:p>
+            <a:pPr>
+              <a:lnSpc>
+                <a:spcPct val="100000"/>
+              </a:lnSpc>
+              <a:tabLst>
+                <a:tab algn="l" pos="0"/>
+              </a:tabLst>
+            </a:pPr>
+            <a:r>
+              <a:rPr b="0" lang="en-US" sz="1400" spc="-1" strike="noStrike">
+                <a:solidFill>
+                  <a:srgbClr val="ffffff"/>
+                </a:solidFill>
+                <a:latin typeface="Calibri"/>
+                <a:ea typeface="Calibri"/>
+              </a:rPr>
+              <a:t>Underfits; train already at chance</a:t>
+            </a:r>
+            <a:endParaRPr b="0" lang="en-US" sz="1400" spc="-1" strike="noStrike">
+              <a:solidFill>
+                <a:srgbClr val="000000"/>
+              </a:solidFill>
+              <a:latin typeface="Arial"/>
+            </a:endParaRPr>
+          </a:p>
+        </p:txBody>
+      </p:sp>
+      <p:sp>
+        <p:nvSpPr>
+          <p:cNvPr id="137" name="Text 9"/>
+          <p:cNvSpPr/>
+          <p:nvPr/>
+        </p:nvSpPr>
+        <p:spPr>
+          <a:xfrm>
+            <a:off x="502920" y="3719160"/>
+            <a:ext cx="2924640" cy="242640"/>
+          </a:xfrm>
+          <a:prstGeom prst="rect">
+            <a:avLst/>
+          </a:prstGeom>
+          <a:noFill/>
+          <a:ln w="12700">
+            <a:noFill/>
+          </a:ln>
+        </p:spPr>
+        <p:style>
+          <a:lnRef idx="0"/>
+          <a:fillRef idx="0"/>
+          <a:effectRef idx="0"/>
+          <a:fontRef idx="minor"/>
+        </p:style>
+        <p:txBody>
+          <a:bodyPr lIns="0" rIns="0" tIns="0" bIns="0" anchor="ctr">
+            <a:spAutoFit/>
+          </a:bodyPr>
+          <a:p>
+            <a:pPr>
+              <a:lnSpc>
+                <a:spcPct val="100000"/>
+              </a:lnSpc>
+              <a:tabLst>
+                <a:tab algn="l" pos="0"/>
+              </a:tabLst>
+            </a:pPr>
+            <a:r>
+              <a:rPr b="1" lang="en-US" sz="1600" spc="-1" strike="noStrike">
                 <a:solidFill>
                   <a:srgbClr val="2ee5ba"/>
                 </a:solidFill>
                 <a:latin typeface="Calibri"/>
                 <a:ea typeface="Calibri"/>
               </a:rPr>
-              <a:t>Median Rank</a:t>
-            </a:r>
-            <a:endParaRPr b="0" lang="en-US" sz="1300" spc="-1" strike="noStrike">
-              <a:solidFill>
-                <a:srgbClr val="000000"/>
-              </a:solidFill>
-              <a:latin typeface="Arial"/>
-            </a:endParaRPr>
-          </a:p>
-        </p:txBody>
-      </p:sp>
-      <p:sp>
-        <p:nvSpPr>
-          <p:cNvPr id="121" name="Text 7"/>
-          <p:cNvSpPr/>
-          <p:nvPr/>
-        </p:nvSpPr>
-        <p:spPr>
-          <a:xfrm>
-            <a:off x="502920" y="1722600"/>
-            <a:ext cx="2925720" cy="212400"/>
+              <a:t>Ridge (submitted)</a:t>
+            </a:r>
+            <a:endParaRPr b="0" lang="en-US" sz="1600" spc="-1" strike="noStrike">
+              <a:solidFill>
+                <a:srgbClr val="000000"/>
+              </a:solidFill>
+              <a:latin typeface="Arial"/>
+            </a:endParaRPr>
+          </a:p>
+        </p:txBody>
+      </p:sp>
+      <p:sp>
+        <p:nvSpPr>
+          <p:cNvPr id="138" name="Text 10"/>
+          <p:cNvSpPr/>
+          <p:nvPr/>
+        </p:nvSpPr>
+        <p:spPr>
+          <a:xfrm>
+            <a:off x="3566160" y="3780000"/>
+            <a:ext cx="5027760" cy="212400"/>
           </a:xfrm>
           <a:prstGeom prst="rect">
             <a:avLst/>
@@ -7050,7 +8050,7 @@
                 <a:latin typeface="Calibri"/>
                 <a:ea typeface="Calibri"/>
               </a:rPr>
-              <a:t>AlexNet features.3</a:t>
+              <a:t>Only method clearly above chance on test</a:t>
             </a:r>
             <a:endParaRPr b="0" lang="en-US" sz="1400" spc="-1" strike="noStrike">
               <a:solidFill>
@@ -7063,1097 +8063,14 @@
       </p:sp>
       <p:sp>
         <p:nvSpPr>
-          <p:cNvPr id="122" name="Text 8"/>
-          <p:cNvSpPr/>
-          <p:nvPr/>
-        </p:nvSpPr>
-        <p:spPr>
-          <a:xfrm>
-            <a:off x="3566160" y="1722600"/>
-            <a:ext cx="1462680" cy="212400"/>
-          </a:xfrm>
-          <a:prstGeom prst="rect">
-            <a:avLst/>
-          </a:prstGeom>
-          <a:noFill/>
-          <a:ln w="12700">
-            <a:noFill/>
-          </a:ln>
-        </p:spPr>
-        <p:style>
-          <a:lnRef idx="0"/>
-          <a:fillRef idx="0"/>
-          <a:effectRef idx="0"/>
-          <a:fontRef idx="minor"/>
-        </p:style>
-        <p:txBody>
-          <a:bodyPr lIns="0" rIns="0" tIns="0" bIns="0" anchor="ctr">
-            <a:spAutoFit/>
-          </a:bodyPr>
-          <a:p>
-            <a:pPr>
-              <a:lnSpc>
-                <a:spcPct val="100000"/>
-              </a:lnSpc>
-              <a:tabLst>
-                <a:tab algn="l" pos="0"/>
-              </a:tabLst>
-            </a:pPr>
-            <a:r>
-              <a:rPr b="0" lang="en-US" sz="1400" spc="-1" strike="noStrike">
-                <a:solidFill>
-                  <a:srgbClr val="ffffff"/>
-                </a:solidFill>
-                <a:latin typeface="Calibri"/>
-                <a:ea typeface="Calibri"/>
-              </a:rPr>
-              <a:t>3.9%</a:t>
-            </a:r>
-            <a:endParaRPr b="0" lang="en-US" sz="1400" spc="-1" strike="noStrike">
-              <a:solidFill>
-                <a:srgbClr val="000000"/>
-              </a:solidFill>
-              <a:latin typeface="Arial"/>
-            </a:endParaRPr>
-          </a:p>
-        </p:txBody>
-      </p:sp>
-      <p:sp>
-        <p:nvSpPr>
-          <p:cNvPr id="123" name="Text 9"/>
-          <p:cNvSpPr/>
-          <p:nvPr/>
-        </p:nvSpPr>
-        <p:spPr>
-          <a:xfrm>
-            <a:off x="5120640" y="1722600"/>
-            <a:ext cx="1462680" cy="212400"/>
-          </a:xfrm>
-          <a:prstGeom prst="rect">
-            <a:avLst/>
-          </a:prstGeom>
-          <a:noFill/>
-          <a:ln w="12700">
-            <a:noFill/>
-          </a:ln>
-        </p:spPr>
-        <p:style>
-          <a:lnRef idx="0"/>
-          <a:fillRef idx="0"/>
-          <a:effectRef idx="0"/>
-          <a:fontRef idx="minor"/>
-        </p:style>
-        <p:txBody>
-          <a:bodyPr lIns="0" rIns="0" tIns="0" bIns="0" anchor="ctr">
-            <a:spAutoFit/>
-          </a:bodyPr>
-          <a:p>
-            <a:pPr>
-              <a:lnSpc>
-                <a:spcPct val="100000"/>
-              </a:lnSpc>
-              <a:tabLst>
-                <a:tab algn="l" pos="0"/>
-              </a:tabLst>
-            </a:pPr>
-            <a:r>
-              <a:rPr b="0" lang="en-US" sz="1400" spc="-1" strike="noStrike">
-                <a:solidFill>
-                  <a:srgbClr val="ffffff"/>
-                </a:solidFill>
-                <a:latin typeface="Calibri"/>
-                <a:ea typeface="Calibri"/>
-              </a:rPr>
-              <a:t>11.8%</a:t>
-            </a:r>
-            <a:endParaRPr b="0" lang="en-US" sz="1400" spc="-1" strike="noStrike">
-              <a:solidFill>
-                <a:srgbClr val="000000"/>
-              </a:solidFill>
-              <a:latin typeface="Arial"/>
-            </a:endParaRPr>
-          </a:p>
-        </p:txBody>
-      </p:sp>
-      <p:sp>
-        <p:nvSpPr>
-          <p:cNvPr id="124" name="Text 10"/>
-          <p:cNvSpPr/>
-          <p:nvPr/>
-        </p:nvSpPr>
-        <p:spPr>
-          <a:xfrm>
-            <a:off x="6675120" y="1722600"/>
-            <a:ext cx="1645560" cy="212400"/>
-          </a:xfrm>
-          <a:prstGeom prst="rect">
-            <a:avLst/>
-          </a:prstGeom>
-          <a:noFill/>
-          <a:ln w="12700">
-            <a:noFill/>
-          </a:ln>
-        </p:spPr>
-        <p:style>
-          <a:lnRef idx="0"/>
-          <a:fillRef idx="0"/>
-          <a:effectRef idx="0"/>
-          <a:fontRef idx="minor"/>
-        </p:style>
-        <p:txBody>
-          <a:bodyPr lIns="0" rIns="0" tIns="0" bIns="0" anchor="ctr">
-            <a:spAutoFit/>
-          </a:bodyPr>
-          <a:p>
-            <a:pPr>
-              <a:lnSpc>
-                <a:spcPct val="100000"/>
-              </a:lnSpc>
-              <a:tabLst>
-                <a:tab algn="l" pos="0"/>
-              </a:tabLst>
-            </a:pPr>
-            <a:r>
-              <a:rPr b="0" lang="en-US" sz="1400" spc="-1" strike="noStrike">
-                <a:solidFill>
-                  <a:srgbClr val="ffffff"/>
-                </a:solidFill>
-                <a:latin typeface="Calibri"/>
-                <a:ea typeface="Calibri"/>
-              </a:rPr>
-              <a:t>25.5</a:t>
-            </a:r>
-            <a:endParaRPr b="0" lang="en-US" sz="1400" spc="-1" strike="noStrike">
-              <a:solidFill>
-                <a:srgbClr val="000000"/>
-              </a:solidFill>
-              <a:latin typeface="Arial"/>
-            </a:endParaRPr>
-          </a:p>
-        </p:txBody>
-      </p:sp>
-      <p:sp>
-        <p:nvSpPr>
-          <p:cNvPr id="125" name="Text 11"/>
-          <p:cNvSpPr/>
-          <p:nvPr/>
-        </p:nvSpPr>
-        <p:spPr>
-          <a:xfrm>
-            <a:off x="502920" y="2252880"/>
-            <a:ext cx="2925720" cy="212400"/>
-          </a:xfrm>
-          <a:prstGeom prst="rect">
-            <a:avLst/>
-          </a:prstGeom>
-          <a:noFill/>
-          <a:ln w="12700">
-            <a:noFill/>
-          </a:ln>
-        </p:spPr>
-        <p:style>
-          <a:lnRef idx="0"/>
-          <a:fillRef idx="0"/>
-          <a:effectRef idx="0"/>
-          <a:fontRef idx="minor"/>
-        </p:style>
-        <p:txBody>
-          <a:bodyPr lIns="0" rIns="0" tIns="0" bIns="0" anchor="ctr">
-            <a:spAutoFit/>
-          </a:bodyPr>
-          <a:p>
-            <a:pPr>
-              <a:lnSpc>
-                <a:spcPct val="100000"/>
-              </a:lnSpc>
-              <a:tabLst>
-                <a:tab algn="l" pos="0"/>
-              </a:tabLst>
-            </a:pPr>
-            <a:r>
-              <a:rPr b="0" lang="en-US" sz="1400" spc="-1" strike="noStrike">
-                <a:solidFill>
-                  <a:srgbClr val="ffffff"/>
-                </a:solidFill>
-                <a:latin typeface="Calibri"/>
-                <a:ea typeface="Calibri"/>
-              </a:rPr>
-              <a:t>DINO blocks.6</a:t>
-            </a:r>
-            <a:endParaRPr b="0" lang="en-US" sz="1400" spc="-1" strike="noStrike">
-              <a:solidFill>
-                <a:srgbClr val="000000"/>
-              </a:solidFill>
-              <a:latin typeface="Arial"/>
-            </a:endParaRPr>
-          </a:p>
-        </p:txBody>
-      </p:sp>
-      <p:sp>
-        <p:nvSpPr>
-          <p:cNvPr id="126" name="Text 12"/>
-          <p:cNvSpPr/>
-          <p:nvPr/>
-        </p:nvSpPr>
-        <p:spPr>
-          <a:xfrm>
-            <a:off x="3566160" y="2252880"/>
-            <a:ext cx="1462680" cy="212400"/>
-          </a:xfrm>
-          <a:prstGeom prst="rect">
-            <a:avLst/>
-          </a:prstGeom>
-          <a:noFill/>
-          <a:ln w="12700">
-            <a:noFill/>
-          </a:ln>
-        </p:spPr>
-        <p:style>
-          <a:lnRef idx="0"/>
-          <a:fillRef idx="0"/>
-          <a:effectRef idx="0"/>
-          <a:fontRef idx="minor"/>
-        </p:style>
-        <p:txBody>
-          <a:bodyPr lIns="0" rIns="0" tIns="0" bIns="0" anchor="ctr">
-            <a:spAutoFit/>
-          </a:bodyPr>
-          <a:p>
-            <a:pPr>
-              <a:lnSpc>
-                <a:spcPct val="100000"/>
-              </a:lnSpc>
-              <a:tabLst>
-                <a:tab algn="l" pos="0"/>
-              </a:tabLst>
-            </a:pPr>
-            <a:r>
-              <a:rPr b="0" lang="en-US" sz="1400" spc="-1" strike="noStrike">
-                <a:solidFill>
-                  <a:srgbClr val="ffffff"/>
-                </a:solidFill>
-                <a:latin typeface="Calibri"/>
-                <a:ea typeface="Calibri"/>
-              </a:rPr>
-              <a:t>4.9%</a:t>
-            </a:r>
-            <a:endParaRPr b="0" lang="en-US" sz="1400" spc="-1" strike="noStrike">
-              <a:solidFill>
-                <a:srgbClr val="000000"/>
-              </a:solidFill>
-              <a:latin typeface="Arial"/>
-            </a:endParaRPr>
-          </a:p>
-        </p:txBody>
-      </p:sp>
-      <p:sp>
-        <p:nvSpPr>
-          <p:cNvPr id="127" name="Text 13"/>
-          <p:cNvSpPr/>
-          <p:nvPr/>
-        </p:nvSpPr>
-        <p:spPr>
-          <a:xfrm>
-            <a:off x="5120640" y="2252880"/>
-            <a:ext cx="1462680" cy="212400"/>
-          </a:xfrm>
-          <a:prstGeom prst="rect">
-            <a:avLst/>
-          </a:prstGeom>
-          <a:noFill/>
-          <a:ln w="12700">
-            <a:noFill/>
-          </a:ln>
-        </p:spPr>
-        <p:style>
-          <a:lnRef idx="0"/>
-          <a:fillRef idx="0"/>
-          <a:effectRef idx="0"/>
-          <a:fontRef idx="minor"/>
-        </p:style>
-        <p:txBody>
-          <a:bodyPr lIns="0" rIns="0" tIns="0" bIns="0" anchor="ctr">
-            <a:spAutoFit/>
-          </a:bodyPr>
-          <a:p>
-            <a:pPr>
-              <a:lnSpc>
-                <a:spcPct val="100000"/>
-              </a:lnSpc>
-              <a:tabLst>
-                <a:tab algn="l" pos="0"/>
-              </a:tabLst>
-            </a:pPr>
-            <a:r>
-              <a:rPr b="0" lang="en-US" sz="1400" spc="-1" strike="noStrike">
-                <a:solidFill>
-                  <a:srgbClr val="ffffff"/>
-                </a:solidFill>
-                <a:latin typeface="Calibri"/>
-                <a:ea typeface="Calibri"/>
-              </a:rPr>
-              <a:t>30.4%</a:t>
-            </a:r>
-            <a:endParaRPr b="0" lang="en-US" sz="1400" spc="-1" strike="noStrike">
-              <a:solidFill>
-                <a:srgbClr val="000000"/>
-              </a:solidFill>
-              <a:latin typeface="Arial"/>
-            </a:endParaRPr>
-          </a:p>
-        </p:txBody>
-      </p:sp>
-      <p:sp>
-        <p:nvSpPr>
-          <p:cNvPr id="128" name="Text 14"/>
-          <p:cNvSpPr/>
-          <p:nvPr/>
-        </p:nvSpPr>
-        <p:spPr>
-          <a:xfrm>
-            <a:off x="6675120" y="2252880"/>
-            <a:ext cx="1645560" cy="212400"/>
-          </a:xfrm>
-          <a:prstGeom prst="rect">
-            <a:avLst/>
-          </a:prstGeom>
-          <a:noFill/>
-          <a:ln w="12700">
-            <a:noFill/>
-          </a:ln>
-        </p:spPr>
-        <p:style>
-          <a:lnRef idx="0"/>
-          <a:fillRef idx="0"/>
-          <a:effectRef idx="0"/>
-          <a:fontRef idx="minor"/>
-        </p:style>
-        <p:txBody>
-          <a:bodyPr lIns="0" rIns="0" tIns="0" bIns="0" anchor="ctr">
-            <a:spAutoFit/>
-          </a:bodyPr>
-          <a:p>
-            <a:pPr>
-              <a:lnSpc>
-                <a:spcPct val="100000"/>
-              </a:lnSpc>
-              <a:tabLst>
-                <a:tab algn="l" pos="0"/>
-              </a:tabLst>
-            </a:pPr>
-            <a:r>
-              <a:rPr b="0" lang="en-US" sz="1400" spc="-1" strike="noStrike">
-                <a:solidFill>
-                  <a:srgbClr val="ffffff"/>
-                </a:solidFill>
-                <a:latin typeface="Calibri"/>
-                <a:ea typeface="Calibri"/>
-              </a:rPr>
-              <a:t>13.0</a:t>
-            </a:r>
-            <a:endParaRPr b="0" lang="en-US" sz="1400" spc="-1" strike="noStrike">
-              <a:solidFill>
-                <a:srgbClr val="000000"/>
-              </a:solidFill>
-              <a:latin typeface="Arial"/>
-            </a:endParaRPr>
-          </a:p>
-        </p:txBody>
-      </p:sp>
-      <p:sp>
-        <p:nvSpPr>
-          <p:cNvPr id="129" name="Text 15"/>
-          <p:cNvSpPr/>
-          <p:nvPr/>
-        </p:nvSpPr>
-        <p:spPr>
-          <a:xfrm>
-            <a:off x="502920" y="2783160"/>
-            <a:ext cx="2925720" cy="212400"/>
-          </a:xfrm>
-          <a:prstGeom prst="rect">
-            <a:avLst/>
-          </a:prstGeom>
-          <a:noFill/>
-          <a:ln w="12700">
-            <a:noFill/>
-          </a:ln>
-        </p:spPr>
-        <p:style>
-          <a:lnRef idx="0"/>
-          <a:fillRef idx="0"/>
-          <a:effectRef idx="0"/>
-          <a:fontRef idx="minor"/>
-        </p:style>
-        <p:txBody>
-          <a:bodyPr lIns="0" rIns="0" tIns="0" bIns="0" anchor="ctr">
-            <a:spAutoFit/>
-          </a:bodyPr>
-          <a:p>
-            <a:pPr>
-              <a:lnSpc>
-                <a:spcPct val="100000"/>
-              </a:lnSpc>
-              <a:tabLst>
-                <a:tab algn="l" pos="0"/>
-              </a:tabLst>
-            </a:pPr>
-            <a:r>
-              <a:rPr b="0" lang="en-US" sz="1400" spc="-1" strike="noStrike">
-                <a:solidFill>
-                  <a:srgbClr val="ffffff"/>
-                </a:solidFill>
-                <a:latin typeface="Calibri"/>
-                <a:ea typeface="Calibri"/>
-              </a:rPr>
-              <a:t>CLIP resblocks.6</a:t>
-            </a:r>
-            <a:endParaRPr b="0" lang="en-US" sz="1400" spc="-1" strike="noStrike">
-              <a:solidFill>
-                <a:srgbClr val="000000"/>
-              </a:solidFill>
-              <a:latin typeface="Arial"/>
-            </a:endParaRPr>
-          </a:p>
-        </p:txBody>
-      </p:sp>
-      <p:sp>
-        <p:nvSpPr>
-          <p:cNvPr id="130" name="Text 16"/>
-          <p:cNvSpPr/>
-          <p:nvPr/>
-        </p:nvSpPr>
-        <p:spPr>
-          <a:xfrm>
-            <a:off x="3566160" y="2783160"/>
-            <a:ext cx="1462680" cy="212400"/>
-          </a:xfrm>
-          <a:prstGeom prst="rect">
-            <a:avLst/>
-          </a:prstGeom>
-          <a:noFill/>
-          <a:ln w="12700">
-            <a:noFill/>
-          </a:ln>
-        </p:spPr>
-        <p:style>
-          <a:lnRef idx="0"/>
-          <a:fillRef idx="0"/>
-          <a:effectRef idx="0"/>
-          <a:fontRef idx="minor"/>
-        </p:style>
-        <p:txBody>
-          <a:bodyPr lIns="0" rIns="0" tIns="0" bIns="0" anchor="ctr">
-            <a:spAutoFit/>
-          </a:bodyPr>
-          <a:p>
-            <a:pPr>
-              <a:lnSpc>
-                <a:spcPct val="100000"/>
-              </a:lnSpc>
-              <a:tabLst>
-                <a:tab algn="l" pos="0"/>
-              </a:tabLst>
-            </a:pPr>
-            <a:r>
-              <a:rPr b="0" lang="en-US" sz="1400" spc="-1" strike="noStrike">
-                <a:solidFill>
-                  <a:srgbClr val="ffffff"/>
-                </a:solidFill>
-                <a:latin typeface="Calibri"/>
-                <a:ea typeface="Calibri"/>
-              </a:rPr>
-              <a:t>3.9%</a:t>
-            </a:r>
-            <a:endParaRPr b="0" lang="en-US" sz="1400" spc="-1" strike="noStrike">
-              <a:solidFill>
-                <a:srgbClr val="000000"/>
-              </a:solidFill>
-              <a:latin typeface="Arial"/>
-            </a:endParaRPr>
-          </a:p>
-        </p:txBody>
-      </p:sp>
-      <p:sp>
-        <p:nvSpPr>
-          <p:cNvPr id="131" name="Text 17"/>
-          <p:cNvSpPr/>
-          <p:nvPr/>
-        </p:nvSpPr>
-        <p:spPr>
-          <a:xfrm>
-            <a:off x="5120640" y="2783160"/>
-            <a:ext cx="1462680" cy="212400"/>
-          </a:xfrm>
-          <a:prstGeom prst="rect">
-            <a:avLst/>
-          </a:prstGeom>
-          <a:noFill/>
-          <a:ln w="12700">
-            <a:noFill/>
-          </a:ln>
-        </p:spPr>
-        <p:style>
-          <a:lnRef idx="0"/>
-          <a:fillRef idx="0"/>
-          <a:effectRef idx="0"/>
-          <a:fontRef idx="minor"/>
-        </p:style>
-        <p:txBody>
-          <a:bodyPr lIns="0" rIns="0" tIns="0" bIns="0" anchor="ctr">
-            <a:spAutoFit/>
-          </a:bodyPr>
-          <a:p>
-            <a:pPr>
-              <a:lnSpc>
-                <a:spcPct val="100000"/>
-              </a:lnSpc>
-              <a:tabLst>
-                <a:tab algn="l" pos="0"/>
-              </a:tabLst>
-            </a:pPr>
-            <a:r>
-              <a:rPr b="0" lang="en-US" sz="1400" spc="-1" strike="noStrike">
-                <a:solidFill>
-                  <a:srgbClr val="ffffff"/>
-                </a:solidFill>
-                <a:latin typeface="Calibri"/>
-                <a:ea typeface="Calibri"/>
-              </a:rPr>
-              <a:t>16.7%</a:t>
-            </a:r>
-            <a:endParaRPr b="0" lang="en-US" sz="1400" spc="-1" strike="noStrike">
-              <a:solidFill>
-                <a:srgbClr val="000000"/>
-              </a:solidFill>
-              <a:latin typeface="Arial"/>
-            </a:endParaRPr>
-          </a:p>
-        </p:txBody>
-      </p:sp>
-      <p:sp>
-        <p:nvSpPr>
-          <p:cNvPr id="132" name="Text 18"/>
-          <p:cNvSpPr/>
-          <p:nvPr/>
-        </p:nvSpPr>
-        <p:spPr>
-          <a:xfrm>
-            <a:off x="6675120" y="2783160"/>
-            <a:ext cx="1645560" cy="212400"/>
-          </a:xfrm>
-          <a:prstGeom prst="rect">
-            <a:avLst/>
-          </a:prstGeom>
-          <a:noFill/>
-          <a:ln w="12700">
-            <a:noFill/>
-          </a:ln>
-        </p:spPr>
-        <p:style>
-          <a:lnRef idx="0"/>
-          <a:fillRef idx="0"/>
-          <a:effectRef idx="0"/>
-          <a:fontRef idx="minor"/>
-        </p:style>
-        <p:txBody>
-          <a:bodyPr lIns="0" rIns="0" tIns="0" bIns="0" anchor="ctr">
-            <a:spAutoFit/>
-          </a:bodyPr>
-          <a:p>
-            <a:pPr>
-              <a:lnSpc>
-                <a:spcPct val="100000"/>
-              </a:lnSpc>
-              <a:tabLst>
-                <a:tab algn="l" pos="0"/>
-              </a:tabLst>
-            </a:pPr>
-            <a:r>
-              <a:rPr b="0" lang="en-US" sz="1400" spc="-1" strike="noStrike">
-                <a:solidFill>
-                  <a:srgbClr val="ffffff"/>
-                </a:solidFill>
-                <a:latin typeface="Calibri"/>
-                <a:ea typeface="Calibri"/>
-              </a:rPr>
-              <a:t>17.0</a:t>
-            </a:r>
-            <a:endParaRPr b="0" lang="en-US" sz="1400" spc="-1" strike="noStrike">
-              <a:solidFill>
-                <a:srgbClr val="000000"/>
-              </a:solidFill>
-              <a:latin typeface="Arial"/>
-            </a:endParaRPr>
-          </a:p>
-        </p:txBody>
-      </p:sp>
-      <p:sp>
-        <p:nvSpPr>
-          <p:cNvPr id="133" name="Text 19"/>
-          <p:cNvSpPr/>
-          <p:nvPr/>
-        </p:nvSpPr>
-        <p:spPr>
-          <a:xfrm>
-            <a:off x="502920" y="3313800"/>
-            <a:ext cx="2925720" cy="212400"/>
-          </a:xfrm>
-          <a:prstGeom prst="rect">
-            <a:avLst/>
-          </a:prstGeom>
-          <a:noFill/>
-          <a:ln w="12700">
-            <a:noFill/>
-          </a:ln>
-        </p:spPr>
-        <p:style>
-          <a:lnRef idx="0"/>
-          <a:fillRef idx="0"/>
-          <a:effectRef idx="0"/>
-          <a:fontRef idx="minor"/>
-        </p:style>
-        <p:txBody>
-          <a:bodyPr lIns="0" rIns="0" tIns="0" bIns="0" anchor="ctr">
-            <a:spAutoFit/>
-          </a:bodyPr>
-          <a:p>
-            <a:pPr>
-              <a:lnSpc>
-                <a:spcPct val="100000"/>
-              </a:lnSpc>
-              <a:tabLst>
-                <a:tab algn="l" pos="0"/>
-              </a:tabLst>
-            </a:pPr>
-            <a:r>
-              <a:rPr b="0" lang="en-US" sz="1400" spc="-1" strike="noStrike">
-                <a:solidFill>
-                  <a:srgbClr val="ffffff"/>
-                </a:solidFill>
-                <a:latin typeface="Calibri"/>
-                <a:ea typeface="Calibri"/>
-              </a:rPr>
-              <a:t>CLIP resblocks.7</a:t>
-            </a:r>
-            <a:endParaRPr b="0" lang="en-US" sz="1400" spc="-1" strike="noStrike">
-              <a:solidFill>
-                <a:srgbClr val="000000"/>
-              </a:solidFill>
-              <a:latin typeface="Arial"/>
-            </a:endParaRPr>
-          </a:p>
-        </p:txBody>
-      </p:sp>
-      <p:sp>
-        <p:nvSpPr>
-          <p:cNvPr id="134" name="Text 20"/>
-          <p:cNvSpPr/>
-          <p:nvPr/>
-        </p:nvSpPr>
-        <p:spPr>
-          <a:xfrm>
-            <a:off x="3566160" y="3313800"/>
-            <a:ext cx="1462680" cy="212400"/>
-          </a:xfrm>
-          <a:prstGeom prst="rect">
-            <a:avLst/>
-          </a:prstGeom>
-          <a:noFill/>
-          <a:ln w="12700">
-            <a:noFill/>
-          </a:ln>
-        </p:spPr>
-        <p:style>
-          <a:lnRef idx="0"/>
-          <a:fillRef idx="0"/>
-          <a:effectRef idx="0"/>
-          <a:fontRef idx="minor"/>
-        </p:style>
-        <p:txBody>
-          <a:bodyPr lIns="0" rIns="0" tIns="0" bIns="0" anchor="ctr">
-            <a:spAutoFit/>
-          </a:bodyPr>
-          <a:p>
-            <a:pPr>
-              <a:lnSpc>
-                <a:spcPct val="100000"/>
-              </a:lnSpc>
-              <a:tabLst>
-                <a:tab algn="l" pos="0"/>
-              </a:tabLst>
-            </a:pPr>
-            <a:r>
-              <a:rPr b="0" lang="en-US" sz="1400" spc="-1" strike="noStrike">
-                <a:solidFill>
-                  <a:srgbClr val="ffffff"/>
-                </a:solidFill>
-                <a:latin typeface="Calibri"/>
-                <a:ea typeface="Calibri"/>
-              </a:rPr>
-              <a:t>4.9%</a:t>
-            </a:r>
-            <a:endParaRPr b="0" lang="en-US" sz="1400" spc="-1" strike="noStrike">
-              <a:solidFill>
-                <a:srgbClr val="000000"/>
-              </a:solidFill>
-              <a:latin typeface="Arial"/>
-            </a:endParaRPr>
-          </a:p>
-        </p:txBody>
-      </p:sp>
-      <p:sp>
-        <p:nvSpPr>
-          <p:cNvPr id="135" name="Text 21"/>
-          <p:cNvSpPr/>
-          <p:nvPr/>
-        </p:nvSpPr>
-        <p:spPr>
-          <a:xfrm>
-            <a:off x="5120640" y="3313800"/>
-            <a:ext cx="1462680" cy="212400"/>
-          </a:xfrm>
-          <a:prstGeom prst="rect">
-            <a:avLst/>
-          </a:prstGeom>
-          <a:noFill/>
-          <a:ln w="12700">
-            <a:noFill/>
-          </a:ln>
-        </p:spPr>
-        <p:style>
-          <a:lnRef idx="0"/>
-          <a:fillRef idx="0"/>
-          <a:effectRef idx="0"/>
-          <a:fontRef idx="minor"/>
-        </p:style>
-        <p:txBody>
-          <a:bodyPr lIns="0" rIns="0" tIns="0" bIns="0" anchor="ctr">
-            <a:spAutoFit/>
-          </a:bodyPr>
-          <a:p>
-            <a:pPr>
-              <a:lnSpc>
-                <a:spcPct val="100000"/>
-              </a:lnSpc>
-              <a:tabLst>
-                <a:tab algn="l" pos="0"/>
-              </a:tabLst>
-            </a:pPr>
-            <a:r>
-              <a:rPr b="0" lang="en-US" sz="1400" spc="-1" strike="noStrike">
-                <a:solidFill>
-                  <a:srgbClr val="ffffff"/>
-                </a:solidFill>
-                <a:latin typeface="Calibri"/>
-                <a:ea typeface="Calibri"/>
-              </a:rPr>
-              <a:t>21.6%</a:t>
-            </a:r>
-            <a:endParaRPr b="0" lang="en-US" sz="1400" spc="-1" strike="noStrike">
-              <a:solidFill>
-                <a:srgbClr val="000000"/>
-              </a:solidFill>
-              <a:latin typeface="Arial"/>
-            </a:endParaRPr>
-          </a:p>
-        </p:txBody>
-      </p:sp>
-      <p:sp>
-        <p:nvSpPr>
-          <p:cNvPr id="136" name="Text 22"/>
-          <p:cNvSpPr/>
-          <p:nvPr/>
-        </p:nvSpPr>
-        <p:spPr>
-          <a:xfrm>
-            <a:off x="6675120" y="3313800"/>
-            <a:ext cx="1645560" cy="212400"/>
-          </a:xfrm>
-          <a:prstGeom prst="rect">
-            <a:avLst/>
-          </a:prstGeom>
-          <a:noFill/>
-          <a:ln w="12700">
-            <a:noFill/>
-          </a:ln>
-        </p:spPr>
-        <p:style>
-          <a:lnRef idx="0"/>
-          <a:fillRef idx="0"/>
-          <a:effectRef idx="0"/>
-          <a:fontRef idx="minor"/>
-        </p:style>
-        <p:txBody>
-          <a:bodyPr lIns="0" rIns="0" tIns="0" bIns="0" anchor="ctr">
-            <a:spAutoFit/>
-          </a:bodyPr>
-          <a:p>
-            <a:pPr>
-              <a:lnSpc>
-                <a:spcPct val="100000"/>
-              </a:lnSpc>
-              <a:tabLst>
-                <a:tab algn="l" pos="0"/>
-              </a:tabLst>
-            </a:pPr>
-            <a:r>
-              <a:rPr b="0" lang="en-US" sz="1400" spc="-1" strike="noStrike">
-                <a:solidFill>
-                  <a:srgbClr val="ffffff"/>
-                </a:solidFill>
-                <a:latin typeface="Calibri"/>
-                <a:ea typeface="Calibri"/>
-              </a:rPr>
-              <a:t>14.0</a:t>
-            </a:r>
-            <a:endParaRPr b="0" lang="en-US" sz="1400" spc="-1" strike="noStrike">
-              <a:solidFill>
-                <a:srgbClr val="000000"/>
-              </a:solidFill>
-              <a:latin typeface="Arial"/>
-            </a:endParaRPr>
-          </a:p>
-        </p:txBody>
-      </p:sp>
-      <p:sp>
-        <p:nvSpPr>
-          <p:cNvPr id="137" name="Text 23"/>
-          <p:cNvSpPr/>
-          <p:nvPr/>
-        </p:nvSpPr>
-        <p:spPr>
-          <a:xfrm>
-            <a:off x="502920" y="3844080"/>
-            <a:ext cx="2925720" cy="212400"/>
-          </a:xfrm>
-          <a:prstGeom prst="rect">
-            <a:avLst/>
-          </a:prstGeom>
-          <a:noFill/>
-          <a:ln w="12700">
-            <a:noFill/>
-          </a:ln>
-        </p:spPr>
-        <p:style>
-          <a:lnRef idx="0"/>
-          <a:fillRef idx="0"/>
-          <a:effectRef idx="0"/>
-          <a:fontRef idx="minor"/>
-        </p:style>
-        <p:txBody>
-          <a:bodyPr lIns="0" rIns="0" tIns="0" bIns="0" anchor="ctr">
-            <a:spAutoFit/>
-          </a:bodyPr>
-          <a:p>
-            <a:pPr>
-              <a:lnSpc>
-                <a:spcPct val="100000"/>
-              </a:lnSpc>
-              <a:tabLst>
-                <a:tab algn="l" pos="0"/>
-              </a:tabLst>
-            </a:pPr>
-            <a:r>
-              <a:rPr b="0" lang="en-US" sz="1400" spc="-1" strike="noStrike">
-                <a:solidFill>
-                  <a:srgbClr val="ffffff"/>
-                </a:solidFill>
-                <a:latin typeface="Calibri"/>
-                <a:ea typeface="Calibri"/>
-              </a:rPr>
-              <a:t>Ensemble (submitted)</a:t>
-            </a:r>
-            <a:endParaRPr b="0" lang="en-US" sz="1400" spc="-1" strike="noStrike">
-              <a:solidFill>
-                <a:srgbClr val="000000"/>
-              </a:solidFill>
-              <a:latin typeface="Arial"/>
-            </a:endParaRPr>
-          </a:p>
-        </p:txBody>
-      </p:sp>
-      <p:sp>
-        <p:nvSpPr>
-          <p:cNvPr id="138" name="Text 24"/>
-          <p:cNvSpPr/>
-          <p:nvPr/>
-        </p:nvSpPr>
-        <p:spPr>
-          <a:xfrm>
-            <a:off x="3566160" y="3844080"/>
-            <a:ext cx="1462680" cy="212400"/>
-          </a:xfrm>
-          <a:prstGeom prst="rect">
-            <a:avLst/>
-          </a:prstGeom>
-          <a:noFill/>
-          <a:ln w="12700">
-            <a:noFill/>
-          </a:ln>
-        </p:spPr>
-        <p:style>
-          <a:lnRef idx="0"/>
-          <a:fillRef idx="0"/>
-          <a:effectRef idx="0"/>
-          <a:fontRef idx="minor"/>
-        </p:style>
-        <p:txBody>
-          <a:bodyPr lIns="0" rIns="0" tIns="0" bIns="0" anchor="ctr">
-            <a:spAutoFit/>
-          </a:bodyPr>
-          <a:p>
-            <a:pPr>
-              <a:lnSpc>
-                <a:spcPct val="100000"/>
-              </a:lnSpc>
-              <a:tabLst>
-                <a:tab algn="l" pos="0"/>
-              </a:tabLst>
-            </a:pPr>
-            <a:r>
-              <a:rPr b="0" lang="en-US" sz="1400" spc="-1" strike="noStrike">
-                <a:solidFill>
-                  <a:srgbClr val="ffffff"/>
-                </a:solidFill>
-                <a:latin typeface="Calibri"/>
-                <a:ea typeface="Calibri"/>
-              </a:rPr>
-              <a:t>5.9%</a:t>
-            </a:r>
-            <a:endParaRPr b="0" lang="en-US" sz="1400" spc="-1" strike="noStrike">
-              <a:solidFill>
-                <a:srgbClr val="000000"/>
-              </a:solidFill>
-              <a:latin typeface="Arial"/>
-            </a:endParaRPr>
-          </a:p>
-        </p:txBody>
-      </p:sp>
-      <p:sp>
-        <p:nvSpPr>
-          <p:cNvPr id="139" name="Text 25"/>
-          <p:cNvSpPr/>
-          <p:nvPr/>
-        </p:nvSpPr>
-        <p:spPr>
-          <a:xfrm>
-            <a:off x="5120640" y="3844080"/>
-            <a:ext cx="1462680" cy="212400"/>
-          </a:xfrm>
-          <a:prstGeom prst="rect">
-            <a:avLst/>
-          </a:prstGeom>
-          <a:noFill/>
-          <a:ln w="12700">
-            <a:noFill/>
-          </a:ln>
-        </p:spPr>
-        <p:style>
-          <a:lnRef idx="0"/>
-          <a:fillRef idx="0"/>
-          <a:effectRef idx="0"/>
-          <a:fontRef idx="minor"/>
-        </p:style>
-        <p:txBody>
-          <a:bodyPr lIns="0" rIns="0" tIns="0" bIns="0" anchor="ctr">
-            <a:spAutoFit/>
-          </a:bodyPr>
-          <a:p>
-            <a:pPr>
-              <a:lnSpc>
-                <a:spcPct val="100000"/>
-              </a:lnSpc>
-              <a:tabLst>
-                <a:tab algn="l" pos="0"/>
-              </a:tabLst>
-            </a:pPr>
-            <a:r>
-              <a:rPr b="0" lang="en-US" sz="1400" spc="-1" strike="noStrike">
-                <a:solidFill>
-                  <a:srgbClr val="ffffff"/>
-                </a:solidFill>
-                <a:latin typeface="Calibri"/>
-                <a:ea typeface="Calibri"/>
-              </a:rPr>
-              <a:t>26.5%</a:t>
-            </a:r>
-            <a:endParaRPr b="0" lang="en-US" sz="1400" spc="-1" strike="noStrike">
-              <a:solidFill>
-                <a:srgbClr val="000000"/>
-              </a:solidFill>
-              <a:latin typeface="Arial"/>
-            </a:endParaRPr>
-          </a:p>
-        </p:txBody>
-      </p:sp>
-      <p:sp>
-        <p:nvSpPr>
-          <p:cNvPr id="140" name="Text 26"/>
-          <p:cNvSpPr/>
-          <p:nvPr/>
-        </p:nvSpPr>
-        <p:spPr>
-          <a:xfrm>
-            <a:off x="6675120" y="3844080"/>
-            <a:ext cx="1645560" cy="212400"/>
-          </a:xfrm>
-          <a:prstGeom prst="rect">
-            <a:avLst/>
-          </a:prstGeom>
-          <a:noFill/>
-          <a:ln w="12700">
-            <a:noFill/>
-          </a:ln>
-        </p:spPr>
-        <p:style>
-          <a:lnRef idx="0"/>
-          <a:fillRef idx="0"/>
-          <a:effectRef idx="0"/>
-          <a:fontRef idx="minor"/>
-        </p:style>
-        <p:txBody>
-          <a:bodyPr lIns="0" rIns="0" tIns="0" bIns="0" anchor="ctr">
-            <a:spAutoFit/>
-          </a:bodyPr>
-          <a:p>
-            <a:pPr>
-              <a:lnSpc>
-                <a:spcPct val="100000"/>
-              </a:lnSpc>
-              <a:tabLst>
-                <a:tab algn="l" pos="0"/>
-              </a:tabLst>
-            </a:pPr>
-            <a:r>
-              <a:rPr b="0" lang="en-US" sz="1400" spc="-1" strike="noStrike">
-                <a:solidFill>
-                  <a:srgbClr val="ffffff"/>
-                </a:solidFill>
-                <a:latin typeface="Calibri"/>
-                <a:ea typeface="Calibri"/>
-              </a:rPr>
-              <a:t>14.0</a:t>
-            </a:r>
-            <a:endParaRPr b="0" lang="en-US" sz="1400" spc="-1" strike="noStrike">
-              <a:solidFill>
-                <a:srgbClr val="000000"/>
-              </a:solidFill>
-              <a:latin typeface="Arial"/>
-            </a:endParaRPr>
-          </a:p>
-        </p:txBody>
-      </p:sp>
-      <p:sp>
-        <p:nvSpPr>
-          <p:cNvPr id="141" name="Shape 27"/>
+          <p:cNvPr id="139" name="Shape 11"/>
           <p:cNvSpPr/>
           <p:nvPr/>
         </p:nvSpPr>
         <p:spPr>
           <a:xfrm>
             <a:off x="0" y="4800600"/>
-            <a:ext cx="9143640" cy="342720"/>
+            <a:ext cx="9142560" cy="341640"/>
           </a:xfrm>
           <a:prstGeom prst="rect">
             <a:avLst/>
@@ -8198,14 +8115,14 @@
       </p:sp>
       <p:sp>
         <p:nvSpPr>
-          <p:cNvPr id="142" name="Text 28"/>
+          <p:cNvPr id="140" name="Text 12"/>
           <p:cNvSpPr/>
           <p:nvPr/>
         </p:nvSpPr>
         <p:spPr>
           <a:xfrm>
             <a:off x="365760" y="4884840"/>
-            <a:ext cx="6857640" cy="151560"/>
+            <a:ext cx="6856560" cy="151560"/>
           </a:xfrm>
           <a:prstGeom prst="rect">
             <a:avLst/>
@@ -8255,14 +8172,14 @@
       </p:sp>
       <p:sp>
         <p:nvSpPr>
-          <p:cNvPr id="143" name="Text 29"/>
+          <p:cNvPr id="141" name="Text 13"/>
           <p:cNvSpPr/>
           <p:nvPr/>
         </p:nvSpPr>
         <p:spPr>
           <a:xfrm>
             <a:off x="8412480" y="4884840"/>
-            <a:ext cx="456840" cy="151560"/>
+            <a:ext cx="455760" cy="151560"/>
           </a:xfrm>
           <a:prstGeom prst="rect">
             <a:avLst/>
@@ -8299,7 +8216,7 @@
                 <a:latin typeface="Calibri"/>
                 <a:ea typeface="Calibri"/>
               </a:rPr>
-              <a:t>6</a:t>
+              <a:t>4</a:t>
             </a:r>
             <a:endParaRPr b="0" lang="en-US" sz="1000" spc="-1" strike="noStrike">
               <a:solidFill>
@@ -8342,7 +8259,7 @@
       </p:grpSpPr>
       <p:pic>
         <p:nvPicPr>
-          <p:cNvPr id="144" name="Image 0" descr="Image 0"/>
+          <p:cNvPr id="142" name="Image 0" descr="Image 0"/>
           <p:cNvPicPr/>
           <p:nvPr/>
         </p:nvPicPr>
@@ -8353,7 +8270,7 @@
         <p:spPr>
           <a:xfrm>
             <a:off x="0" y="0"/>
-            <a:ext cx="9143640" cy="5143320"/>
+            <a:ext cx="9142560" cy="5142240"/>
           </a:xfrm>
           <a:prstGeom prst="rect">
             <a:avLst/>
@@ -8365,14 +8282,14 @@
       </p:pic>
       <p:sp>
         <p:nvSpPr>
-          <p:cNvPr id="145" name="Shape 0"/>
+          <p:cNvPr id="143" name="Shape 0"/>
           <p:cNvSpPr/>
           <p:nvPr/>
         </p:nvSpPr>
         <p:spPr>
           <a:xfrm>
             <a:off x="320040" y="1051560"/>
-            <a:ext cx="8503560" cy="3611520"/>
+            <a:ext cx="8502480" cy="3610440"/>
           </a:xfrm>
           <a:prstGeom prst="roundRect">
             <a:avLst>
@@ -8419,51 +8336,51 @@
       </p:sp>
       <p:sp>
         <p:nvSpPr>
-          <p:cNvPr id="146" name="Text 1"/>
+          <p:cNvPr id="144" name="Text 1"/>
           <p:cNvSpPr/>
           <p:nvPr/>
         </p:nvSpPr>
         <p:spPr>
           <a:xfrm>
             <a:off x="411480" y="212040"/>
-            <a:ext cx="8229240" cy="197280"/>
-          </a:xfrm>
-          <a:prstGeom prst="rect">
-            <a:avLst/>
-          </a:prstGeom>
-          <a:noFill/>
-          <a:ln w="12700">
-            <a:noFill/>
-          </a:ln>
-        </p:spPr>
-        <p:style>
-          <a:lnRef idx="0"/>
-          <a:fillRef idx="0"/>
-          <a:effectRef idx="0"/>
-          <a:fontRef idx="minor"/>
-        </p:style>
-        <p:txBody>
-          <a:bodyPr lIns="0" rIns="0" tIns="0" bIns="0" anchor="ctr">
-            <a:spAutoFit/>
-          </a:bodyPr>
-          <a:p>
-            <a:pPr>
-              <a:lnSpc>
-                <a:spcPct val="100000"/>
-              </a:lnSpc>
-              <a:tabLst>
-                <a:tab algn="l" pos="0"/>
-              </a:tabLst>
-            </a:pPr>
-            <a:r>
-              <a:rPr b="1" lang="en-US" sz="1300" spc="398" strike="noStrike">
+            <a:ext cx="8228160" cy="197280"/>
+          </a:xfrm>
+          <a:prstGeom prst="rect">
+            <a:avLst/>
+          </a:prstGeom>
+          <a:noFill/>
+          <a:ln w="12700">
+            <a:noFill/>
+          </a:ln>
+        </p:spPr>
+        <p:style>
+          <a:lnRef idx="0"/>
+          <a:fillRef idx="0"/>
+          <a:effectRef idx="0"/>
+          <a:fontRef idx="minor"/>
+        </p:style>
+        <p:txBody>
+          <a:bodyPr lIns="0" rIns="0" tIns="0" bIns="0" anchor="ctr">
+            <a:spAutoFit/>
+          </a:bodyPr>
+          <a:p>
+            <a:pPr>
+              <a:lnSpc>
+                <a:spcPct val="100000"/>
+              </a:lnSpc>
+              <a:tabLst>
+                <a:tab algn="l" pos="0"/>
+              </a:tabLst>
+            </a:pPr>
+            <a:r>
+              <a:rPr b="1" lang="en-US" sz="1300" spc="389" strike="noStrike">
                 <a:solidFill>
                   <a:srgbClr val="2ee5ba"/>
                 </a:solidFill>
                 <a:latin typeface="Calibri"/>
                 <a:ea typeface="Calibri"/>
               </a:rPr>
-              <a:t>OTHER APPROACHES</a:t>
+              <a:t>KEY TAKEAWAYS</a:t>
             </a:r>
             <a:endParaRPr b="0" lang="en-US" sz="1300" spc="-1" strike="noStrike">
               <a:solidFill>
@@ -8476,14 +8393,14 @@
       </p:sp>
       <p:sp>
         <p:nvSpPr>
-          <p:cNvPr id="147" name="Text 2"/>
+          <p:cNvPr id="145" name="Text 2"/>
           <p:cNvSpPr/>
           <p:nvPr/>
         </p:nvSpPr>
         <p:spPr>
           <a:xfrm>
             <a:off x="411480" y="545760"/>
-            <a:ext cx="8320680" cy="425880"/>
+            <a:ext cx="8319600" cy="425880"/>
           </a:xfrm>
           <a:prstGeom prst="rect">
             <a:avLst/>
@@ -8520,7 +8437,7 @@
                 <a:latin typeface="Calibri"/>
                 <a:ea typeface="Calibri"/>
               </a:rPr>
-              <a:t>Why Ridge on raw EEG won</a:t>
+              <a:t>What we learned</a:t>
             </a:r>
             <a:endParaRPr b="0" lang="en-US" sz="2800" spc="-1" strike="noStrike">
               <a:solidFill>
@@ -8533,470 +8450,282 @@
       </p:sp>
       <p:sp>
         <p:nvSpPr>
-          <p:cNvPr id="148" name="Text 3"/>
-          <p:cNvSpPr/>
-          <p:nvPr/>
-        </p:nvSpPr>
-        <p:spPr>
-          <a:xfrm>
-            <a:off x="502920" y="1387440"/>
-            <a:ext cx="2925720" cy="242640"/>
-          </a:xfrm>
-          <a:prstGeom prst="rect">
-            <a:avLst/>
-          </a:prstGeom>
-          <a:noFill/>
-          <a:ln w="12700">
-            <a:noFill/>
-          </a:ln>
-        </p:spPr>
-        <p:style>
-          <a:lnRef idx="0"/>
-          <a:fillRef idx="0"/>
-          <a:effectRef idx="0"/>
-          <a:fontRef idx="minor"/>
-        </p:style>
-        <p:txBody>
-          <a:bodyPr lIns="0" rIns="0" tIns="0" bIns="0" anchor="ctr">
-            <a:spAutoFit/>
-          </a:bodyPr>
-          <a:p>
-            <a:pPr>
-              <a:lnSpc>
-                <a:spcPct val="100000"/>
-              </a:lnSpc>
-              <a:tabLst>
-                <a:tab algn="l" pos="0"/>
-              </a:tabLst>
-            </a:pPr>
-            <a:r>
-              <a:rPr b="1" lang="en-US" sz="1600" spc="-1" strike="noStrike">
-                <a:solidFill>
-                  <a:srgbClr val="2ee5ba"/>
-                </a:solidFill>
-                <a:latin typeface="Calibri"/>
-                <a:ea typeface="Calibri"/>
-              </a:rPr>
-              <a:t>CCA</a:t>
-            </a:r>
-            <a:endParaRPr b="0" lang="en-US" sz="1600" spc="-1" strike="noStrike">
-              <a:solidFill>
-                <a:srgbClr val="000000"/>
-              </a:solidFill>
-              <a:latin typeface="Arial"/>
-            </a:endParaRPr>
-          </a:p>
-        </p:txBody>
-      </p:sp>
-      <p:sp>
-        <p:nvSpPr>
-          <p:cNvPr id="149" name="Text 4"/>
-          <p:cNvSpPr/>
-          <p:nvPr/>
-        </p:nvSpPr>
-        <p:spPr>
-          <a:xfrm>
-            <a:off x="3566160" y="1448280"/>
-            <a:ext cx="5028840" cy="212400"/>
-          </a:xfrm>
-          <a:prstGeom prst="rect">
-            <a:avLst/>
-          </a:prstGeom>
-          <a:noFill/>
-          <a:ln w="12700">
-            <a:noFill/>
-          </a:ln>
-        </p:spPr>
-        <p:style>
-          <a:lnRef idx="0"/>
-          <a:fillRef idx="0"/>
-          <a:effectRef idx="0"/>
-          <a:fontRef idx="minor"/>
-        </p:style>
-        <p:txBody>
-          <a:bodyPr lIns="0" rIns="0" tIns="0" bIns="0" anchor="ctr">
-            <a:spAutoFit/>
-          </a:bodyPr>
-          <a:p>
-            <a:pPr>
-              <a:lnSpc>
-                <a:spcPct val="100000"/>
-              </a:lnSpc>
-              <a:tabLst>
-                <a:tab algn="l" pos="0"/>
-              </a:tabLst>
-            </a:pPr>
-            <a:r>
-              <a:rPr b="0" lang="en-US" sz="1400" spc="-1" strike="noStrike">
+          <p:cNvPr id="146" name="Text 3"/>
+          <p:cNvSpPr/>
+          <p:nvPr/>
+        </p:nvSpPr>
+        <p:spPr>
+          <a:xfrm>
+            <a:off x="502920" y="1439640"/>
+            <a:ext cx="8045280" cy="227880"/>
+          </a:xfrm>
+          <a:prstGeom prst="rect">
+            <a:avLst/>
+          </a:prstGeom>
+          <a:noFill/>
+          <a:ln w="12700">
+            <a:noFill/>
+          </a:ln>
+        </p:spPr>
+        <p:style>
+          <a:lnRef idx="0"/>
+          <a:fillRef idx="0"/>
+          <a:effectRef idx="0"/>
+          <a:fontRef idx="minor"/>
+        </p:style>
+        <p:txBody>
+          <a:bodyPr lIns="0" rIns="0" tIns="0" bIns="0" anchor="ctr">
+            <a:spAutoFit/>
+          </a:bodyPr>
+          <a:p>
+            <a:pPr>
+              <a:lnSpc>
+                <a:spcPct val="100000"/>
+              </a:lnSpc>
+              <a:tabLst>
+                <a:tab algn="l" pos="0"/>
+              </a:tabLst>
+            </a:pPr>
+            <a:r>
+              <a:rPr b="0" lang="en-US" sz="1500" spc="-1" strike="noStrike">
                 <a:solidFill>
                   <a:srgbClr val="ffffff"/>
                 </a:solidFill>
                 <a:latin typeface="Calibri"/>
                 <a:ea typeface="Calibri"/>
               </a:rPr>
-              <a:t>100% train top-1, but test at chance (median rank ~50)</a:t>
-            </a:r>
-            <a:endParaRPr b="0" lang="en-US" sz="1400" spc="-1" strike="noStrike">
-              <a:solidFill>
-                <a:srgbClr val="000000"/>
-              </a:solidFill>
-              <a:latin typeface="Arial"/>
-            </a:endParaRPr>
-          </a:p>
-        </p:txBody>
-      </p:sp>
-      <p:sp>
-        <p:nvSpPr>
-          <p:cNvPr id="150" name="Text 5"/>
-          <p:cNvSpPr/>
-          <p:nvPr/>
-        </p:nvSpPr>
-        <p:spPr>
-          <a:xfrm>
-            <a:off x="502920" y="2164680"/>
-            <a:ext cx="2925720" cy="242640"/>
-          </a:xfrm>
-          <a:prstGeom prst="rect">
-            <a:avLst/>
-          </a:prstGeom>
-          <a:noFill/>
-          <a:ln w="12700">
-            <a:noFill/>
-          </a:ln>
-        </p:spPr>
-        <p:style>
-          <a:lnRef idx="0"/>
-          <a:fillRef idx="0"/>
-          <a:effectRef idx="0"/>
-          <a:fontRef idx="minor"/>
-        </p:style>
-        <p:txBody>
-          <a:bodyPr lIns="0" rIns="0" tIns="0" bIns="0" anchor="ctr">
-            <a:spAutoFit/>
-          </a:bodyPr>
-          <a:p>
-            <a:pPr>
-              <a:lnSpc>
-                <a:spcPct val="100000"/>
-              </a:lnSpc>
-              <a:tabLst>
-                <a:tab algn="l" pos="0"/>
-              </a:tabLst>
-            </a:pPr>
-            <a:r>
-              <a:rPr b="1" lang="en-US" sz="1600" spc="-1" strike="noStrike">
-                <a:solidFill>
-                  <a:srgbClr val="2ee5ba"/>
-                </a:solidFill>
-                <a:latin typeface="Calibri"/>
-                <a:ea typeface="Calibri"/>
-              </a:rPr>
-              <a:t>CLIP-style contrastive</a:t>
-            </a:r>
-            <a:endParaRPr b="0" lang="en-US" sz="1600" spc="-1" strike="noStrike">
-              <a:solidFill>
-                <a:srgbClr val="000000"/>
-              </a:solidFill>
-              <a:latin typeface="Arial"/>
-            </a:endParaRPr>
-          </a:p>
-        </p:txBody>
-      </p:sp>
-      <p:sp>
-        <p:nvSpPr>
-          <p:cNvPr id="151" name="Text 6"/>
-          <p:cNvSpPr/>
-          <p:nvPr/>
-        </p:nvSpPr>
-        <p:spPr>
-          <a:xfrm>
-            <a:off x="3566160" y="2225520"/>
-            <a:ext cx="5028840" cy="212400"/>
-          </a:xfrm>
-          <a:prstGeom prst="rect">
-            <a:avLst/>
-          </a:prstGeom>
-          <a:noFill/>
-          <a:ln w="12700">
-            <a:noFill/>
-          </a:ln>
-        </p:spPr>
-        <p:style>
-          <a:lnRef idx="0"/>
-          <a:fillRef idx="0"/>
-          <a:effectRef idx="0"/>
-          <a:fontRef idx="minor"/>
-        </p:style>
-        <p:txBody>
-          <a:bodyPr lIns="0" rIns="0" tIns="0" bIns="0" anchor="ctr">
-            <a:spAutoFit/>
-          </a:bodyPr>
-          <a:p>
-            <a:pPr>
-              <a:lnSpc>
-                <a:spcPct val="100000"/>
-              </a:lnSpc>
-              <a:tabLst>
-                <a:tab algn="l" pos="0"/>
-              </a:tabLst>
-            </a:pPr>
-            <a:r>
-              <a:rPr b="0" lang="en-US" sz="1400" spc="-1" strike="noStrike">
+              <a:t>▸  </a:t>
+            </a:r>
+            <a:r>
+              <a:rPr b="0" lang="en-US" sz="1500" spc="-1" strike="noStrike">
                 <a:solidFill>
                   <a:srgbClr val="ffffff"/>
                 </a:solidFill>
                 <a:latin typeface="Calibri"/>
                 <a:ea typeface="Calibri"/>
               </a:rPr>
-              <a:t>Heavy overfitting — memorizes training pairs</a:t>
-            </a:r>
-            <a:endParaRPr b="0" lang="en-US" sz="1400" spc="-1" strike="noStrike">
-              <a:solidFill>
-                <a:srgbClr val="000000"/>
-              </a:solidFill>
-              <a:latin typeface="Arial"/>
-            </a:endParaRPr>
-          </a:p>
-        </p:txBody>
-      </p:sp>
-      <p:sp>
-        <p:nvSpPr>
-          <p:cNvPr id="152" name="Text 7"/>
-          <p:cNvSpPr/>
-          <p:nvPr/>
-        </p:nvSpPr>
-        <p:spPr>
-          <a:xfrm>
-            <a:off x="502920" y="2941920"/>
-            <a:ext cx="2925720" cy="242640"/>
-          </a:xfrm>
-          <a:prstGeom prst="rect">
-            <a:avLst/>
-          </a:prstGeom>
-          <a:noFill/>
-          <a:ln w="12700">
-            <a:noFill/>
-          </a:ln>
-        </p:spPr>
-        <p:style>
-          <a:lnRef idx="0"/>
-          <a:fillRef idx="0"/>
-          <a:effectRef idx="0"/>
-          <a:fontRef idx="minor"/>
-        </p:style>
-        <p:txBody>
-          <a:bodyPr lIns="0" rIns="0" tIns="0" bIns="0" anchor="ctr">
-            <a:spAutoFit/>
-          </a:bodyPr>
-          <a:p>
-            <a:pPr>
-              <a:lnSpc>
-                <a:spcPct val="100000"/>
-              </a:lnSpc>
-              <a:tabLst>
-                <a:tab algn="l" pos="0"/>
-              </a:tabLst>
-            </a:pPr>
-            <a:r>
-              <a:rPr b="1" lang="en-US" sz="1600" spc="-1" strike="noStrike">
-                <a:solidFill>
-                  <a:srgbClr val="2ee5ba"/>
-                </a:solidFill>
-                <a:latin typeface="Calibri"/>
-                <a:ea typeface="Calibri"/>
-              </a:rPr>
-              <a:t>MLP regression</a:t>
-            </a:r>
-            <a:endParaRPr b="0" lang="en-US" sz="1600" spc="-1" strike="noStrike">
-              <a:solidFill>
-                <a:srgbClr val="000000"/>
-              </a:solidFill>
-              <a:latin typeface="Arial"/>
-            </a:endParaRPr>
-          </a:p>
-        </p:txBody>
-      </p:sp>
-      <p:sp>
-        <p:nvSpPr>
-          <p:cNvPr id="153" name="Text 8"/>
-          <p:cNvSpPr/>
-          <p:nvPr/>
-        </p:nvSpPr>
-        <p:spPr>
-          <a:xfrm>
-            <a:off x="3566160" y="3002760"/>
-            <a:ext cx="5028840" cy="212400"/>
-          </a:xfrm>
-          <a:prstGeom prst="rect">
-            <a:avLst/>
-          </a:prstGeom>
-          <a:noFill/>
-          <a:ln w="12700">
-            <a:noFill/>
-          </a:ln>
-        </p:spPr>
-        <p:style>
-          <a:lnRef idx="0"/>
-          <a:fillRef idx="0"/>
-          <a:effectRef idx="0"/>
-          <a:fontRef idx="minor"/>
-        </p:style>
-        <p:txBody>
-          <a:bodyPr lIns="0" rIns="0" tIns="0" bIns="0" anchor="ctr">
-            <a:spAutoFit/>
-          </a:bodyPr>
-          <a:p>
-            <a:pPr>
-              <a:lnSpc>
-                <a:spcPct val="100000"/>
-              </a:lnSpc>
-              <a:tabLst>
-                <a:tab algn="l" pos="0"/>
-              </a:tabLst>
-            </a:pPr>
-            <a:r>
-              <a:rPr b="0" lang="en-US" sz="1400" spc="-1" strike="noStrike">
+              <a:t>Strong regularization (α ≈ 10⁴–10⁵) was critical for generalization</a:t>
+            </a:r>
+            <a:endParaRPr b="0" lang="en-US" sz="1500" spc="-1" strike="noStrike">
+              <a:solidFill>
+                <a:srgbClr val="000000"/>
+              </a:solidFill>
+              <a:latin typeface="Arial"/>
+            </a:endParaRPr>
+          </a:p>
+        </p:txBody>
+      </p:sp>
+      <p:sp>
+        <p:nvSpPr>
+          <p:cNvPr id="147" name="Text 4"/>
+          <p:cNvSpPr/>
+          <p:nvPr/>
+        </p:nvSpPr>
+        <p:spPr>
+          <a:xfrm>
+            <a:off x="502920" y="2034000"/>
+            <a:ext cx="8045280" cy="227880"/>
+          </a:xfrm>
+          <a:prstGeom prst="rect">
+            <a:avLst/>
+          </a:prstGeom>
+          <a:noFill/>
+          <a:ln w="12700">
+            <a:noFill/>
+          </a:ln>
+        </p:spPr>
+        <p:style>
+          <a:lnRef idx="0"/>
+          <a:fillRef idx="0"/>
+          <a:effectRef idx="0"/>
+          <a:fontRef idx="minor"/>
+        </p:style>
+        <p:txBody>
+          <a:bodyPr lIns="0" rIns="0" tIns="0" bIns="0" anchor="ctr">
+            <a:spAutoFit/>
+          </a:bodyPr>
+          <a:p>
+            <a:pPr>
+              <a:lnSpc>
+                <a:spcPct val="100000"/>
+              </a:lnSpc>
+              <a:tabLst>
+                <a:tab algn="l" pos="0"/>
+              </a:tabLst>
+            </a:pPr>
+            <a:r>
+              <a:rPr b="0" lang="en-US" sz="1500" spc="-1" strike="noStrike">
                 <a:solidFill>
                   <a:srgbClr val="ffffff"/>
                 </a:solidFill>
                 <a:latin typeface="Calibri"/>
                 <a:ea typeface="Calibri"/>
               </a:rPr>
-              <a:t>Underfits; train already at chance</a:t>
-            </a:r>
-            <a:endParaRPr b="0" lang="en-US" sz="1400" spc="-1" strike="noStrike">
-              <a:solidFill>
-                <a:srgbClr val="000000"/>
-              </a:solidFill>
-              <a:latin typeface="Arial"/>
-            </a:endParaRPr>
-          </a:p>
-        </p:txBody>
-      </p:sp>
-      <p:sp>
-        <p:nvSpPr>
-          <p:cNvPr id="154" name="Text 9"/>
-          <p:cNvSpPr/>
-          <p:nvPr/>
-        </p:nvSpPr>
-        <p:spPr>
-          <a:xfrm>
-            <a:off x="502920" y="3719160"/>
-            <a:ext cx="2925720" cy="242640"/>
-          </a:xfrm>
-          <a:prstGeom prst="rect">
-            <a:avLst/>
-          </a:prstGeom>
-          <a:noFill/>
-          <a:ln w="12700">
-            <a:noFill/>
-          </a:ln>
-        </p:spPr>
-        <p:style>
-          <a:lnRef idx="0"/>
-          <a:fillRef idx="0"/>
-          <a:effectRef idx="0"/>
-          <a:fontRef idx="minor"/>
-        </p:style>
-        <p:txBody>
-          <a:bodyPr lIns="0" rIns="0" tIns="0" bIns="0" anchor="ctr">
-            <a:spAutoFit/>
-          </a:bodyPr>
-          <a:p>
-            <a:pPr>
-              <a:lnSpc>
-                <a:spcPct val="100000"/>
-              </a:lnSpc>
-              <a:tabLst>
-                <a:tab algn="l" pos="0"/>
-              </a:tabLst>
-            </a:pPr>
-            <a:r>
-              <a:rPr b="1" lang="en-US" sz="1600" spc="-1" strike="noStrike">
-                <a:solidFill>
-                  <a:srgbClr val="2ee5ba"/>
-                </a:solidFill>
-                <a:latin typeface="Calibri"/>
-                <a:ea typeface="Calibri"/>
-              </a:rPr>
-              <a:t>Ridge (submitted)</a:t>
-            </a:r>
-            <a:endParaRPr b="0" lang="en-US" sz="1600" spc="-1" strike="noStrike">
-              <a:solidFill>
-                <a:srgbClr val="000000"/>
-              </a:solidFill>
-              <a:latin typeface="Arial"/>
-            </a:endParaRPr>
-          </a:p>
-        </p:txBody>
-      </p:sp>
-      <p:sp>
-        <p:nvSpPr>
-          <p:cNvPr id="155" name="Text 10"/>
-          <p:cNvSpPr/>
-          <p:nvPr/>
-        </p:nvSpPr>
-        <p:spPr>
-          <a:xfrm>
-            <a:off x="3566160" y="3780000"/>
-            <a:ext cx="5028840" cy="212400"/>
-          </a:xfrm>
-          <a:prstGeom prst="rect">
-            <a:avLst/>
-          </a:prstGeom>
-          <a:noFill/>
-          <a:ln w="12700">
-            <a:noFill/>
-          </a:ln>
-        </p:spPr>
-        <p:style>
-          <a:lnRef idx="0"/>
-          <a:fillRef idx="0"/>
-          <a:effectRef idx="0"/>
-          <a:fontRef idx="minor"/>
-        </p:style>
-        <p:txBody>
-          <a:bodyPr lIns="0" rIns="0" tIns="0" bIns="0" anchor="ctr">
-            <a:spAutoFit/>
-          </a:bodyPr>
-          <a:p>
-            <a:pPr>
-              <a:lnSpc>
-                <a:spcPct val="100000"/>
-              </a:lnSpc>
-              <a:tabLst>
-                <a:tab algn="l" pos="0"/>
-              </a:tabLst>
-            </a:pPr>
-            <a:r>
-              <a:rPr b="0" lang="en-US" sz="1400" spc="-1" strike="noStrike">
+              <a:t>▸  </a:t>
+            </a:r>
+            <a:r>
+              <a:rPr b="0" lang="en-US" sz="1500" spc="-1" strike="noStrike">
                 <a:solidFill>
                   <a:srgbClr val="ffffff"/>
                 </a:solidFill>
                 <a:latin typeface="Calibri"/>
                 <a:ea typeface="Calibri"/>
               </a:rPr>
-              <a:t>Only method clearly above chance on test</a:t>
-            </a:r>
-            <a:endParaRPr b="0" lang="en-US" sz="1400" spc="-1" strike="noStrike">
-              <a:solidFill>
-                <a:srgbClr val="000000"/>
-              </a:solidFill>
-              <a:latin typeface="Arial"/>
-            </a:endParaRPr>
-          </a:p>
-        </p:txBody>
-      </p:sp>
-      <p:sp>
-        <p:nvSpPr>
-          <p:cNvPr id="156" name="Shape 11"/>
+              <a:t>Ensemble of video features beat any single source on test top-1</a:t>
+            </a:r>
+            <a:endParaRPr b="0" lang="en-US" sz="1500" spc="-1" strike="noStrike">
+              <a:solidFill>
+                <a:srgbClr val="000000"/>
+              </a:solidFill>
+              <a:latin typeface="Arial"/>
+            </a:endParaRPr>
+          </a:p>
+        </p:txBody>
+      </p:sp>
+      <p:sp>
+        <p:nvSpPr>
+          <p:cNvPr id="148" name="Text 5"/>
+          <p:cNvSpPr/>
+          <p:nvPr/>
+        </p:nvSpPr>
+        <p:spPr>
+          <a:xfrm>
+            <a:off x="502920" y="2628360"/>
+            <a:ext cx="8045280" cy="227880"/>
+          </a:xfrm>
+          <a:prstGeom prst="rect">
+            <a:avLst/>
+          </a:prstGeom>
+          <a:noFill/>
+          <a:ln w="12700">
+            <a:noFill/>
+          </a:ln>
+        </p:spPr>
+        <p:style>
+          <a:lnRef idx="0"/>
+          <a:fillRef idx="0"/>
+          <a:effectRef idx="0"/>
+          <a:fontRef idx="minor"/>
+        </p:style>
+        <p:txBody>
+          <a:bodyPr lIns="0" rIns="0" tIns="0" bIns="0" anchor="ctr">
+            <a:spAutoFit/>
+          </a:bodyPr>
+          <a:p>
+            <a:pPr>
+              <a:lnSpc>
+                <a:spcPct val="100000"/>
+              </a:lnSpc>
+              <a:tabLst>
+                <a:tab algn="l" pos="0"/>
+              </a:tabLst>
+            </a:pPr>
+            <a:r>
+              <a:rPr b="0" lang="en-US" sz="1500" spc="-1" strike="noStrike">
+                <a:solidFill>
+                  <a:srgbClr val="ffffff"/>
+                </a:solidFill>
+                <a:latin typeface="Calibri"/>
+                <a:ea typeface="Calibri"/>
+              </a:rPr>
+              <a:t>▸  </a:t>
+            </a:r>
+            <a:r>
+              <a:rPr b="0" lang="en-US" sz="1500" spc="-1" strike="noStrike">
+                <a:solidFill>
+                  <a:srgbClr val="ffffff"/>
+                </a:solidFill>
+                <a:latin typeface="Calibri"/>
+                <a:ea typeface="Calibri"/>
+              </a:rPr>
+              <a:t>Learned EEG embeddings (LaBraM, LUNA, CBraMod) overfit more easily</a:t>
+            </a:r>
+            <a:endParaRPr b="0" lang="en-US" sz="1500" spc="-1" strike="noStrike">
+              <a:solidFill>
+                <a:srgbClr val="000000"/>
+              </a:solidFill>
+              <a:latin typeface="Arial"/>
+            </a:endParaRPr>
+          </a:p>
+        </p:txBody>
+      </p:sp>
+      <p:sp>
+        <p:nvSpPr>
+          <p:cNvPr id="149" name="Text 7"/>
+          <p:cNvSpPr/>
+          <p:nvPr/>
+        </p:nvSpPr>
+        <p:spPr>
+          <a:xfrm>
+            <a:off x="502920" y="3169080"/>
+            <a:ext cx="8045280" cy="227880"/>
+          </a:xfrm>
+          <a:prstGeom prst="rect">
+            <a:avLst/>
+          </a:prstGeom>
+          <a:noFill/>
+          <a:ln w="12700">
+            <a:noFill/>
+          </a:ln>
+        </p:spPr>
+        <p:style>
+          <a:lnRef idx="0"/>
+          <a:fillRef idx="0"/>
+          <a:effectRef idx="0"/>
+          <a:fontRef idx="minor"/>
+        </p:style>
+        <p:txBody>
+          <a:bodyPr lIns="0" rIns="0" tIns="0" bIns="0" anchor="ctr">
+            <a:spAutoFit/>
+          </a:bodyPr>
+          <a:p>
+            <a:pPr>
+              <a:lnSpc>
+                <a:spcPct val="100000"/>
+              </a:lnSpc>
+              <a:tabLst>
+                <a:tab algn="l" pos="0"/>
+              </a:tabLst>
+            </a:pPr>
+            <a:r>
+              <a:rPr b="0" lang="en-US" sz="1500" spc="-1" strike="noStrike">
+                <a:solidFill>
+                  <a:srgbClr val="ffffff"/>
+                </a:solidFill>
+                <a:latin typeface="Calibri"/>
+                <a:ea typeface="Calibri"/>
+              </a:rPr>
+              <a:t>▸  </a:t>
+            </a:r>
+            <a:r>
+              <a:rPr b="0" lang="en-US" sz="1500" spc="-1" strike="noStrike">
+                <a:solidFill>
+                  <a:srgbClr val="ffffff"/>
+                </a:solidFill>
+                <a:latin typeface="Calibri"/>
+                <a:ea typeface="Calibri"/>
+              </a:rPr>
+              <a:t>DINO features gave the strongest single-model performance</a:t>
+            </a:r>
+            <a:endParaRPr b="0" lang="en-US" sz="1500" spc="-1" strike="noStrike">
+              <a:solidFill>
+                <a:srgbClr val="000000"/>
+              </a:solidFill>
+              <a:latin typeface="Arial"/>
+            </a:endParaRPr>
+          </a:p>
+        </p:txBody>
+      </p:sp>
+      <p:sp>
+        <p:nvSpPr>
+          <p:cNvPr id="150" name="Shape 8"/>
           <p:cNvSpPr/>
           <p:nvPr/>
         </p:nvSpPr>
         <p:spPr>
           <a:xfrm>
             <a:off x="0" y="4800600"/>
-            <a:ext cx="9143640" cy="342720"/>
+            <a:ext cx="9142560" cy="341640"/>
           </a:xfrm>
           <a:prstGeom prst="rect">
             <a:avLst/>
@@ -9041,14 +8770,14 @@
       </p:sp>
       <p:sp>
         <p:nvSpPr>
-          <p:cNvPr id="157" name="Text 12"/>
+          <p:cNvPr id="151" name="Text 9"/>
           <p:cNvSpPr/>
           <p:nvPr/>
         </p:nvSpPr>
         <p:spPr>
           <a:xfrm>
             <a:off x="365760" y="4884840"/>
-            <a:ext cx="6857640" cy="151560"/>
+            <a:ext cx="6856560" cy="151560"/>
           </a:xfrm>
           <a:prstGeom prst="rect">
             <a:avLst/>
@@ -9098,14 +8827,14 @@
       </p:sp>
       <p:sp>
         <p:nvSpPr>
-          <p:cNvPr id="158" name="Text 13"/>
+          <p:cNvPr id="152" name="Text 10"/>
           <p:cNvSpPr/>
           <p:nvPr/>
         </p:nvSpPr>
         <p:spPr>
           <a:xfrm>
             <a:off x="8412480" y="4884840"/>
-            <a:ext cx="456840" cy="151560"/>
+            <a:ext cx="455760" cy="151560"/>
           </a:xfrm>
           <a:prstGeom prst="rect">
             <a:avLst/>
@@ -9142,7 +8871,7 @@
                 <a:latin typeface="Calibri"/>
                 <a:ea typeface="Calibri"/>
               </a:rPr>
-              <a:t>7</a:t>
+              <a:t>5</a:t>
             </a:r>
             <a:endParaRPr b="0" lang="en-US" sz="1000" spc="-1" strike="noStrike">
               <a:solidFill>
@@ -9185,7 +8914,7 @@
       </p:grpSpPr>
       <p:pic>
         <p:nvPicPr>
-          <p:cNvPr id="159" name="Image 0" descr="Image 0"/>
+          <p:cNvPr id="153" name="Image 0" descr="Image 0"/>
           <p:cNvPicPr/>
           <p:nvPr/>
         </p:nvPicPr>
@@ -9196,7 +8925,7 @@
         <p:spPr>
           <a:xfrm>
             <a:off x="0" y="0"/>
-            <a:ext cx="9143640" cy="5143320"/>
+            <a:ext cx="9142560" cy="5142240"/>
           </a:xfrm>
           <a:prstGeom prst="rect">
             <a:avLst/>
@@ -9208,24 +8937,20 @@
       </p:pic>
       <p:sp>
         <p:nvSpPr>
-          <p:cNvPr id="160" name="Shape 0"/>
-          <p:cNvSpPr/>
-          <p:nvPr/>
-        </p:nvSpPr>
-        <p:spPr>
-          <a:xfrm>
-            <a:off x="320040" y="1051560"/>
-            <a:ext cx="8503560" cy="3611520"/>
-          </a:xfrm>
-          <a:prstGeom prst="roundRect">
-            <a:avLst>
-              <a:gd name="adj" fmla="val 2532"/>
-            </a:avLst>
+          <p:cNvPr id="154" name="Shape 0"/>
+          <p:cNvSpPr/>
+          <p:nvPr/>
+        </p:nvSpPr>
+        <p:spPr>
+          <a:xfrm>
+            <a:off x="0" y="0"/>
+            <a:ext cx="9142560" cy="71640"/>
+          </a:xfrm>
+          <a:prstGeom prst="rect">
+            <a:avLst/>
           </a:prstGeom>
           <a:solidFill>
-            <a:srgbClr val="0f1e35">
-              <a:alpha val="80000"/>
-            </a:srgbClr>
+            <a:srgbClr val="2ee5ba"/>
           </a:solidFill>
           <a:ln w="12700">
             <a:noFill/>
@@ -9238,7 +8963,7 @@
           <a:fontRef idx="minor"/>
         </p:style>
         <p:txBody>
-          <a:bodyPr lIns="45720" rIns="45720" tIns="45000" bIns="45000" anchor="t">
+          <a:bodyPr lIns="45720" rIns="45720" tIns="28080" bIns="28080" anchor="t">
             <a:noAutofit/>
           </a:bodyPr>
           <a:p>
@@ -9262,463 +8987,185 @@
       </p:sp>
       <p:sp>
         <p:nvSpPr>
-          <p:cNvPr id="161" name="Text 1"/>
-          <p:cNvSpPr/>
-          <p:nvPr/>
-        </p:nvSpPr>
-        <p:spPr>
-          <a:xfrm>
-            <a:off x="411480" y="212040"/>
-            <a:ext cx="8229240" cy="197280"/>
-          </a:xfrm>
-          <a:prstGeom prst="rect">
-            <a:avLst/>
-          </a:prstGeom>
-          <a:noFill/>
-          <a:ln w="12700">
-            <a:noFill/>
-          </a:ln>
-        </p:spPr>
-        <p:style>
-          <a:lnRef idx="0"/>
-          <a:fillRef idx="0"/>
-          <a:effectRef idx="0"/>
-          <a:fontRef idx="minor"/>
-        </p:style>
-        <p:txBody>
-          <a:bodyPr lIns="0" rIns="0" tIns="0" bIns="0" anchor="ctr">
-            <a:spAutoFit/>
-          </a:bodyPr>
-          <a:p>
-            <a:pPr>
-              <a:lnSpc>
-                <a:spcPct val="100000"/>
-              </a:lnSpc>
-              <a:tabLst>
-                <a:tab algn="l" pos="0"/>
-              </a:tabLst>
-            </a:pPr>
-            <a:r>
-              <a:rPr b="1" lang="en-US" sz="1300" spc="398" strike="noStrike">
+          <p:cNvPr id="155" name="Text 1"/>
+          <p:cNvSpPr/>
+          <p:nvPr/>
+        </p:nvSpPr>
+        <p:spPr>
+          <a:xfrm>
+            <a:off x="411480" y="1631160"/>
+            <a:ext cx="4570560" cy="761040"/>
+          </a:xfrm>
+          <a:prstGeom prst="rect">
+            <a:avLst/>
+          </a:prstGeom>
+          <a:noFill/>
+          <a:ln w="12700">
+            <a:noFill/>
+          </a:ln>
+        </p:spPr>
+        <p:style>
+          <a:lnRef idx="0"/>
+          <a:fillRef idx="0"/>
+          <a:effectRef idx="0"/>
+          <a:fontRef idx="minor"/>
+        </p:style>
+        <p:txBody>
+          <a:bodyPr lIns="0" rIns="0" tIns="0" bIns="0" anchor="ctr">
+            <a:spAutoFit/>
+          </a:bodyPr>
+          <a:p>
+            <a:pPr>
+              <a:lnSpc>
+                <a:spcPct val="100000"/>
+              </a:lnSpc>
+              <a:tabLst>
+                <a:tab algn="l" pos="0"/>
+              </a:tabLst>
+            </a:pPr>
+            <a:r>
+              <a:rPr b="1" lang="en-US" sz="5000" spc="-1" strike="noStrike">
+                <a:solidFill>
+                  <a:srgbClr val="ffffff"/>
+                </a:solidFill>
+                <a:latin typeface="Calibri"/>
+                <a:ea typeface="Calibri"/>
+              </a:rPr>
+              <a:t>Telepathy</a:t>
+            </a:r>
+            <a:endParaRPr b="0" lang="en-US" sz="5000" spc="-1" strike="noStrike">
+              <a:solidFill>
+                <a:srgbClr val="000000"/>
+              </a:solidFill>
+              <a:latin typeface="Arial"/>
+            </a:endParaRPr>
+          </a:p>
+        </p:txBody>
+      </p:sp>
+      <p:sp>
+        <p:nvSpPr>
+          <p:cNvPr id="156" name="Text 2"/>
+          <p:cNvSpPr/>
+          <p:nvPr/>
+        </p:nvSpPr>
+        <p:spPr>
+          <a:xfrm>
+            <a:off x="411480" y="2621520"/>
+            <a:ext cx="4570560" cy="334440"/>
+          </a:xfrm>
+          <a:prstGeom prst="rect">
+            <a:avLst/>
+          </a:prstGeom>
+          <a:noFill/>
+          <a:ln w="12700">
+            <a:noFill/>
+          </a:ln>
+        </p:spPr>
+        <p:style>
+          <a:lnRef idx="0"/>
+          <a:fillRef idx="0"/>
+          <a:effectRef idx="0"/>
+          <a:fontRef idx="minor"/>
+        </p:style>
+        <p:txBody>
+          <a:bodyPr lIns="0" rIns="0" tIns="0" bIns="0" anchor="ctr">
+            <a:spAutoFit/>
+          </a:bodyPr>
+          <a:p>
+            <a:pPr>
+              <a:lnSpc>
+                <a:spcPct val="100000"/>
+              </a:lnSpc>
+              <a:tabLst>
+                <a:tab algn="l" pos="0"/>
+              </a:tabLst>
+            </a:pPr>
+            <a:r>
+              <a:rPr b="0" lang="en-US" sz="2200" spc="-1" strike="noStrike">
                 <a:solidFill>
                   <a:srgbClr val="2ee5ba"/>
                 </a:solidFill>
                 <a:latin typeface="Calibri"/>
                 <a:ea typeface="Calibri"/>
               </a:rPr>
-              <a:t>KEY TAKEAWAYS</a:t>
-            </a:r>
-            <a:endParaRPr b="0" lang="en-US" sz="1300" spc="-1" strike="noStrike">
-              <a:solidFill>
-                <a:srgbClr val="000000"/>
-              </a:solidFill>
-              <a:latin typeface="Arial"/>
-            </a:endParaRPr>
-          </a:p>
-        </p:txBody>
-      </p:sp>
-      <p:sp>
-        <p:nvSpPr>
-          <p:cNvPr id="162" name="Text 2"/>
-          <p:cNvSpPr/>
-          <p:nvPr/>
-        </p:nvSpPr>
-        <p:spPr>
-          <a:xfrm>
-            <a:off x="411480" y="545760"/>
-            <a:ext cx="8320680" cy="425880"/>
-          </a:xfrm>
-          <a:prstGeom prst="rect">
-            <a:avLst/>
-          </a:prstGeom>
-          <a:noFill/>
-          <a:ln w="12700">
-            <a:noFill/>
-          </a:ln>
-        </p:spPr>
-        <p:style>
-          <a:lnRef idx="0"/>
-          <a:fillRef idx="0"/>
-          <a:effectRef idx="0"/>
-          <a:fontRef idx="minor"/>
-        </p:style>
-        <p:txBody>
-          <a:bodyPr lIns="0" rIns="0" tIns="0" bIns="0" anchor="ctr">
-            <a:spAutoFit/>
-          </a:bodyPr>
-          <a:p>
-            <a:pPr>
-              <a:lnSpc>
-                <a:spcPct val="100000"/>
-              </a:lnSpc>
-              <a:tabLst>
-                <a:tab algn="l" pos="0"/>
-              </a:tabLst>
-            </a:pPr>
-            <a:r>
-              <a:rPr b="1" lang="en-US" sz="2800" spc="-1" strike="noStrike">
-                <a:solidFill>
-                  <a:srgbClr val="ffffff"/>
-                </a:solidFill>
-                <a:latin typeface="Calibri"/>
-                <a:ea typeface="Calibri"/>
-              </a:rPr>
-              <a:t>What we learned</a:t>
-            </a:r>
-            <a:endParaRPr b="0" lang="en-US" sz="2800" spc="-1" strike="noStrike">
-              <a:solidFill>
-                <a:srgbClr val="000000"/>
-              </a:solidFill>
-              <a:latin typeface="Arial"/>
-            </a:endParaRPr>
-          </a:p>
-        </p:txBody>
-      </p:sp>
-      <p:sp>
-        <p:nvSpPr>
-          <p:cNvPr id="163" name="Text 3"/>
-          <p:cNvSpPr/>
-          <p:nvPr/>
-        </p:nvSpPr>
-        <p:spPr>
-          <a:xfrm>
-            <a:off x="502920" y="1439640"/>
-            <a:ext cx="8046360" cy="228960"/>
-          </a:xfrm>
-          <a:prstGeom prst="rect">
-            <a:avLst/>
-          </a:prstGeom>
-          <a:noFill/>
-          <a:ln w="12700">
-            <a:noFill/>
-          </a:ln>
-        </p:spPr>
-        <p:style>
-          <a:lnRef idx="0"/>
-          <a:fillRef idx="0"/>
-          <a:effectRef idx="0"/>
-          <a:fontRef idx="minor"/>
-        </p:style>
-        <p:txBody>
-          <a:bodyPr lIns="0" rIns="0" tIns="0" bIns="0" anchor="ctr">
-            <a:spAutoFit/>
-          </a:bodyPr>
-          <a:p>
-            <a:pPr>
-              <a:lnSpc>
-                <a:spcPct val="100000"/>
-              </a:lnSpc>
-              <a:tabLst>
-                <a:tab algn="l" pos="0"/>
-              </a:tabLst>
-            </a:pPr>
-            <a:r>
-              <a:rPr b="0" lang="en-US" sz="1500" spc="-1" strike="noStrike">
-                <a:solidFill>
-                  <a:srgbClr val="ffffff"/>
-                </a:solidFill>
-                <a:latin typeface="Calibri"/>
-                <a:ea typeface="Calibri"/>
-              </a:rPr>
-              <a:t>▸  </a:t>
-            </a:r>
-            <a:r>
-              <a:rPr b="0" lang="en-US" sz="1500" spc="-1" strike="noStrike">
-                <a:solidFill>
-                  <a:srgbClr val="ffffff"/>
-                </a:solidFill>
-                <a:latin typeface="Calibri"/>
-                <a:ea typeface="Calibri"/>
-              </a:rPr>
-              <a:t>Strong regularization (α ≈ 10⁴–10⁵) was critical for generalization</a:t>
-            </a:r>
-            <a:endParaRPr b="0" lang="en-US" sz="1500" spc="-1" strike="noStrike">
-              <a:solidFill>
-                <a:srgbClr val="000000"/>
-              </a:solidFill>
-              <a:latin typeface="Arial"/>
-            </a:endParaRPr>
-          </a:p>
-        </p:txBody>
-      </p:sp>
-      <p:sp>
-        <p:nvSpPr>
-          <p:cNvPr id="164" name="Text 4"/>
-          <p:cNvSpPr/>
-          <p:nvPr/>
-        </p:nvSpPr>
-        <p:spPr>
-          <a:xfrm>
-            <a:off x="502920" y="2034000"/>
-            <a:ext cx="8046360" cy="228960"/>
-          </a:xfrm>
-          <a:prstGeom prst="rect">
-            <a:avLst/>
-          </a:prstGeom>
-          <a:noFill/>
-          <a:ln w="12700">
-            <a:noFill/>
-          </a:ln>
-        </p:spPr>
-        <p:style>
-          <a:lnRef idx="0"/>
-          <a:fillRef idx="0"/>
-          <a:effectRef idx="0"/>
-          <a:fontRef idx="minor"/>
-        </p:style>
-        <p:txBody>
-          <a:bodyPr lIns="0" rIns="0" tIns="0" bIns="0" anchor="ctr">
-            <a:spAutoFit/>
-          </a:bodyPr>
-          <a:p>
-            <a:pPr>
-              <a:lnSpc>
-                <a:spcPct val="100000"/>
-              </a:lnSpc>
-              <a:tabLst>
-                <a:tab algn="l" pos="0"/>
-              </a:tabLst>
-            </a:pPr>
-            <a:r>
-              <a:rPr b="0" lang="en-US" sz="1500" spc="-1" strike="noStrike">
-                <a:solidFill>
-                  <a:srgbClr val="ffffff"/>
-                </a:solidFill>
-                <a:latin typeface="Calibri"/>
-                <a:ea typeface="Calibri"/>
-              </a:rPr>
-              <a:t>▸  </a:t>
-            </a:r>
-            <a:r>
-              <a:rPr b="0" lang="en-US" sz="1500" spc="-1" strike="noStrike">
-                <a:solidFill>
-                  <a:srgbClr val="ffffff"/>
-                </a:solidFill>
-                <a:latin typeface="Calibri"/>
-                <a:ea typeface="Calibri"/>
-              </a:rPr>
-              <a:t>Ensemble of video features beat any single source on test top-1</a:t>
-            </a:r>
-            <a:endParaRPr b="0" lang="en-US" sz="1500" spc="-1" strike="noStrike">
-              <a:solidFill>
-                <a:srgbClr val="000000"/>
-              </a:solidFill>
-              <a:latin typeface="Arial"/>
-            </a:endParaRPr>
-          </a:p>
-        </p:txBody>
-      </p:sp>
-      <p:sp>
-        <p:nvSpPr>
-          <p:cNvPr id="165" name="Text 5"/>
-          <p:cNvSpPr/>
-          <p:nvPr/>
-        </p:nvSpPr>
-        <p:spPr>
-          <a:xfrm>
-            <a:off x="502920" y="2628360"/>
-            <a:ext cx="8046360" cy="228960"/>
-          </a:xfrm>
-          <a:prstGeom prst="rect">
-            <a:avLst/>
-          </a:prstGeom>
-          <a:noFill/>
-          <a:ln w="12700">
-            <a:noFill/>
-          </a:ln>
-        </p:spPr>
-        <p:style>
-          <a:lnRef idx="0"/>
-          <a:fillRef idx="0"/>
-          <a:effectRef idx="0"/>
-          <a:fontRef idx="minor"/>
-        </p:style>
-        <p:txBody>
-          <a:bodyPr lIns="0" rIns="0" tIns="0" bIns="0" anchor="ctr">
-            <a:spAutoFit/>
-          </a:bodyPr>
-          <a:p>
-            <a:pPr>
-              <a:lnSpc>
-                <a:spcPct val="100000"/>
-              </a:lnSpc>
-              <a:tabLst>
-                <a:tab algn="l" pos="0"/>
-              </a:tabLst>
-            </a:pPr>
-            <a:r>
-              <a:rPr b="0" lang="en-US" sz="1500" spc="-1" strike="noStrike">
-                <a:solidFill>
-                  <a:srgbClr val="ffffff"/>
-                </a:solidFill>
-                <a:latin typeface="Calibri"/>
-                <a:ea typeface="Calibri"/>
-              </a:rPr>
-              <a:t>▸  </a:t>
-            </a:r>
-            <a:r>
-              <a:rPr b="0" lang="en-US" sz="1500" spc="-1" strike="noStrike">
-                <a:solidFill>
-                  <a:srgbClr val="ffffff"/>
-                </a:solidFill>
-                <a:latin typeface="Calibri"/>
-                <a:ea typeface="Calibri"/>
-              </a:rPr>
-              <a:t>Learned EEG embeddings (LaBraM, LUNA, CBraMod) overfit more easily</a:t>
-            </a:r>
-            <a:endParaRPr b="0" lang="en-US" sz="1500" spc="-1" strike="noStrike">
-              <a:solidFill>
-                <a:srgbClr val="000000"/>
-              </a:solidFill>
-              <a:latin typeface="Arial"/>
-            </a:endParaRPr>
-          </a:p>
-        </p:txBody>
-      </p:sp>
-      <p:sp>
-        <p:nvSpPr>
-          <p:cNvPr id="166" name="Text 6"/>
-          <p:cNvSpPr/>
-          <p:nvPr/>
-        </p:nvSpPr>
-        <p:spPr>
-          <a:xfrm>
-            <a:off x="502920" y="3222720"/>
-            <a:ext cx="8046360" cy="228960"/>
-          </a:xfrm>
-          <a:prstGeom prst="rect">
-            <a:avLst/>
-          </a:prstGeom>
-          <a:noFill/>
-          <a:ln w="12700">
-            <a:noFill/>
-          </a:ln>
-        </p:spPr>
-        <p:style>
-          <a:lnRef idx="0"/>
-          <a:fillRef idx="0"/>
-          <a:effectRef idx="0"/>
-          <a:fontRef idx="minor"/>
-        </p:style>
-        <p:txBody>
-          <a:bodyPr lIns="0" rIns="0" tIns="0" bIns="0" anchor="ctr">
-            <a:spAutoFit/>
-          </a:bodyPr>
-          <a:p>
-            <a:pPr>
-              <a:lnSpc>
-                <a:spcPct val="100000"/>
-              </a:lnSpc>
-              <a:tabLst>
-                <a:tab algn="l" pos="0"/>
-              </a:tabLst>
-            </a:pPr>
-            <a:r>
-              <a:rPr b="0" lang="en-US" sz="1500" spc="-1" strike="noStrike">
-                <a:solidFill>
-                  <a:srgbClr val="ffffff"/>
-                </a:solidFill>
-                <a:latin typeface="Calibri"/>
-                <a:ea typeface="Calibri"/>
-              </a:rPr>
-              <a:t>▸  </a:t>
-            </a:r>
-            <a:r>
-              <a:rPr b="0" lang="en-US" sz="1500" spc="-1" strike="noStrike">
-                <a:solidFill>
-                  <a:srgbClr val="ffffff"/>
-                </a:solidFill>
-                <a:latin typeface="Calibri"/>
-                <a:ea typeface="Calibri"/>
-              </a:rPr>
-              <a:t>Raw (decimated) EEG + Ridge was more robust than complex models</a:t>
-            </a:r>
-            <a:endParaRPr b="0" lang="en-US" sz="1500" spc="-1" strike="noStrike">
-              <a:solidFill>
-                <a:srgbClr val="000000"/>
-              </a:solidFill>
-              <a:latin typeface="Arial"/>
-            </a:endParaRPr>
-          </a:p>
-        </p:txBody>
-      </p:sp>
-      <p:sp>
-        <p:nvSpPr>
-          <p:cNvPr id="167" name="Text 7"/>
-          <p:cNvSpPr/>
-          <p:nvPr/>
-        </p:nvSpPr>
-        <p:spPr>
-          <a:xfrm>
-            <a:off x="502920" y="3817080"/>
-            <a:ext cx="8046360" cy="228960"/>
-          </a:xfrm>
-          <a:prstGeom prst="rect">
-            <a:avLst/>
-          </a:prstGeom>
-          <a:noFill/>
-          <a:ln w="12700">
-            <a:noFill/>
-          </a:ln>
-        </p:spPr>
-        <p:style>
-          <a:lnRef idx="0"/>
-          <a:fillRef idx="0"/>
-          <a:effectRef idx="0"/>
-          <a:fontRef idx="minor"/>
-        </p:style>
-        <p:txBody>
-          <a:bodyPr lIns="0" rIns="0" tIns="0" bIns="0" anchor="ctr">
-            <a:spAutoFit/>
-          </a:bodyPr>
-          <a:p>
-            <a:pPr>
-              <a:lnSpc>
-                <a:spcPct val="100000"/>
-              </a:lnSpc>
-              <a:tabLst>
-                <a:tab algn="l" pos="0"/>
-              </a:tabLst>
-            </a:pPr>
-            <a:r>
-              <a:rPr b="0" lang="en-US" sz="1500" spc="-1" strike="noStrike">
-                <a:solidFill>
-                  <a:srgbClr val="ffffff"/>
-                </a:solidFill>
-                <a:latin typeface="Calibri"/>
-                <a:ea typeface="Calibri"/>
-              </a:rPr>
-              <a:t>▸  </a:t>
-            </a:r>
-            <a:r>
-              <a:rPr b="0" lang="en-US" sz="1500" spc="-1" strike="noStrike">
-                <a:solidFill>
-                  <a:srgbClr val="ffffff"/>
-                </a:solidFill>
-                <a:latin typeface="Calibri"/>
-                <a:ea typeface="Calibri"/>
-              </a:rPr>
-              <a:t>DINO features gave the strongest single-model top-5</a:t>
-            </a:r>
-            <a:endParaRPr b="0" lang="en-US" sz="1500" spc="-1" strike="noStrike">
-              <a:solidFill>
-                <a:srgbClr val="000000"/>
-              </a:solidFill>
-              <a:latin typeface="Arial"/>
-            </a:endParaRPr>
-          </a:p>
-        </p:txBody>
-      </p:sp>
-      <p:sp>
-        <p:nvSpPr>
-          <p:cNvPr id="168" name="Shape 8"/>
+              <a:t>Decoding what the mind sees</a:t>
+            </a:r>
+            <a:endParaRPr b="0" lang="en-US" sz="2200" spc="-1" strike="noStrike">
+              <a:solidFill>
+                <a:srgbClr val="000000"/>
+              </a:solidFill>
+              <a:latin typeface="Arial"/>
+            </a:endParaRPr>
+          </a:p>
+        </p:txBody>
+      </p:sp>
+      <p:sp>
+        <p:nvSpPr>
+          <p:cNvPr id="157" name="Text 3"/>
+          <p:cNvSpPr/>
+          <p:nvPr/>
+        </p:nvSpPr>
+        <p:spPr>
+          <a:xfrm>
+            <a:off x="411480" y="3246120"/>
+            <a:ext cx="4570560" cy="273600"/>
+          </a:xfrm>
+          <a:prstGeom prst="rect">
+            <a:avLst/>
+          </a:prstGeom>
+          <a:noFill/>
+          <a:ln w="12700">
+            <a:noFill/>
+          </a:ln>
+        </p:spPr>
+        <p:style>
+          <a:lnRef idx="0"/>
+          <a:fillRef idx="0"/>
+          <a:effectRef idx="0"/>
+          <a:fontRef idx="minor"/>
+        </p:style>
+        <p:txBody>
+          <a:bodyPr lIns="0" rIns="0" tIns="0" bIns="0" anchor="ctr">
+            <a:spAutoFit/>
+          </a:bodyPr>
+          <a:p>
+            <a:pPr>
+              <a:lnSpc>
+                <a:spcPct val="100000"/>
+              </a:lnSpc>
+              <a:tabLst>
+                <a:tab algn="l" pos="0"/>
+              </a:tabLst>
+            </a:pPr>
+            <a:r>
+              <a:rPr b="0" lang="en-US" sz="1800" spc="-1" strike="noStrike">
+                <a:solidFill>
+                  <a:srgbClr val="94a3b8"/>
+                </a:solidFill>
+                <a:latin typeface="Calibri"/>
+                <a:ea typeface="Calibri"/>
+              </a:rPr>
+              <a:t>Thank you!</a:t>
+            </a:r>
+            <a:endParaRPr b="0" lang="en-US" sz="1800" spc="-1" strike="noStrike">
+              <a:solidFill>
+                <a:srgbClr val="000000"/>
+              </a:solidFill>
+              <a:latin typeface="Arial"/>
+            </a:endParaRPr>
+          </a:p>
+        </p:txBody>
+      </p:sp>
+      <p:sp>
+        <p:nvSpPr>
+          <p:cNvPr id="158" name="Shape 4"/>
           <p:cNvSpPr/>
           <p:nvPr/>
         </p:nvSpPr>
         <p:spPr>
           <a:xfrm>
             <a:off x="0" y="4800600"/>
-            <a:ext cx="9143640" cy="342720"/>
+            <a:ext cx="9142560" cy="341640"/>
           </a:xfrm>
           <a:prstGeom prst="rect">
             <a:avLst/>
@@ -9763,454 +9210,14 @@
       </p:sp>
       <p:sp>
         <p:nvSpPr>
-          <p:cNvPr id="169" name="Text 9"/>
+          <p:cNvPr id="159" name="Text 5"/>
           <p:cNvSpPr/>
           <p:nvPr/>
         </p:nvSpPr>
         <p:spPr>
           <a:xfrm>
             <a:off x="365760" y="4884840"/>
-            <a:ext cx="6857640" cy="151560"/>
-          </a:xfrm>
-          <a:prstGeom prst="rect">
-            <a:avLst/>
-          </a:prstGeom>
-          <a:noFill/>
-          <a:ln w="12700">
-            <a:noFill/>
-          </a:ln>
-        </p:spPr>
-        <p:style>
-          <a:lnRef idx="0"/>
-          <a:fillRef idx="0"/>
-          <a:effectRef idx="0"/>
-          <a:fontRef idx="minor"/>
-        </p:style>
-        <p:txBody>
-          <a:bodyPr lIns="0" rIns="0" tIns="0" bIns="0" anchor="ctr">
-            <a:spAutoFit/>
-          </a:bodyPr>
-          <a:p>
-            <a:pPr>
-              <a:lnSpc>
-                <a:spcPct val="100000"/>
-              </a:lnSpc>
-              <a:tabLst>
-                <a:tab algn="l" pos="0"/>
-              </a:tabLst>
-            </a:pPr>
-            <a:r>
-              <a:rPr b="0" lang="en-US" sz="1000" spc="-1" strike="noStrike">
-                <a:solidFill>
-                  <a:srgbClr val="b0c0d0"/>
-                </a:solidFill>
-                <a:latin typeface="Calibri"/>
-                <a:ea typeface="Calibri"/>
-              </a:rPr>
-              <a:t>Telepathy  |  Constructor Technology EEG Challenge</a:t>
-            </a:r>
-            <a:endParaRPr b="0" lang="en-US" sz="1000" spc="-1" strike="noStrike">
-              <a:solidFill>
-                <a:srgbClr val="000000"/>
-              </a:solidFill>
-              <a:latin typeface="Arial"/>
-            </a:endParaRPr>
-          </a:p>
-        </p:txBody>
-      </p:sp>
-      <p:sp>
-        <p:nvSpPr>
-          <p:cNvPr id="170" name="Text 10"/>
-          <p:cNvSpPr/>
-          <p:nvPr/>
-        </p:nvSpPr>
-        <p:spPr>
-          <a:xfrm>
-            <a:off x="8412480" y="4884840"/>
-            <a:ext cx="456840" cy="151560"/>
-          </a:xfrm>
-          <a:prstGeom prst="rect">
-            <a:avLst/>
-          </a:prstGeom>
-          <a:noFill/>
-          <a:ln w="12700">
-            <a:noFill/>
-          </a:ln>
-        </p:spPr>
-        <p:style>
-          <a:lnRef idx="0"/>
-          <a:fillRef idx="0"/>
-          <a:effectRef idx="0"/>
-          <a:fontRef idx="minor"/>
-        </p:style>
-        <p:txBody>
-          <a:bodyPr lIns="0" rIns="0" tIns="0" bIns="0" anchor="ctr">
-            <a:spAutoFit/>
-          </a:bodyPr>
-          <a:p>
-            <a:pPr algn="r">
-              <a:lnSpc>
-                <a:spcPct val="100000"/>
-              </a:lnSpc>
-              <a:tabLst>
-                <a:tab algn="l" pos="0"/>
-              </a:tabLst>
-            </a:pPr>
-            <a:r>
-              <a:rPr b="0" lang="en-US" sz="1000" spc="-1" strike="noStrike">
-                <a:solidFill>
-                  <a:srgbClr val="b0c0d0"/>
-                </a:solidFill>
-                <a:latin typeface="Calibri"/>
-                <a:ea typeface="Calibri"/>
-              </a:rPr>
-              <a:t>8</a:t>
-            </a:r>
-            <a:endParaRPr b="0" lang="en-US" sz="1000" spc="-1" strike="noStrike">
-              <a:solidFill>
-                <a:srgbClr val="000000"/>
-              </a:solidFill>
-              <a:latin typeface="Arial"/>
-            </a:endParaRPr>
-          </a:p>
-        </p:txBody>
-      </p:sp>
-    </p:spTree>
-  </p:cSld>
-  <mc:AlternateContent>
-    <mc:Choice Requires="p14">
-      <p:transition spd="slow" p14:dur="2000"/>
-    </mc:Choice>
-    <mc:Fallback>
-      <p:transition spd="slow"/>
-    </mc:Fallback>
-  </mc:AlternateContent>
-</p:sld>
-</file>
-
-<file path=ppt/slides/slide8.xml><?xml version="1.0" encoding="utf-8"?>
-<p:sld xmlns:a="http://schemas.openxmlformats.org/drawingml/2006/main" xmlns:p="http://schemas.openxmlformats.org/presentationml/2006/main" xmlns:r="http://schemas.openxmlformats.org/officeDocument/2006/relationships" xmlns:p14="http://schemas.microsoft.com/office/powerpoint/2010/main" xmlns:p15="http://schemas.microsoft.com/office/powerpoint/2012/main" xmlns:mc="http://schemas.openxmlformats.org/markup-compatibility/2006">
-  <p:cSld>
-    <p:spTree>
-      <p:nvGrpSpPr>
-        <p:cNvPr id="1" name=""/>
-        <p:cNvGrpSpPr/>
-        <p:nvPr/>
-      </p:nvGrpSpPr>
-      <p:grpSpPr>
-        <a:xfrm>
-          <a:off x="0" y="0"/>
-          <a:ext cx="0" cy="0"/>
-          <a:chOff x="0" y="0"/>
-          <a:chExt cx="0" cy="0"/>
-        </a:xfrm>
-      </p:grpSpPr>
-      <p:pic>
-        <p:nvPicPr>
-          <p:cNvPr id="171" name="Image 0" descr="Image 0"/>
-          <p:cNvPicPr/>
-          <p:nvPr/>
-        </p:nvPicPr>
-        <p:blipFill>
-          <a:blip r:embed="rId1"/>
-          <a:stretch/>
-        </p:blipFill>
-        <p:spPr>
-          <a:xfrm>
-            <a:off x="0" y="0"/>
-            <a:ext cx="9143640" cy="5143320"/>
-          </a:xfrm>
-          <a:prstGeom prst="rect">
-            <a:avLst/>
-          </a:prstGeom>
-          <a:ln w="12700">
-            <a:noFill/>
-          </a:ln>
-        </p:spPr>
-      </p:pic>
-      <p:sp>
-        <p:nvSpPr>
-          <p:cNvPr id="172" name="Shape 0"/>
-          <p:cNvSpPr/>
-          <p:nvPr/>
-        </p:nvSpPr>
-        <p:spPr>
-          <a:xfrm>
-            <a:off x="0" y="0"/>
-            <a:ext cx="9143640" cy="72720"/>
-          </a:xfrm>
-          <a:prstGeom prst="rect">
-            <a:avLst/>
-          </a:prstGeom>
-          <a:solidFill>
-            <a:srgbClr val="2ee5ba"/>
-          </a:solidFill>
-          <a:ln w="12700">
-            <a:noFill/>
-          </a:ln>
-        </p:spPr>
-        <p:style>
-          <a:lnRef idx="0"/>
-          <a:fillRef idx="0"/>
-          <a:effectRef idx="0"/>
-          <a:fontRef idx="minor"/>
-        </p:style>
-        <p:txBody>
-          <a:bodyPr lIns="45720" rIns="45720" tIns="28080" bIns="28080" anchor="t">
-            <a:noAutofit/>
-          </a:bodyPr>
-          <a:p>
-            <a:pPr>
-              <a:lnSpc>
-                <a:spcPct val="100000"/>
-              </a:lnSpc>
-              <a:tabLst>
-                <a:tab algn="l" pos="0"/>
-              </a:tabLst>
-            </a:pPr>
-            <a:endParaRPr b="0" lang="en-US" sz="1800" spc="-1" strike="noStrike">
-              <a:solidFill>
-                <a:srgbClr val="000000"/>
-              </a:solidFill>
-              <a:latin typeface="Calibri"/>
-              <a:ea typeface="Calibri"/>
-            </a:endParaRPr>
-          </a:p>
-        </p:txBody>
-      </p:sp>
-      <p:sp>
-        <p:nvSpPr>
-          <p:cNvPr id="173" name="Text 1"/>
-          <p:cNvSpPr/>
-          <p:nvPr/>
-        </p:nvSpPr>
-        <p:spPr>
-          <a:xfrm>
-            <a:off x="411480" y="1631160"/>
-            <a:ext cx="4571640" cy="761040"/>
-          </a:xfrm>
-          <a:prstGeom prst="rect">
-            <a:avLst/>
-          </a:prstGeom>
-          <a:noFill/>
-          <a:ln w="12700">
-            <a:noFill/>
-          </a:ln>
-        </p:spPr>
-        <p:style>
-          <a:lnRef idx="0"/>
-          <a:fillRef idx="0"/>
-          <a:effectRef idx="0"/>
-          <a:fontRef idx="minor"/>
-        </p:style>
-        <p:txBody>
-          <a:bodyPr lIns="0" rIns="0" tIns="0" bIns="0" anchor="ctr">
-            <a:spAutoFit/>
-          </a:bodyPr>
-          <a:p>
-            <a:pPr>
-              <a:lnSpc>
-                <a:spcPct val="100000"/>
-              </a:lnSpc>
-              <a:tabLst>
-                <a:tab algn="l" pos="0"/>
-              </a:tabLst>
-            </a:pPr>
-            <a:r>
-              <a:rPr b="1" lang="en-US" sz="5000" spc="-1" strike="noStrike">
-                <a:solidFill>
-                  <a:srgbClr val="ffffff"/>
-                </a:solidFill>
-                <a:latin typeface="Calibri"/>
-                <a:ea typeface="Calibri"/>
-              </a:rPr>
-              <a:t>Telepathy</a:t>
-            </a:r>
-            <a:endParaRPr b="0" lang="en-US" sz="5000" spc="-1" strike="noStrike">
-              <a:solidFill>
-                <a:srgbClr val="000000"/>
-              </a:solidFill>
-              <a:latin typeface="Arial"/>
-            </a:endParaRPr>
-          </a:p>
-        </p:txBody>
-      </p:sp>
-      <p:sp>
-        <p:nvSpPr>
-          <p:cNvPr id="174" name="Text 2"/>
-          <p:cNvSpPr/>
-          <p:nvPr/>
-        </p:nvSpPr>
-        <p:spPr>
-          <a:xfrm>
-            <a:off x="411480" y="2621520"/>
-            <a:ext cx="4571640" cy="334440"/>
-          </a:xfrm>
-          <a:prstGeom prst="rect">
-            <a:avLst/>
-          </a:prstGeom>
-          <a:noFill/>
-          <a:ln w="12700">
-            <a:noFill/>
-          </a:ln>
-        </p:spPr>
-        <p:style>
-          <a:lnRef idx="0"/>
-          <a:fillRef idx="0"/>
-          <a:effectRef idx="0"/>
-          <a:fontRef idx="minor"/>
-        </p:style>
-        <p:txBody>
-          <a:bodyPr lIns="0" rIns="0" tIns="0" bIns="0" anchor="ctr">
-            <a:spAutoFit/>
-          </a:bodyPr>
-          <a:p>
-            <a:pPr>
-              <a:lnSpc>
-                <a:spcPct val="100000"/>
-              </a:lnSpc>
-              <a:tabLst>
-                <a:tab algn="l" pos="0"/>
-              </a:tabLst>
-            </a:pPr>
-            <a:r>
-              <a:rPr b="0" lang="en-US" sz="2200" spc="-1" strike="noStrike">
-                <a:solidFill>
-                  <a:srgbClr val="2ee5ba"/>
-                </a:solidFill>
-                <a:latin typeface="Calibri"/>
-                <a:ea typeface="Calibri"/>
-              </a:rPr>
-              <a:t>Decoding what the mind sees</a:t>
-            </a:r>
-            <a:endParaRPr b="0" lang="en-US" sz="2200" spc="-1" strike="noStrike">
-              <a:solidFill>
-                <a:srgbClr val="000000"/>
-              </a:solidFill>
-              <a:latin typeface="Arial"/>
-            </a:endParaRPr>
-          </a:p>
-        </p:txBody>
-      </p:sp>
-      <p:sp>
-        <p:nvSpPr>
-          <p:cNvPr id="175" name="Text 3"/>
-          <p:cNvSpPr/>
-          <p:nvPr/>
-        </p:nvSpPr>
-        <p:spPr>
-          <a:xfrm>
-            <a:off x="411480" y="3246120"/>
-            <a:ext cx="4571640" cy="273600"/>
-          </a:xfrm>
-          <a:prstGeom prst="rect">
-            <a:avLst/>
-          </a:prstGeom>
-          <a:noFill/>
-          <a:ln w="12700">
-            <a:noFill/>
-          </a:ln>
-        </p:spPr>
-        <p:style>
-          <a:lnRef idx="0"/>
-          <a:fillRef idx="0"/>
-          <a:effectRef idx="0"/>
-          <a:fontRef idx="minor"/>
-        </p:style>
-        <p:txBody>
-          <a:bodyPr lIns="0" rIns="0" tIns="0" bIns="0" anchor="ctr">
-            <a:spAutoFit/>
-          </a:bodyPr>
-          <a:p>
-            <a:pPr>
-              <a:lnSpc>
-                <a:spcPct val="100000"/>
-              </a:lnSpc>
-              <a:tabLst>
-                <a:tab algn="l" pos="0"/>
-              </a:tabLst>
-            </a:pPr>
-            <a:r>
-              <a:rPr b="0" lang="en-US" sz="1800" spc="-1" strike="noStrike">
-                <a:solidFill>
-                  <a:srgbClr val="94a3b8"/>
-                </a:solidFill>
-                <a:latin typeface="Calibri"/>
-                <a:ea typeface="Calibri"/>
-              </a:rPr>
-              <a:t>Thank you!</a:t>
-            </a:r>
-            <a:endParaRPr b="0" lang="en-US" sz="1800" spc="-1" strike="noStrike">
-              <a:solidFill>
-                <a:srgbClr val="000000"/>
-              </a:solidFill>
-              <a:latin typeface="Arial"/>
-            </a:endParaRPr>
-          </a:p>
-        </p:txBody>
-      </p:sp>
-      <p:sp>
-        <p:nvSpPr>
-          <p:cNvPr id="176" name="Shape 4"/>
-          <p:cNvSpPr/>
-          <p:nvPr/>
-        </p:nvSpPr>
-        <p:spPr>
-          <a:xfrm>
-            <a:off x="0" y="4800600"/>
-            <a:ext cx="9143640" cy="342720"/>
-          </a:xfrm>
-          <a:prstGeom prst="rect">
-            <a:avLst/>
-          </a:prstGeom>
-          <a:solidFill>
-            <a:srgbClr val="0f1e35">
-              <a:alpha val="75000"/>
-            </a:srgbClr>
-          </a:solidFill>
-          <a:ln w="12700">
-            <a:noFill/>
-          </a:ln>
-        </p:spPr>
-        <p:style>
-          <a:lnRef idx="0"/>
-          <a:fillRef idx="0"/>
-          <a:effectRef idx="0"/>
-          <a:fontRef idx="minor"/>
-        </p:style>
-        <p:txBody>
-          <a:bodyPr lIns="45720" rIns="45720" tIns="45000" bIns="45000" anchor="t">
-            <a:noAutofit/>
-          </a:bodyPr>
-          <a:p>
-            <a:pPr>
-              <a:lnSpc>
-                <a:spcPct val="100000"/>
-              </a:lnSpc>
-              <a:tabLst>
-                <a:tab algn="l" pos="0"/>
-              </a:tabLst>
-            </a:pPr>
-            <a:endParaRPr b="0" lang="en-US" sz="1800" spc="-1" strike="noStrike">
-              <a:solidFill>
-                <a:srgbClr val="000000"/>
-              </a:solidFill>
-              <a:latin typeface="Calibri"/>
-              <a:ea typeface="Calibri"/>
-            </a:endParaRPr>
-          </a:p>
-        </p:txBody>
-      </p:sp>
-      <p:sp>
-        <p:nvSpPr>
-          <p:cNvPr id="177" name="Text 5"/>
-          <p:cNvSpPr/>
-          <p:nvPr/>
-        </p:nvSpPr>
-        <p:spPr>
-          <a:xfrm>
-            <a:off x="365760" y="4884840"/>
-            <a:ext cx="6857640" cy="151560"/>
+            <a:ext cx="6856560" cy="151560"/>
           </a:xfrm>
           <a:prstGeom prst="rect">
             <a:avLst/>
